--- a/reports/results-ongoing.pptx
+++ b/reports/results-ongoing.pptx
@@ -5,7 +5,7 @@
     <p:sldMasterId id="2147483648" r:id="rId1"/>
   </p:sldMasterIdLst>
   <p:notesMasterIdLst>
-    <p:notesMasterId r:id="rId22"/>
+    <p:notesMasterId r:id="rId30"/>
   </p:notesMasterIdLst>
   <p:sldIdLst>
     <p:sldId id="298" r:id="rId2"/>
@@ -25,9 +25,17 @@
     <p:sldId id="323" r:id="rId16"/>
     <p:sldId id="316" r:id="rId17"/>
     <p:sldId id="326" r:id="rId18"/>
-    <p:sldId id="320" r:id="rId19"/>
-    <p:sldId id="329" r:id="rId20"/>
-    <p:sldId id="312" r:id="rId21"/>
+    <p:sldId id="334" r:id="rId19"/>
+    <p:sldId id="320" r:id="rId20"/>
+    <p:sldId id="329" r:id="rId21"/>
+    <p:sldId id="312" r:id="rId22"/>
+    <p:sldId id="335" r:id="rId23"/>
+    <p:sldId id="336" r:id="rId24"/>
+    <p:sldId id="337" r:id="rId25"/>
+    <p:sldId id="338" r:id="rId26"/>
+    <p:sldId id="339" r:id="rId27"/>
+    <p:sldId id="340" r:id="rId28"/>
+    <p:sldId id="341" r:id="rId29"/>
   </p:sldIdLst>
   <p:sldSz cx="12192000" cy="6858000"/>
   <p:notesSz cx="6858000" cy="9144000"/>
@@ -215,7 +223,7 @@
           </a:lstStyle>
           <a:p>
             <a:fld id="{91F9B552-18C9-9441-92C1-ACCAECF534DC}" type="datetimeFigureOut">
-              <a:t>6/6/25</a:t>
+              <a:t>7/11/25</a:t>
             </a:fld>
             <a:endParaRPr lang="en-US"/>
           </a:p>
@@ -591,6 +599,90 @@
 </p:notes>
 </file>
 
+<file path=ppt/notesSlides/notesSlide2.xml><?xml version="1.0" encoding="utf-8"?>
+<p:notes xmlns:a="http://schemas.openxmlformats.org/drawingml/2006/main" xmlns:r="http://schemas.openxmlformats.org/officeDocument/2006/relationships" xmlns:p="http://schemas.openxmlformats.org/presentationml/2006/main">
+  <p:cSld>
+    <p:spTree>
+      <p:nvGrpSpPr>
+        <p:cNvPr id="1" name=""/>
+        <p:cNvGrpSpPr/>
+        <p:nvPr/>
+      </p:nvGrpSpPr>
+      <p:grpSpPr>
+        <a:xfrm>
+          <a:off x="0" y="0"/>
+          <a:ext cx="0" cy="0"/>
+          <a:chOff x="0" y="0"/>
+          <a:chExt cx="0" cy="0"/>
+        </a:xfrm>
+      </p:grpSpPr>
+      <p:sp>
+        <p:nvSpPr>
+          <p:cNvPr id="2" name="Slide Image Placeholder 1"/>
+          <p:cNvSpPr>
+            <a:spLocks noGrp="1" noRot="1" noChangeAspect="1"/>
+          </p:cNvSpPr>
+          <p:nvPr>
+            <p:ph type="sldImg"/>
+          </p:nvPr>
+        </p:nvSpPr>
+        <p:spPr/>
+      </p:sp>
+      <p:sp>
+        <p:nvSpPr>
+          <p:cNvPr id="3" name="Notes Placeholder 2"/>
+          <p:cNvSpPr>
+            <a:spLocks noGrp="1"/>
+          </p:cNvSpPr>
+          <p:nvPr>
+            <p:ph type="body" idx="1"/>
+          </p:nvPr>
+        </p:nvSpPr>
+        <p:spPr/>
+        <p:txBody>
+          <a:bodyPr/>
+          <a:lstStyle/>
+          <a:p>
+            <a:endParaRPr lang="en-US"/>
+          </a:p>
+        </p:txBody>
+      </p:sp>
+      <p:sp>
+        <p:nvSpPr>
+          <p:cNvPr id="4" name="Slide Number Placeholder 3"/>
+          <p:cNvSpPr>
+            <a:spLocks noGrp="1"/>
+          </p:cNvSpPr>
+          <p:nvPr>
+            <p:ph type="sldNum" sz="quarter" idx="5"/>
+          </p:nvPr>
+        </p:nvSpPr>
+        <p:spPr/>
+        <p:txBody>
+          <a:bodyPr/>
+          <a:lstStyle/>
+          <a:p>
+            <a:fld id="{108D09E5-0668-2744-8BB3-50BEC0AA9097}" type="slidenum">
+              <a:rPr lang="en-US"/>
+              <a:t>19</a:t>
+            </a:fld>
+            <a:endParaRPr lang="en-US"/>
+          </a:p>
+        </p:txBody>
+      </p:sp>
+    </p:spTree>
+    <p:extLst>
+      <p:ext uri="{BB962C8B-B14F-4D97-AF65-F5344CB8AC3E}">
+        <p14:creationId xmlns:p14="http://schemas.microsoft.com/office/powerpoint/2010/main" val="476526690"/>
+      </p:ext>
+    </p:extLst>
+  </p:cSld>
+  <p:clrMapOvr>
+    <a:masterClrMapping/>
+  </p:clrMapOvr>
+</p:notes>
+</file>
+
 <file path=ppt/slideLayouts/slideLayout1.xml><?xml version="1.0" encoding="utf-8"?>
 <p:sldLayout xmlns:a="http://schemas.openxmlformats.org/drawingml/2006/main" xmlns:r="http://schemas.openxmlformats.org/officeDocument/2006/relationships" xmlns:p="http://schemas.openxmlformats.org/presentationml/2006/main" type="title" preserve="1">
   <p:cSld name="Title Slide">
@@ -737,7 +829,7 @@
           <a:lstStyle/>
           <a:p>
             <a:fld id="{DF70EF73-FF66-D34F-8F38-81D2C270D667}" type="datetimeFigureOut">
-              <a:t>6/6/25</a:t>
+              <a:t>7/11/25</a:t>
             </a:fld>
             <a:endParaRPr lang="en-US"/>
           </a:p>
@@ -933,7 +1025,7 @@
           <a:lstStyle/>
           <a:p>
             <a:fld id="{DF70EF73-FF66-D34F-8F38-81D2C270D667}" type="datetimeFigureOut">
-              <a:t>6/6/25</a:t>
+              <a:t>7/11/25</a:t>
             </a:fld>
             <a:endParaRPr lang="en-US"/>
           </a:p>
@@ -1139,7 +1231,7 @@
           <a:lstStyle/>
           <a:p>
             <a:fld id="{DF70EF73-FF66-D34F-8F38-81D2C270D667}" type="datetimeFigureOut">
-              <a:t>6/6/25</a:t>
+              <a:t>7/11/25</a:t>
             </a:fld>
             <a:endParaRPr lang="en-US"/>
           </a:p>
@@ -1335,7 +1427,7 @@
           <a:lstStyle/>
           <a:p>
             <a:fld id="{DF70EF73-FF66-D34F-8F38-81D2C270D667}" type="datetimeFigureOut">
-              <a:t>6/6/25</a:t>
+              <a:t>7/11/25</a:t>
             </a:fld>
             <a:endParaRPr lang="en-US"/>
           </a:p>
@@ -1608,7 +1700,7 @@
           <a:lstStyle/>
           <a:p>
             <a:fld id="{DF70EF73-FF66-D34F-8F38-81D2C270D667}" type="datetimeFigureOut">
-              <a:t>6/6/25</a:t>
+              <a:t>7/11/25</a:t>
             </a:fld>
             <a:endParaRPr lang="en-US"/>
           </a:p>
@@ -1871,7 +1963,7 @@
           <a:lstStyle/>
           <a:p>
             <a:fld id="{DF70EF73-FF66-D34F-8F38-81D2C270D667}" type="datetimeFigureOut">
-              <a:t>6/6/25</a:t>
+              <a:t>7/11/25</a:t>
             </a:fld>
             <a:endParaRPr lang="en-US"/>
           </a:p>
@@ -2281,7 +2373,7 @@
           <a:lstStyle/>
           <a:p>
             <a:fld id="{DF70EF73-FF66-D34F-8F38-81D2C270D667}" type="datetimeFigureOut">
-              <a:t>6/6/25</a:t>
+              <a:t>7/11/25</a:t>
             </a:fld>
             <a:endParaRPr lang="en-US"/>
           </a:p>
@@ -2420,7 +2512,7 @@
           <a:lstStyle/>
           <a:p>
             <a:fld id="{DF70EF73-FF66-D34F-8F38-81D2C270D667}" type="datetimeFigureOut">
-              <a:t>6/6/25</a:t>
+              <a:t>7/11/25</a:t>
             </a:fld>
             <a:endParaRPr lang="en-US"/>
           </a:p>
@@ -2531,7 +2623,7 @@
           <a:lstStyle/>
           <a:p>
             <a:fld id="{DF70EF73-FF66-D34F-8F38-81D2C270D667}" type="datetimeFigureOut">
-              <a:t>6/6/25</a:t>
+              <a:t>7/11/25</a:t>
             </a:fld>
             <a:endParaRPr lang="en-US"/>
           </a:p>
@@ -2840,7 +2932,7 @@
           <a:lstStyle/>
           <a:p>
             <a:fld id="{DF70EF73-FF66-D34F-8F38-81D2C270D667}" type="datetimeFigureOut">
-              <a:t>6/6/25</a:t>
+              <a:t>7/11/25</a:t>
             </a:fld>
             <a:endParaRPr lang="en-US"/>
           </a:p>
@@ -3126,7 +3218,7 @@
           <a:lstStyle/>
           <a:p>
             <a:fld id="{DF70EF73-FF66-D34F-8F38-81D2C270D667}" type="datetimeFigureOut">
-              <a:t>6/6/25</a:t>
+              <a:t>7/11/25</a:t>
             </a:fld>
             <a:endParaRPr lang="en-US"/>
           </a:p>
@@ -3365,7 +3457,7 @@
           </a:lstStyle>
           <a:p>
             <a:fld id="{DF70EF73-FF66-D34F-8F38-81D2C270D667}" type="datetimeFigureOut">
-              <a:t>6/6/25</a:t>
+              <a:t>7/11/25</a:t>
             </a:fld>
             <a:endParaRPr lang="en-US"/>
           </a:p>
@@ -6656,7 +6748,7 @@
 </file>
 
 <file path=ppt/slides/slide15.xml><?xml version="1.0" encoding="utf-8"?>
-<p:sld xmlns:a="http://schemas.openxmlformats.org/drawingml/2006/main" xmlns:r="http://schemas.openxmlformats.org/officeDocument/2006/relationships" xmlns:p="http://schemas.openxmlformats.org/presentationml/2006/main">
+<p:sld xmlns:a="http://schemas.openxmlformats.org/drawingml/2006/main" xmlns:r="http://schemas.openxmlformats.org/officeDocument/2006/relationships" xmlns:p="http://schemas.openxmlformats.org/presentationml/2006/main" show="0">
   <p:cSld>
     <p:spTree>
       <p:nvGrpSpPr>
@@ -6717,7 +6809,7 @@
 </file>
 
 <file path=ppt/slides/slide16.xml><?xml version="1.0" encoding="utf-8"?>
-<p:sld xmlns:a="http://schemas.openxmlformats.org/drawingml/2006/main" xmlns:r="http://schemas.openxmlformats.org/officeDocument/2006/relationships" xmlns:p="http://schemas.openxmlformats.org/presentationml/2006/main">
+<p:sld xmlns:a="http://schemas.openxmlformats.org/drawingml/2006/main" xmlns:r="http://schemas.openxmlformats.org/officeDocument/2006/relationships" xmlns:p="http://schemas.openxmlformats.org/presentationml/2006/main" show="0">
   <p:cSld>
     <p:spTree>
       <p:nvGrpSpPr>
@@ -7173,6 +7265,2137 @@
 </file>
 
 <file path=ppt/slides/slide17.xml><?xml version="1.0" encoding="utf-8"?>
+<p:sld xmlns:a="http://schemas.openxmlformats.org/drawingml/2006/main" xmlns:r="http://schemas.openxmlformats.org/officeDocument/2006/relationships" xmlns:p="http://schemas.openxmlformats.org/presentationml/2006/main" show="0">
+  <p:cSld>
+    <p:spTree>
+      <p:nvGrpSpPr>
+        <p:cNvPr id="1" name=""/>
+        <p:cNvGrpSpPr/>
+        <p:nvPr/>
+      </p:nvGrpSpPr>
+      <p:grpSpPr>
+        <a:xfrm>
+          <a:off x="0" y="0"/>
+          <a:ext cx="0" cy="0"/>
+          <a:chOff x="0" y="0"/>
+          <a:chExt cx="0" cy="0"/>
+        </a:xfrm>
+      </p:grpSpPr>
+      <p:pic>
+        <p:nvPicPr>
+          <p:cNvPr id="2" name="Picture 1">
+            <a:extLst>
+              <a:ext uri="{FF2B5EF4-FFF2-40B4-BE49-F238E27FC236}">
+                <a16:creationId xmlns:a16="http://schemas.microsoft.com/office/drawing/2014/main" id="{2F44EC26-71E9-6F62-3542-F59962E5BB28}"/>
+              </a:ext>
+            </a:extLst>
+          </p:cNvPr>
+          <p:cNvPicPr>
+            <a:picLocks noChangeAspect="1"/>
+          </p:cNvPicPr>
+          <p:nvPr/>
+        </p:nvPicPr>
+        <p:blipFill>
+          <a:blip r:embed="rId2"/>
+          <a:stretch>
+            <a:fillRect/>
+          </a:stretch>
+        </p:blipFill>
+        <p:spPr>
+          <a:xfrm>
+            <a:off x="216383" y="1892558"/>
+            <a:ext cx="11630025" cy="4965442"/>
+          </a:xfrm>
+          <a:prstGeom prst="rect">
+            <a:avLst/>
+          </a:prstGeom>
+        </p:spPr>
+      </p:pic>
+      <p:pic>
+        <p:nvPicPr>
+          <p:cNvPr id="3" name="Picture 2">
+            <a:extLst>
+              <a:ext uri="{FF2B5EF4-FFF2-40B4-BE49-F238E27FC236}">
+                <a16:creationId xmlns:a16="http://schemas.microsoft.com/office/drawing/2014/main" id="{08F96B11-729F-D5E6-EAEE-A750CCF37DCD}"/>
+              </a:ext>
+            </a:extLst>
+          </p:cNvPr>
+          <p:cNvPicPr>
+            <a:picLocks noChangeAspect="1"/>
+          </p:cNvPicPr>
+          <p:nvPr/>
+        </p:nvPicPr>
+        <p:blipFill>
+          <a:blip r:embed="rId3"/>
+          <a:srcRect b="69120"/>
+          <a:stretch>
+            <a:fillRect/>
+          </a:stretch>
+        </p:blipFill>
+        <p:spPr>
+          <a:xfrm>
+            <a:off x="178719" y="557399"/>
+            <a:ext cx="3758614" cy="1085871"/>
+          </a:xfrm>
+          <a:prstGeom prst="rect">
+            <a:avLst/>
+          </a:prstGeom>
+        </p:spPr>
+      </p:pic>
+      <p:pic>
+        <p:nvPicPr>
+          <p:cNvPr id="4" name="Picture 3">
+            <a:extLst>
+              <a:ext uri="{FF2B5EF4-FFF2-40B4-BE49-F238E27FC236}">
+                <a16:creationId xmlns:a16="http://schemas.microsoft.com/office/drawing/2014/main" id="{E3E06D8B-8643-B18D-3848-D59BD7EED978}"/>
+              </a:ext>
+            </a:extLst>
+          </p:cNvPr>
+          <p:cNvPicPr>
+            <a:picLocks noChangeAspect="1"/>
+          </p:cNvPicPr>
+          <p:nvPr/>
+        </p:nvPicPr>
+        <p:blipFill>
+          <a:blip r:embed="rId3"/>
+          <a:srcRect t="31657" b="37463"/>
+          <a:stretch>
+            <a:fillRect/>
+          </a:stretch>
+        </p:blipFill>
+        <p:spPr>
+          <a:xfrm>
+            <a:off x="4233884" y="597156"/>
+            <a:ext cx="3758614" cy="1085871"/>
+          </a:xfrm>
+          <a:prstGeom prst="rect">
+            <a:avLst/>
+          </a:prstGeom>
+        </p:spPr>
+      </p:pic>
+      <p:pic>
+        <p:nvPicPr>
+          <p:cNvPr id="5" name="Picture 4">
+            <a:extLst>
+              <a:ext uri="{FF2B5EF4-FFF2-40B4-BE49-F238E27FC236}">
+                <a16:creationId xmlns:a16="http://schemas.microsoft.com/office/drawing/2014/main" id="{319E5290-9F71-2F51-CD8F-FEE3839F71E1}"/>
+              </a:ext>
+            </a:extLst>
+          </p:cNvPr>
+          <p:cNvPicPr>
+            <a:picLocks noChangeAspect="1"/>
+          </p:cNvPicPr>
+          <p:nvPr/>
+        </p:nvPicPr>
+        <p:blipFill>
+          <a:blip r:embed="rId3"/>
+          <a:srcRect l="1233" t="63602" r="-1233" b="6971"/>
+          <a:stretch>
+            <a:fillRect/>
+          </a:stretch>
+        </p:blipFill>
+        <p:spPr>
+          <a:xfrm>
+            <a:off x="8110002" y="603259"/>
+            <a:ext cx="3758614" cy="1034768"/>
+          </a:xfrm>
+          <a:prstGeom prst="rect">
+            <a:avLst/>
+          </a:prstGeom>
+        </p:spPr>
+      </p:pic>
+    </p:spTree>
+    <p:extLst>
+      <p:ext uri="{BB962C8B-B14F-4D97-AF65-F5344CB8AC3E}">
+        <p14:creationId xmlns:p14="http://schemas.microsoft.com/office/powerpoint/2010/main" val="627302401"/>
+      </p:ext>
+    </p:extLst>
+  </p:cSld>
+  <p:clrMapOvr>
+    <a:masterClrMapping/>
+  </p:clrMapOvr>
+</p:sld>
+</file>
+
+<file path=ppt/slides/slide18.xml><?xml version="1.0" encoding="utf-8"?>
+<p:sld xmlns:a="http://schemas.openxmlformats.org/drawingml/2006/main" xmlns:r="http://schemas.openxmlformats.org/officeDocument/2006/relationships" xmlns:p="http://schemas.openxmlformats.org/presentationml/2006/main">
+  <p:cSld>
+    <p:spTree>
+      <p:nvGrpSpPr>
+        <p:cNvPr id="1" name="">
+          <a:extLst>
+            <a:ext uri="{FF2B5EF4-FFF2-40B4-BE49-F238E27FC236}">
+              <a16:creationId xmlns:a16="http://schemas.microsoft.com/office/drawing/2014/main" id="{6F29704A-0B1E-DEB4-F5A3-0A721D9DFFEA}"/>
+            </a:ext>
+          </a:extLst>
+        </p:cNvPr>
+        <p:cNvGrpSpPr/>
+        <p:nvPr/>
+      </p:nvGrpSpPr>
+      <p:grpSpPr>
+        <a:xfrm>
+          <a:off x="0" y="0"/>
+          <a:ext cx="0" cy="0"/>
+          <a:chOff x="0" y="0"/>
+          <a:chExt cx="0" cy="0"/>
+        </a:xfrm>
+      </p:grpSpPr>
+      <p:sp>
+        <p:nvSpPr>
+          <p:cNvPr id="2" name="TextBox 1">
+            <a:extLst>
+              <a:ext uri="{FF2B5EF4-FFF2-40B4-BE49-F238E27FC236}">
+                <a16:creationId xmlns:a16="http://schemas.microsoft.com/office/drawing/2014/main" id="{6392FB47-26D6-BE4E-B2EB-4A37C1E46B2F}"/>
+              </a:ext>
+            </a:extLst>
+          </p:cNvPr>
+          <p:cNvSpPr txBox="1"/>
+          <p:nvPr/>
+        </p:nvSpPr>
+        <p:spPr>
+          <a:xfrm>
+            <a:off x="728105" y="3167798"/>
+            <a:ext cx="1698542" cy="369332"/>
+          </a:xfrm>
+          <a:prstGeom prst="rect">
+            <a:avLst/>
+          </a:prstGeom>
+          <a:noFill/>
+        </p:spPr>
+        <p:txBody>
+          <a:bodyPr wrap="none" rtlCol="0">
+            <a:spAutoFit/>
+          </a:bodyPr>
+          <a:lstStyle/>
+          <a:p>
+            <a:pPr algn="l"/>
+            <a:r>
+              <a:rPr lang="en-US">
+                <a:latin typeface="Avenir Book" panose="02000503020000020003" pitchFamily="2" charset="0"/>
+              </a:rPr>
+              <a:t>screening data</a:t>
+            </a:r>
+          </a:p>
+        </p:txBody>
+      </p:sp>
+      <p:cxnSp>
+        <p:nvCxnSpPr>
+          <p:cNvPr id="4" name="Straight Arrow Connector 3">
+            <a:extLst>
+              <a:ext uri="{FF2B5EF4-FFF2-40B4-BE49-F238E27FC236}">
+                <a16:creationId xmlns:a16="http://schemas.microsoft.com/office/drawing/2014/main" id="{EB3DD07F-2567-4AE3-D86F-0095DE124DCC}"/>
+              </a:ext>
+            </a:extLst>
+          </p:cNvPr>
+          <p:cNvCxnSpPr/>
+          <p:nvPr/>
+        </p:nvCxnSpPr>
+        <p:spPr>
+          <a:xfrm flipV="1">
+            <a:off x="2158698" y="2253398"/>
+            <a:ext cx="870155" cy="766916"/>
+          </a:xfrm>
+          <a:prstGeom prst="straightConnector1">
+            <a:avLst/>
+          </a:prstGeom>
+          <a:ln>
+            <a:tailEnd type="triangle"/>
+          </a:ln>
+        </p:spPr>
+        <p:style>
+          <a:lnRef idx="1">
+            <a:schemeClr val="accent1"/>
+          </a:lnRef>
+          <a:fillRef idx="0">
+            <a:schemeClr val="accent1"/>
+          </a:fillRef>
+          <a:effectRef idx="0">
+            <a:schemeClr val="accent1"/>
+          </a:effectRef>
+          <a:fontRef idx="minor">
+            <a:schemeClr val="tx1"/>
+          </a:fontRef>
+        </p:style>
+      </p:cxnSp>
+      <p:cxnSp>
+        <p:nvCxnSpPr>
+          <p:cNvPr id="5" name="Straight Arrow Connector 4">
+            <a:extLst>
+              <a:ext uri="{FF2B5EF4-FFF2-40B4-BE49-F238E27FC236}">
+                <a16:creationId xmlns:a16="http://schemas.microsoft.com/office/drawing/2014/main" id="{280C03CB-289D-0E72-06AB-9B81EE802F23}"/>
+              </a:ext>
+            </a:extLst>
+          </p:cNvPr>
+          <p:cNvCxnSpPr>
+            <a:cxnSpLocks/>
+          </p:cNvCxnSpPr>
+          <p:nvPr/>
+        </p:nvCxnSpPr>
+        <p:spPr>
+          <a:xfrm>
+            <a:off x="2129201" y="3639746"/>
+            <a:ext cx="899652" cy="899652"/>
+          </a:xfrm>
+          <a:prstGeom prst="straightConnector1">
+            <a:avLst/>
+          </a:prstGeom>
+          <a:ln>
+            <a:tailEnd type="triangle"/>
+          </a:ln>
+        </p:spPr>
+        <p:style>
+          <a:lnRef idx="1">
+            <a:schemeClr val="accent1"/>
+          </a:lnRef>
+          <a:fillRef idx="0">
+            <a:schemeClr val="accent1"/>
+          </a:fillRef>
+          <a:effectRef idx="0">
+            <a:schemeClr val="accent1"/>
+          </a:effectRef>
+          <a:fontRef idx="minor">
+            <a:schemeClr val="tx1"/>
+          </a:fontRef>
+        </p:style>
+      </p:cxnSp>
+      <p:sp>
+        <p:nvSpPr>
+          <p:cNvPr id="7" name="TextBox 6">
+            <a:extLst>
+              <a:ext uri="{FF2B5EF4-FFF2-40B4-BE49-F238E27FC236}">
+                <a16:creationId xmlns:a16="http://schemas.microsoft.com/office/drawing/2014/main" id="{9B13E961-2A58-AA9F-C87A-BB2E198A1EF8}"/>
+              </a:ext>
+            </a:extLst>
+          </p:cNvPr>
+          <p:cNvSpPr txBox="1"/>
+          <p:nvPr/>
+        </p:nvSpPr>
+        <p:spPr>
+          <a:xfrm>
+            <a:off x="2969860" y="4790122"/>
+            <a:ext cx="1601721" cy="646331"/>
+          </a:xfrm>
+          <a:prstGeom prst="rect">
+            <a:avLst/>
+          </a:prstGeom>
+          <a:noFill/>
+        </p:spPr>
+        <p:txBody>
+          <a:bodyPr wrap="none" rtlCol="0">
+            <a:spAutoFit/>
+          </a:bodyPr>
+          <a:lstStyle/>
+          <a:p>
+            <a:pPr algn="ctr"/>
+            <a:r>
+              <a:rPr lang="en-US">
+                <a:latin typeface="Avenir Book" panose="02000503020000020003" pitchFamily="2" charset="0"/>
+              </a:rPr>
+              <a:t>[FWY]xx[FWY]</a:t>
+            </a:r>
+          </a:p>
+          <a:p>
+            <a:pPr algn="ctr"/>
+            <a:r>
+              <a:rPr lang="en-US">
+                <a:latin typeface="Avenir Book" panose="02000503020000020003" pitchFamily="2" charset="0"/>
+              </a:rPr>
+              <a:t>sequences</a:t>
+            </a:r>
+          </a:p>
+        </p:txBody>
+      </p:sp>
+      <p:sp>
+        <p:nvSpPr>
+          <p:cNvPr id="8" name="TextBox 7">
+            <a:extLst>
+              <a:ext uri="{FF2B5EF4-FFF2-40B4-BE49-F238E27FC236}">
+                <a16:creationId xmlns:a16="http://schemas.microsoft.com/office/drawing/2014/main" id="{E8DB3D0F-1379-48FE-9F97-87793C3A80EC}"/>
+              </a:ext>
+            </a:extLst>
+          </p:cNvPr>
+          <p:cNvSpPr txBox="1"/>
+          <p:nvPr/>
+        </p:nvSpPr>
+        <p:spPr>
+          <a:xfrm>
+            <a:off x="3102595" y="1707709"/>
+            <a:ext cx="1418593" cy="646331"/>
+          </a:xfrm>
+          <a:prstGeom prst="rect">
+            <a:avLst/>
+          </a:prstGeom>
+          <a:noFill/>
+        </p:spPr>
+        <p:txBody>
+          <a:bodyPr wrap="none" rtlCol="0">
+            <a:spAutoFit/>
+          </a:bodyPr>
+          <a:lstStyle/>
+          <a:p>
+            <a:pPr algn="ctr"/>
+            <a:r>
+              <a:rPr lang="en-US">
+                <a:latin typeface="Avenir Book" panose="02000503020000020003" pitchFamily="2" charset="0"/>
+              </a:rPr>
+              <a:t>[FWY]xx[LVI]</a:t>
+            </a:r>
+          </a:p>
+          <a:p>
+            <a:pPr algn="ctr"/>
+            <a:r>
+              <a:rPr lang="en-US">
+                <a:latin typeface="Avenir Book" panose="02000503020000020003" pitchFamily="2" charset="0"/>
+              </a:rPr>
+              <a:t>sequences</a:t>
+            </a:r>
+          </a:p>
+        </p:txBody>
+      </p:sp>
+      <p:cxnSp>
+        <p:nvCxnSpPr>
+          <p:cNvPr id="11" name="Straight Arrow Connector 10">
+            <a:extLst>
+              <a:ext uri="{FF2B5EF4-FFF2-40B4-BE49-F238E27FC236}">
+                <a16:creationId xmlns:a16="http://schemas.microsoft.com/office/drawing/2014/main" id="{87638ECB-0E3C-1667-1F8F-9B824CCC569E}"/>
+              </a:ext>
+            </a:extLst>
+          </p:cNvPr>
+          <p:cNvCxnSpPr>
+            <a:cxnSpLocks/>
+          </p:cNvCxnSpPr>
+          <p:nvPr/>
+        </p:nvCxnSpPr>
+        <p:spPr>
+          <a:xfrm>
+            <a:off x="4695419" y="5188327"/>
+            <a:ext cx="1297860" cy="634181"/>
+          </a:xfrm>
+          <a:prstGeom prst="straightConnector1">
+            <a:avLst/>
+          </a:prstGeom>
+          <a:ln>
+            <a:tailEnd type="triangle"/>
+          </a:ln>
+        </p:spPr>
+        <p:style>
+          <a:lnRef idx="1">
+            <a:schemeClr val="accent1"/>
+          </a:lnRef>
+          <a:fillRef idx="0">
+            <a:schemeClr val="accent1"/>
+          </a:fillRef>
+          <a:effectRef idx="0">
+            <a:schemeClr val="accent1"/>
+          </a:effectRef>
+          <a:fontRef idx="minor">
+            <a:schemeClr val="tx1"/>
+          </a:fontRef>
+        </p:style>
+      </p:cxnSp>
+      <p:sp>
+        <p:nvSpPr>
+          <p:cNvPr id="13" name="TextBox 12">
+            <a:extLst>
+              <a:ext uri="{FF2B5EF4-FFF2-40B4-BE49-F238E27FC236}">
+                <a16:creationId xmlns:a16="http://schemas.microsoft.com/office/drawing/2014/main" id="{FDB34DF5-E11B-4EC5-1CDF-A48F3AA61A83}"/>
+              </a:ext>
+            </a:extLst>
+          </p:cNvPr>
+          <p:cNvSpPr txBox="1"/>
+          <p:nvPr/>
+        </p:nvSpPr>
+        <p:spPr>
+          <a:xfrm>
+            <a:off x="3515551" y="5483295"/>
+            <a:ext cx="559769" cy="369332"/>
+          </a:xfrm>
+          <a:prstGeom prst="rect">
+            <a:avLst/>
+          </a:prstGeom>
+          <a:noFill/>
+        </p:spPr>
+        <p:txBody>
+          <a:bodyPr wrap="none" rtlCol="0">
+            <a:spAutoFit/>
+          </a:bodyPr>
+          <a:lstStyle/>
+          <a:p>
+            <a:pPr algn="l"/>
+            <a:r>
+              <a:rPr lang="en-US">
+                <a:latin typeface="Avenir Book" panose="02000503020000020003" pitchFamily="2" charset="0"/>
+              </a:rPr>
+              <a:t>(66)</a:t>
+            </a:r>
+          </a:p>
+        </p:txBody>
+      </p:sp>
+      <p:sp>
+        <p:nvSpPr>
+          <p:cNvPr id="14" name="TextBox 13">
+            <a:extLst>
+              <a:ext uri="{FF2B5EF4-FFF2-40B4-BE49-F238E27FC236}">
+                <a16:creationId xmlns:a16="http://schemas.microsoft.com/office/drawing/2014/main" id="{C2BC1759-F936-6AFF-3F91-560FFF6A1BAA}"/>
+              </a:ext>
+            </a:extLst>
+          </p:cNvPr>
+          <p:cNvSpPr txBox="1"/>
+          <p:nvPr/>
+        </p:nvSpPr>
+        <p:spPr>
+          <a:xfrm>
+            <a:off x="3427059" y="2430380"/>
+            <a:ext cx="688009" cy="369332"/>
+          </a:xfrm>
+          <a:prstGeom prst="rect">
+            <a:avLst/>
+          </a:prstGeom>
+          <a:noFill/>
+        </p:spPr>
+        <p:txBody>
+          <a:bodyPr wrap="none" rtlCol="0">
+            <a:spAutoFit/>
+          </a:bodyPr>
+          <a:lstStyle/>
+          <a:p>
+            <a:pPr algn="l"/>
+            <a:r>
+              <a:rPr lang="en-US">
+                <a:latin typeface="Avenir Book" panose="02000503020000020003" pitchFamily="2" charset="0"/>
+              </a:rPr>
+              <a:t>(212)</a:t>
+            </a:r>
+          </a:p>
+        </p:txBody>
+      </p:sp>
+      <p:cxnSp>
+        <p:nvCxnSpPr>
+          <p:cNvPr id="16" name="Straight Arrow Connector 15">
+            <a:extLst>
+              <a:ext uri="{FF2B5EF4-FFF2-40B4-BE49-F238E27FC236}">
+                <a16:creationId xmlns:a16="http://schemas.microsoft.com/office/drawing/2014/main" id="{201EBE49-5631-E0D4-817E-C59057F17C92}"/>
+              </a:ext>
+            </a:extLst>
+          </p:cNvPr>
+          <p:cNvCxnSpPr>
+            <a:cxnSpLocks/>
+          </p:cNvCxnSpPr>
+          <p:nvPr/>
+        </p:nvCxnSpPr>
+        <p:spPr>
+          <a:xfrm flipV="1">
+            <a:off x="4695419" y="4347669"/>
+            <a:ext cx="1209370" cy="619432"/>
+          </a:xfrm>
+          <a:prstGeom prst="straightConnector1">
+            <a:avLst/>
+          </a:prstGeom>
+          <a:ln>
+            <a:tailEnd type="triangle"/>
+          </a:ln>
+        </p:spPr>
+        <p:style>
+          <a:lnRef idx="1">
+            <a:schemeClr val="accent1"/>
+          </a:lnRef>
+          <a:fillRef idx="0">
+            <a:schemeClr val="accent1"/>
+          </a:fillRef>
+          <a:effectRef idx="0">
+            <a:schemeClr val="accent1"/>
+          </a:effectRef>
+          <a:fontRef idx="minor">
+            <a:schemeClr val="tx1"/>
+          </a:fontRef>
+        </p:style>
+      </p:cxnSp>
+      <p:sp>
+        <p:nvSpPr>
+          <p:cNvPr id="18" name="TextBox 17">
+            <a:extLst>
+              <a:ext uri="{FF2B5EF4-FFF2-40B4-BE49-F238E27FC236}">
+                <a16:creationId xmlns:a16="http://schemas.microsoft.com/office/drawing/2014/main" id="{478CC690-1ACB-15F4-54F9-FBB8CFA5B363}"/>
+              </a:ext>
+            </a:extLst>
+          </p:cNvPr>
+          <p:cNvSpPr txBox="1"/>
+          <p:nvPr/>
+        </p:nvSpPr>
+        <p:spPr>
+          <a:xfrm>
+            <a:off x="5919536" y="4126444"/>
+            <a:ext cx="883575" cy="369332"/>
+          </a:xfrm>
+          <a:prstGeom prst="rect">
+            <a:avLst/>
+          </a:prstGeom>
+          <a:noFill/>
+        </p:spPr>
+        <p:txBody>
+          <a:bodyPr wrap="none" rtlCol="0">
+            <a:spAutoFit/>
+          </a:bodyPr>
+          <a:lstStyle/>
+          <a:p>
+            <a:pPr algn="l"/>
+            <a:r>
+              <a:rPr lang="en-US">
+                <a:latin typeface="Avenir Book" panose="02000503020000020003" pitchFamily="2" charset="0"/>
+              </a:rPr>
+              <a:t>“train”</a:t>
+            </a:r>
+          </a:p>
+        </p:txBody>
+      </p:sp>
+      <p:sp>
+        <p:nvSpPr>
+          <p:cNvPr id="19" name="TextBox 18">
+            <a:extLst>
+              <a:ext uri="{FF2B5EF4-FFF2-40B4-BE49-F238E27FC236}">
+                <a16:creationId xmlns:a16="http://schemas.microsoft.com/office/drawing/2014/main" id="{1AC90048-5662-6C3C-FF1C-B573E639034D}"/>
+              </a:ext>
+            </a:extLst>
+          </p:cNvPr>
+          <p:cNvSpPr txBox="1"/>
+          <p:nvPr/>
+        </p:nvSpPr>
+        <p:spPr>
+          <a:xfrm>
+            <a:off x="5543452" y="5869211"/>
+            <a:ext cx="2045753" cy="369332"/>
+          </a:xfrm>
+          <a:prstGeom prst="rect">
+            <a:avLst/>
+          </a:prstGeom>
+          <a:noFill/>
+        </p:spPr>
+        <p:txBody>
+          <a:bodyPr wrap="none" rtlCol="0">
+            <a:spAutoFit/>
+          </a:bodyPr>
+          <a:lstStyle/>
+          <a:p>
+            <a:r>
+              <a:rPr lang="en-US">
+                <a:latin typeface="Avenir Book" panose="02000503020000020003" pitchFamily="2" charset="0"/>
+              </a:rPr>
+              <a:t>[FWY]xx[FWY] test</a:t>
+            </a:r>
+          </a:p>
+        </p:txBody>
+      </p:sp>
+      <p:cxnSp>
+        <p:nvCxnSpPr>
+          <p:cNvPr id="20" name="Straight Arrow Connector 19">
+            <a:extLst>
+              <a:ext uri="{FF2B5EF4-FFF2-40B4-BE49-F238E27FC236}">
+                <a16:creationId xmlns:a16="http://schemas.microsoft.com/office/drawing/2014/main" id="{39416AE8-8CF7-320E-F955-AF003519F46F}"/>
+              </a:ext>
+            </a:extLst>
+          </p:cNvPr>
+          <p:cNvCxnSpPr>
+            <a:cxnSpLocks/>
+          </p:cNvCxnSpPr>
+          <p:nvPr/>
+        </p:nvCxnSpPr>
+        <p:spPr>
+          <a:xfrm flipV="1">
+            <a:off x="4739664" y="1221011"/>
+            <a:ext cx="1209370" cy="619432"/>
+          </a:xfrm>
+          <a:prstGeom prst="straightConnector1">
+            <a:avLst/>
+          </a:prstGeom>
+          <a:ln>
+            <a:tailEnd type="triangle"/>
+          </a:ln>
+        </p:spPr>
+        <p:style>
+          <a:lnRef idx="1">
+            <a:schemeClr val="accent1"/>
+          </a:lnRef>
+          <a:fillRef idx="0">
+            <a:schemeClr val="accent1"/>
+          </a:fillRef>
+          <a:effectRef idx="0">
+            <a:schemeClr val="accent1"/>
+          </a:effectRef>
+          <a:fontRef idx="minor">
+            <a:schemeClr val="tx1"/>
+          </a:fontRef>
+        </p:style>
+      </p:cxnSp>
+      <p:cxnSp>
+        <p:nvCxnSpPr>
+          <p:cNvPr id="21" name="Straight Arrow Connector 20">
+            <a:extLst>
+              <a:ext uri="{FF2B5EF4-FFF2-40B4-BE49-F238E27FC236}">
+                <a16:creationId xmlns:a16="http://schemas.microsoft.com/office/drawing/2014/main" id="{0FFC3A78-A932-7491-523C-73A668EBCF2E}"/>
+              </a:ext>
+            </a:extLst>
+          </p:cNvPr>
+          <p:cNvCxnSpPr>
+            <a:cxnSpLocks/>
+          </p:cNvCxnSpPr>
+          <p:nvPr/>
+        </p:nvCxnSpPr>
+        <p:spPr>
+          <a:xfrm>
+            <a:off x="4754412" y="2076418"/>
+            <a:ext cx="1194622" cy="339213"/>
+          </a:xfrm>
+          <a:prstGeom prst="straightConnector1">
+            <a:avLst/>
+          </a:prstGeom>
+          <a:ln>
+            <a:tailEnd type="triangle"/>
+          </a:ln>
+        </p:spPr>
+        <p:style>
+          <a:lnRef idx="1">
+            <a:schemeClr val="accent1"/>
+          </a:lnRef>
+          <a:fillRef idx="0">
+            <a:schemeClr val="accent1"/>
+          </a:fillRef>
+          <a:effectRef idx="0">
+            <a:schemeClr val="accent1"/>
+          </a:effectRef>
+          <a:fontRef idx="minor">
+            <a:schemeClr val="tx1"/>
+          </a:fontRef>
+        </p:style>
+      </p:cxnSp>
+      <p:sp>
+        <p:nvSpPr>
+          <p:cNvPr id="24" name="TextBox 23">
+            <a:extLst>
+              <a:ext uri="{FF2B5EF4-FFF2-40B4-BE49-F238E27FC236}">
+                <a16:creationId xmlns:a16="http://schemas.microsoft.com/office/drawing/2014/main" id="{62E717D1-E022-47DE-47B3-CF29A0F99630}"/>
+              </a:ext>
+            </a:extLst>
+          </p:cNvPr>
+          <p:cNvSpPr txBox="1"/>
+          <p:nvPr/>
+        </p:nvSpPr>
+        <p:spPr>
+          <a:xfrm>
+            <a:off x="5998193" y="2332056"/>
+            <a:ext cx="883575" cy="369332"/>
+          </a:xfrm>
+          <a:prstGeom prst="rect">
+            <a:avLst/>
+          </a:prstGeom>
+          <a:noFill/>
+        </p:spPr>
+        <p:txBody>
+          <a:bodyPr wrap="none" rtlCol="0">
+            <a:spAutoFit/>
+          </a:bodyPr>
+          <a:lstStyle/>
+          <a:p>
+            <a:pPr algn="l"/>
+            <a:r>
+              <a:rPr lang="en-US">
+                <a:latin typeface="Avenir Book" panose="02000503020000020003" pitchFamily="2" charset="0"/>
+              </a:rPr>
+              <a:t>“train”</a:t>
+            </a:r>
+          </a:p>
+        </p:txBody>
+      </p:sp>
+      <p:sp>
+        <p:nvSpPr>
+          <p:cNvPr id="25" name="TextBox 24">
+            <a:extLst>
+              <a:ext uri="{FF2B5EF4-FFF2-40B4-BE49-F238E27FC236}">
+                <a16:creationId xmlns:a16="http://schemas.microsoft.com/office/drawing/2014/main" id="{2744361E-2D99-7401-A3B6-56B85B936837}"/>
+              </a:ext>
+            </a:extLst>
+          </p:cNvPr>
+          <p:cNvSpPr txBox="1"/>
+          <p:nvPr/>
+        </p:nvSpPr>
+        <p:spPr>
+          <a:xfrm>
+            <a:off x="5588861" y="524384"/>
+            <a:ext cx="2488339" cy="369332"/>
+          </a:xfrm>
+          <a:prstGeom prst="rect">
+            <a:avLst/>
+          </a:prstGeom>
+          <a:noFill/>
+        </p:spPr>
+        <p:txBody>
+          <a:bodyPr wrap="square" rtlCol="0">
+            <a:spAutoFit/>
+          </a:bodyPr>
+          <a:lstStyle/>
+          <a:p>
+            <a:r>
+              <a:rPr lang="en-US">
+                <a:latin typeface="Avenir Book" panose="02000503020000020003" pitchFamily="2" charset="0"/>
+              </a:rPr>
+              <a:t>[FWY]xx[LVI] test</a:t>
+            </a:r>
+          </a:p>
+        </p:txBody>
+      </p:sp>
+      <p:cxnSp>
+        <p:nvCxnSpPr>
+          <p:cNvPr id="27" name="Straight Arrow Connector 26">
+            <a:extLst>
+              <a:ext uri="{FF2B5EF4-FFF2-40B4-BE49-F238E27FC236}">
+                <a16:creationId xmlns:a16="http://schemas.microsoft.com/office/drawing/2014/main" id="{24AFB69E-EB18-4697-B394-5A643DBC8C23}"/>
+              </a:ext>
+            </a:extLst>
+          </p:cNvPr>
+          <p:cNvCxnSpPr>
+            <a:cxnSpLocks/>
+          </p:cNvCxnSpPr>
+          <p:nvPr/>
+        </p:nvCxnSpPr>
+        <p:spPr>
+          <a:xfrm>
+            <a:off x="6879771" y="2989943"/>
+            <a:ext cx="337624" cy="266345"/>
+          </a:xfrm>
+          <a:prstGeom prst="straightConnector1">
+            <a:avLst/>
+          </a:prstGeom>
+          <a:ln>
+            <a:tailEnd type="triangle"/>
+          </a:ln>
+        </p:spPr>
+        <p:style>
+          <a:lnRef idx="1">
+            <a:schemeClr val="accent1"/>
+          </a:lnRef>
+          <a:fillRef idx="0">
+            <a:schemeClr val="accent1"/>
+          </a:fillRef>
+          <a:effectRef idx="0">
+            <a:schemeClr val="accent1"/>
+          </a:effectRef>
+          <a:fontRef idx="minor">
+            <a:schemeClr val="tx1"/>
+          </a:fontRef>
+        </p:style>
+      </p:cxnSp>
+      <p:cxnSp>
+        <p:nvCxnSpPr>
+          <p:cNvPr id="28" name="Straight Arrow Connector 27">
+            <a:extLst>
+              <a:ext uri="{FF2B5EF4-FFF2-40B4-BE49-F238E27FC236}">
+                <a16:creationId xmlns:a16="http://schemas.microsoft.com/office/drawing/2014/main" id="{C6BE4239-E449-0CA6-AEA7-C00A8EA59251}"/>
+              </a:ext>
+            </a:extLst>
+          </p:cNvPr>
+          <p:cNvCxnSpPr>
+            <a:cxnSpLocks/>
+          </p:cNvCxnSpPr>
+          <p:nvPr/>
+        </p:nvCxnSpPr>
+        <p:spPr>
+          <a:xfrm flipV="1">
+            <a:off x="6730698" y="3536508"/>
+            <a:ext cx="442451" cy="516194"/>
+          </a:xfrm>
+          <a:prstGeom prst="straightConnector1">
+            <a:avLst/>
+          </a:prstGeom>
+          <a:ln>
+            <a:tailEnd type="triangle"/>
+          </a:ln>
+        </p:spPr>
+        <p:style>
+          <a:lnRef idx="1">
+            <a:schemeClr val="accent1"/>
+          </a:lnRef>
+          <a:fillRef idx="0">
+            <a:schemeClr val="accent1"/>
+          </a:fillRef>
+          <a:effectRef idx="0">
+            <a:schemeClr val="accent1"/>
+          </a:effectRef>
+          <a:fontRef idx="minor">
+            <a:schemeClr val="tx1"/>
+          </a:fontRef>
+        </p:style>
+      </p:cxnSp>
+      <p:sp>
+        <p:nvSpPr>
+          <p:cNvPr id="32" name="TextBox 31">
+            <a:extLst>
+              <a:ext uri="{FF2B5EF4-FFF2-40B4-BE49-F238E27FC236}">
+                <a16:creationId xmlns:a16="http://schemas.microsoft.com/office/drawing/2014/main" id="{8FCF20E0-7477-DE15-936F-3BFBDCB3619D}"/>
+              </a:ext>
+            </a:extLst>
+          </p:cNvPr>
+          <p:cNvSpPr txBox="1"/>
+          <p:nvPr/>
+        </p:nvSpPr>
+        <p:spPr>
+          <a:xfrm>
+            <a:off x="7409124" y="3212044"/>
+            <a:ext cx="1283365" cy="369332"/>
+          </a:xfrm>
+          <a:prstGeom prst="rect">
+            <a:avLst/>
+          </a:prstGeom>
+          <a:noFill/>
+        </p:spPr>
+        <p:txBody>
+          <a:bodyPr wrap="none" rtlCol="0">
+            <a:spAutoFit/>
+          </a:bodyPr>
+          <a:lstStyle/>
+          <a:p>
+            <a:pPr algn="l"/>
+            <a:r>
+              <a:rPr lang="en-US">
+                <a:latin typeface="Avenir Book" panose="02000503020000020003" pitchFamily="2" charset="0"/>
+              </a:rPr>
+              <a:t>recombine</a:t>
+            </a:r>
+          </a:p>
+        </p:txBody>
+      </p:sp>
+      <p:sp>
+        <p:nvSpPr>
+          <p:cNvPr id="33" name="5-Point Star 32">
+            <a:extLst>
+              <a:ext uri="{FF2B5EF4-FFF2-40B4-BE49-F238E27FC236}">
+                <a16:creationId xmlns:a16="http://schemas.microsoft.com/office/drawing/2014/main" id="{3487FCD8-4EA6-1092-7A48-2E8A1336BBBC}"/>
+              </a:ext>
+            </a:extLst>
+          </p:cNvPr>
+          <p:cNvSpPr/>
+          <p:nvPr/>
+        </p:nvSpPr>
+        <p:spPr>
+          <a:xfrm>
+            <a:off x="6492620" y="248160"/>
+            <a:ext cx="294968" cy="250723"/>
+          </a:xfrm>
+          <a:prstGeom prst="star5">
+            <a:avLst/>
+          </a:prstGeom>
+        </p:spPr>
+        <p:style>
+          <a:lnRef idx="2">
+            <a:schemeClr val="accent1">
+              <a:shade val="15000"/>
+            </a:schemeClr>
+          </a:lnRef>
+          <a:fillRef idx="1">
+            <a:schemeClr val="accent1"/>
+          </a:fillRef>
+          <a:effectRef idx="0">
+            <a:schemeClr val="accent1"/>
+          </a:effectRef>
+          <a:fontRef idx="minor">
+            <a:schemeClr val="lt1"/>
+          </a:fontRef>
+        </p:style>
+        <p:txBody>
+          <a:bodyPr rtlCol="0" anchor="ctr"/>
+          <a:lstStyle/>
+          <a:p>
+            <a:pPr algn="ctr"/>
+            <a:endParaRPr lang="en-US"/>
+          </a:p>
+        </p:txBody>
+      </p:sp>
+      <p:sp>
+        <p:nvSpPr>
+          <p:cNvPr id="34" name="5-Point Star 33">
+            <a:extLst>
+              <a:ext uri="{FF2B5EF4-FFF2-40B4-BE49-F238E27FC236}">
+                <a16:creationId xmlns:a16="http://schemas.microsoft.com/office/drawing/2014/main" id="{20C63E6C-C8A1-0EF9-C01B-C9573D437F5F}"/>
+              </a:ext>
+            </a:extLst>
+          </p:cNvPr>
+          <p:cNvSpPr/>
+          <p:nvPr/>
+        </p:nvSpPr>
+        <p:spPr>
+          <a:xfrm>
+            <a:off x="6350108" y="5533889"/>
+            <a:ext cx="294968" cy="250723"/>
+          </a:xfrm>
+          <a:prstGeom prst="star5">
+            <a:avLst/>
+          </a:prstGeom>
+        </p:spPr>
+        <p:style>
+          <a:lnRef idx="2">
+            <a:schemeClr val="accent1">
+              <a:shade val="15000"/>
+            </a:schemeClr>
+          </a:lnRef>
+          <a:fillRef idx="1">
+            <a:schemeClr val="accent1"/>
+          </a:fillRef>
+          <a:effectRef idx="0">
+            <a:schemeClr val="accent1"/>
+          </a:effectRef>
+          <a:fontRef idx="minor">
+            <a:schemeClr val="lt1"/>
+          </a:fontRef>
+        </p:style>
+        <p:txBody>
+          <a:bodyPr rtlCol="0" anchor="ctr"/>
+          <a:lstStyle/>
+          <a:p>
+            <a:pPr algn="ctr"/>
+            <a:endParaRPr lang="en-US"/>
+          </a:p>
+        </p:txBody>
+      </p:sp>
+      <p:cxnSp>
+        <p:nvCxnSpPr>
+          <p:cNvPr id="36" name="Straight Arrow Connector 35">
+            <a:extLst>
+              <a:ext uri="{FF2B5EF4-FFF2-40B4-BE49-F238E27FC236}">
+                <a16:creationId xmlns:a16="http://schemas.microsoft.com/office/drawing/2014/main" id="{EA0EDA6A-3D22-D96F-EA6D-C582BFEA340F}"/>
+              </a:ext>
+            </a:extLst>
+          </p:cNvPr>
+          <p:cNvCxnSpPr>
+            <a:cxnSpLocks/>
+          </p:cNvCxnSpPr>
+          <p:nvPr/>
+        </p:nvCxnSpPr>
+        <p:spPr>
+          <a:xfrm>
+            <a:off x="8682055" y="3409174"/>
+            <a:ext cx="515155" cy="0"/>
+          </a:xfrm>
+          <a:prstGeom prst="straightConnector1">
+            <a:avLst/>
+          </a:prstGeom>
+          <a:ln>
+            <a:tailEnd type="triangle"/>
+          </a:ln>
+        </p:spPr>
+        <p:style>
+          <a:lnRef idx="1">
+            <a:schemeClr val="accent1"/>
+          </a:lnRef>
+          <a:fillRef idx="0">
+            <a:schemeClr val="accent1"/>
+          </a:fillRef>
+          <a:effectRef idx="0">
+            <a:schemeClr val="accent1"/>
+          </a:effectRef>
+          <a:fontRef idx="minor">
+            <a:schemeClr val="tx1"/>
+          </a:fontRef>
+        </p:style>
+      </p:cxnSp>
+      <p:sp>
+        <p:nvSpPr>
+          <p:cNvPr id="38" name="TextBox 37">
+            <a:extLst>
+              <a:ext uri="{FF2B5EF4-FFF2-40B4-BE49-F238E27FC236}">
+                <a16:creationId xmlns:a16="http://schemas.microsoft.com/office/drawing/2014/main" id="{93495160-22D3-88BE-08A5-C6B99BD76376}"/>
+              </a:ext>
+            </a:extLst>
+          </p:cNvPr>
+          <p:cNvSpPr txBox="1"/>
+          <p:nvPr/>
+        </p:nvSpPr>
+        <p:spPr>
+          <a:xfrm>
+            <a:off x="9351756" y="3125839"/>
+            <a:ext cx="2345835" cy="646331"/>
+          </a:xfrm>
+          <a:prstGeom prst="rect">
+            <a:avLst/>
+          </a:prstGeom>
+          <a:noFill/>
+        </p:spPr>
+        <p:txBody>
+          <a:bodyPr wrap="none" rtlCol="0">
+            <a:spAutoFit/>
+          </a:bodyPr>
+          <a:lstStyle/>
+          <a:p>
+            <a:pPr algn="l"/>
+            <a:r>
+              <a:rPr lang="en-US">
+                <a:latin typeface="Avenir Book" panose="02000503020000020003" pitchFamily="2" charset="0"/>
+              </a:rPr>
+              <a:t>PSSMs from different</a:t>
+            </a:r>
+          </a:p>
+          <a:p>
+            <a:pPr algn="l"/>
+            <a:r>
+              <a:rPr lang="en-US">
+                <a:latin typeface="Avenir Book" panose="02000503020000020003" pitchFamily="2" charset="0"/>
+              </a:rPr>
+              <a:t>z-score ranges</a:t>
+            </a:r>
+          </a:p>
+        </p:txBody>
+      </p:sp>
+      <p:cxnSp>
+        <p:nvCxnSpPr>
+          <p:cNvPr id="41" name="Straight Arrow Connector 40">
+            <a:extLst>
+              <a:ext uri="{FF2B5EF4-FFF2-40B4-BE49-F238E27FC236}">
+                <a16:creationId xmlns:a16="http://schemas.microsoft.com/office/drawing/2014/main" id="{1BB492BD-DF68-9D1A-2EFF-4FAA4F96D60F}"/>
+              </a:ext>
+            </a:extLst>
+          </p:cNvPr>
+          <p:cNvCxnSpPr/>
+          <p:nvPr/>
+        </p:nvCxnSpPr>
+        <p:spPr>
+          <a:xfrm flipV="1">
+            <a:off x="6917650" y="2005376"/>
+            <a:ext cx="643943" cy="309093"/>
+          </a:xfrm>
+          <a:prstGeom prst="straightConnector1">
+            <a:avLst/>
+          </a:prstGeom>
+          <a:ln>
+            <a:tailEnd type="triangle"/>
+          </a:ln>
+        </p:spPr>
+        <p:style>
+          <a:lnRef idx="1">
+            <a:schemeClr val="accent1"/>
+          </a:lnRef>
+          <a:fillRef idx="0">
+            <a:schemeClr val="accent1"/>
+          </a:fillRef>
+          <a:effectRef idx="0">
+            <a:schemeClr val="accent1"/>
+          </a:effectRef>
+          <a:fontRef idx="minor">
+            <a:schemeClr val="tx1"/>
+          </a:fontRef>
+        </p:style>
+      </p:cxnSp>
+      <p:sp>
+        <p:nvSpPr>
+          <p:cNvPr id="42" name="TextBox 41">
+            <a:extLst>
+              <a:ext uri="{FF2B5EF4-FFF2-40B4-BE49-F238E27FC236}">
+                <a16:creationId xmlns:a16="http://schemas.microsoft.com/office/drawing/2014/main" id="{5D566FD7-F1A8-C83C-0646-B640E07EA34B}"/>
+              </a:ext>
+            </a:extLst>
+          </p:cNvPr>
+          <p:cNvSpPr txBox="1"/>
+          <p:nvPr/>
+        </p:nvSpPr>
+        <p:spPr>
+          <a:xfrm>
+            <a:off x="7615475" y="1799313"/>
+            <a:ext cx="2148406" cy="369332"/>
+          </a:xfrm>
+          <a:prstGeom prst="rect">
+            <a:avLst/>
+          </a:prstGeom>
+          <a:noFill/>
+        </p:spPr>
+        <p:txBody>
+          <a:bodyPr wrap="square" rtlCol="0">
+            <a:spAutoFit/>
+          </a:bodyPr>
+          <a:lstStyle/>
+          <a:p>
+            <a:r>
+              <a:rPr lang="en-US">
+                <a:latin typeface="Avenir Book" panose="02000503020000020003" pitchFamily="2" charset="0"/>
+              </a:rPr>
+              <a:t>[FWY]xx[LVI] PSSM</a:t>
+            </a:r>
+          </a:p>
+        </p:txBody>
+      </p:sp>
+      <p:sp>
+        <p:nvSpPr>
+          <p:cNvPr id="43" name="TextBox 42">
+            <a:extLst>
+              <a:ext uri="{FF2B5EF4-FFF2-40B4-BE49-F238E27FC236}">
+                <a16:creationId xmlns:a16="http://schemas.microsoft.com/office/drawing/2014/main" id="{F96D3E76-AA15-470D-1A94-D9C391D38CE5}"/>
+              </a:ext>
+            </a:extLst>
+          </p:cNvPr>
+          <p:cNvSpPr txBox="1"/>
+          <p:nvPr/>
+        </p:nvSpPr>
+        <p:spPr>
+          <a:xfrm>
+            <a:off x="7316193" y="4956477"/>
+            <a:ext cx="2573409" cy="369332"/>
+          </a:xfrm>
+          <a:prstGeom prst="rect">
+            <a:avLst/>
+          </a:prstGeom>
+          <a:noFill/>
+        </p:spPr>
+        <p:txBody>
+          <a:bodyPr wrap="square" rtlCol="0">
+            <a:spAutoFit/>
+          </a:bodyPr>
+          <a:lstStyle/>
+          <a:p>
+            <a:r>
+              <a:rPr lang="en-US">
+                <a:latin typeface="Avenir Book" panose="02000503020000020003" pitchFamily="2" charset="0"/>
+              </a:rPr>
+              <a:t>[FWY]xx[FWY] PSSM</a:t>
+            </a:r>
+          </a:p>
+        </p:txBody>
+      </p:sp>
+      <p:cxnSp>
+        <p:nvCxnSpPr>
+          <p:cNvPr id="44" name="Straight Arrow Connector 43">
+            <a:extLst>
+              <a:ext uri="{FF2B5EF4-FFF2-40B4-BE49-F238E27FC236}">
+                <a16:creationId xmlns:a16="http://schemas.microsoft.com/office/drawing/2014/main" id="{8590A721-7B88-3830-C699-4B9524FF1B04}"/>
+              </a:ext>
+            </a:extLst>
+          </p:cNvPr>
+          <p:cNvCxnSpPr>
+            <a:cxnSpLocks/>
+          </p:cNvCxnSpPr>
+          <p:nvPr/>
+        </p:nvCxnSpPr>
+        <p:spPr>
+          <a:xfrm>
+            <a:off x="6860003" y="4536177"/>
+            <a:ext cx="502275" cy="386366"/>
+          </a:xfrm>
+          <a:prstGeom prst="straightConnector1">
+            <a:avLst/>
+          </a:prstGeom>
+          <a:ln>
+            <a:tailEnd type="triangle"/>
+          </a:ln>
+        </p:spPr>
+        <p:style>
+          <a:lnRef idx="1">
+            <a:schemeClr val="accent1"/>
+          </a:lnRef>
+          <a:fillRef idx="0">
+            <a:schemeClr val="accent1"/>
+          </a:fillRef>
+          <a:effectRef idx="0">
+            <a:schemeClr val="accent1"/>
+          </a:effectRef>
+          <a:fontRef idx="minor">
+            <a:schemeClr val="tx1"/>
+          </a:fontRef>
+        </p:style>
+      </p:cxnSp>
+      <p:sp>
+        <p:nvSpPr>
+          <p:cNvPr id="46" name="5-Point Star 45">
+            <a:extLst>
+              <a:ext uri="{FF2B5EF4-FFF2-40B4-BE49-F238E27FC236}">
+                <a16:creationId xmlns:a16="http://schemas.microsoft.com/office/drawing/2014/main" id="{A29EB670-BA44-59D0-212C-B6F3A8353FE4}"/>
+              </a:ext>
+            </a:extLst>
+          </p:cNvPr>
+          <p:cNvSpPr/>
+          <p:nvPr/>
+        </p:nvSpPr>
+        <p:spPr>
+          <a:xfrm>
+            <a:off x="9028914" y="4580852"/>
+            <a:ext cx="294968" cy="250723"/>
+          </a:xfrm>
+          <a:prstGeom prst="star5">
+            <a:avLst/>
+          </a:prstGeom>
+          <a:solidFill>
+            <a:srgbClr val="FF0000"/>
+          </a:solidFill>
+        </p:spPr>
+        <p:style>
+          <a:lnRef idx="2">
+            <a:schemeClr val="accent1">
+              <a:shade val="15000"/>
+            </a:schemeClr>
+          </a:lnRef>
+          <a:fillRef idx="1">
+            <a:schemeClr val="accent1"/>
+          </a:fillRef>
+          <a:effectRef idx="0">
+            <a:schemeClr val="accent1"/>
+          </a:effectRef>
+          <a:fontRef idx="minor">
+            <a:schemeClr val="lt1"/>
+          </a:fontRef>
+        </p:style>
+        <p:txBody>
+          <a:bodyPr rtlCol="0" anchor="ctr"/>
+          <a:lstStyle/>
+          <a:p>
+            <a:pPr algn="ctr"/>
+            <a:endParaRPr lang="en-US"/>
+          </a:p>
+        </p:txBody>
+      </p:sp>
+      <p:sp>
+        <p:nvSpPr>
+          <p:cNvPr id="47" name="5-Point Star 46">
+            <a:extLst>
+              <a:ext uri="{FF2B5EF4-FFF2-40B4-BE49-F238E27FC236}">
+                <a16:creationId xmlns:a16="http://schemas.microsoft.com/office/drawing/2014/main" id="{139188A3-1523-17F7-0368-90A224A63CA0}"/>
+              </a:ext>
+            </a:extLst>
+          </p:cNvPr>
+          <p:cNvSpPr/>
+          <p:nvPr/>
+        </p:nvSpPr>
+        <p:spPr>
+          <a:xfrm>
+            <a:off x="9196339" y="1567196"/>
+            <a:ext cx="294968" cy="250723"/>
+          </a:xfrm>
+          <a:prstGeom prst="star5">
+            <a:avLst/>
+          </a:prstGeom>
+          <a:solidFill>
+            <a:srgbClr val="FF0000"/>
+          </a:solidFill>
+        </p:spPr>
+        <p:style>
+          <a:lnRef idx="2">
+            <a:schemeClr val="accent1">
+              <a:shade val="15000"/>
+            </a:schemeClr>
+          </a:lnRef>
+          <a:fillRef idx="1">
+            <a:schemeClr val="accent1"/>
+          </a:fillRef>
+          <a:effectRef idx="0">
+            <a:schemeClr val="accent1"/>
+          </a:effectRef>
+          <a:fontRef idx="minor">
+            <a:schemeClr val="lt1"/>
+          </a:fontRef>
+        </p:style>
+        <p:txBody>
+          <a:bodyPr rtlCol="0" anchor="ctr"/>
+          <a:lstStyle/>
+          <a:p>
+            <a:pPr algn="ctr"/>
+            <a:endParaRPr lang="en-US"/>
+          </a:p>
+        </p:txBody>
+      </p:sp>
+      <p:sp>
+        <p:nvSpPr>
+          <p:cNvPr id="48" name="5-Point Star 47">
+            <a:extLst>
+              <a:ext uri="{FF2B5EF4-FFF2-40B4-BE49-F238E27FC236}">
+                <a16:creationId xmlns:a16="http://schemas.microsoft.com/office/drawing/2014/main" id="{36DD330A-1A95-C4EA-B43B-3E378D31C963}"/>
+              </a:ext>
+            </a:extLst>
+          </p:cNvPr>
+          <p:cNvSpPr/>
+          <p:nvPr/>
+        </p:nvSpPr>
+        <p:spPr>
+          <a:xfrm>
+            <a:off x="11025139" y="2855084"/>
+            <a:ext cx="294968" cy="250723"/>
+          </a:xfrm>
+          <a:prstGeom prst="star5">
+            <a:avLst/>
+          </a:prstGeom>
+          <a:solidFill>
+            <a:srgbClr val="FF0000"/>
+          </a:solidFill>
+        </p:spPr>
+        <p:style>
+          <a:lnRef idx="2">
+            <a:schemeClr val="accent1">
+              <a:shade val="15000"/>
+            </a:schemeClr>
+          </a:lnRef>
+          <a:fillRef idx="1">
+            <a:schemeClr val="accent1"/>
+          </a:fillRef>
+          <a:effectRef idx="0">
+            <a:schemeClr val="accent1"/>
+          </a:effectRef>
+          <a:fontRef idx="minor">
+            <a:schemeClr val="lt1"/>
+          </a:fontRef>
+        </p:style>
+        <p:txBody>
+          <a:bodyPr rtlCol="0" anchor="ctr"/>
+          <a:lstStyle/>
+          <a:p>
+            <a:pPr algn="ctr"/>
+            <a:endParaRPr lang="en-US"/>
+          </a:p>
+        </p:txBody>
+      </p:sp>
+      <p:sp>
+        <p:nvSpPr>
+          <p:cNvPr id="3" name="TextBox 2">
+            <a:extLst>
+              <a:ext uri="{FF2B5EF4-FFF2-40B4-BE49-F238E27FC236}">
+                <a16:creationId xmlns:a16="http://schemas.microsoft.com/office/drawing/2014/main" id="{49F0722B-AD42-9E12-B905-22FC19B32727}"/>
+              </a:ext>
+            </a:extLst>
+          </p:cNvPr>
+          <p:cNvSpPr txBox="1"/>
+          <p:nvPr/>
+        </p:nvSpPr>
+        <p:spPr>
+          <a:xfrm>
+            <a:off x="5223329" y="6230257"/>
+            <a:ext cx="2752677" cy="369332"/>
+          </a:xfrm>
+          <a:prstGeom prst="rect">
+            <a:avLst/>
+          </a:prstGeom>
+          <a:noFill/>
+        </p:spPr>
+        <p:txBody>
+          <a:bodyPr wrap="none" rtlCol="0">
+            <a:spAutoFit/>
+          </a:bodyPr>
+          <a:lstStyle/>
+          <a:p>
+            <a:pPr algn="l"/>
+            <a:r>
+              <a:rPr lang="en-US">
+                <a:latin typeface="Avenir Book" panose="02000503020000020003" pitchFamily="2" charset="0"/>
+              </a:rPr>
+              <a:t>(binders and nonbinders)</a:t>
+            </a:r>
+          </a:p>
+        </p:txBody>
+      </p:sp>
+      <p:sp>
+        <p:nvSpPr>
+          <p:cNvPr id="6" name="TextBox 5">
+            <a:extLst>
+              <a:ext uri="{FF2B5EF4-FFF2-40B4-BE49-F238E27FC236}">
+                <a16:creationId xmlns:a16="http://schemas.microsoft.com/office/drawing/2014/main" id="{6DF6C263-76B1-D316-4668-19D94B63A3DC}"/>
+              </a:ext>
+            </a:extLst>
+          </p:cNvPr>
+          <p:cNvSpPr txBox="1"/>
+          <p:nvPr/>
+        </p:nvSpPr>
+        <p:spPr>
+          <a:xfrm>
+            <a:off x="5849256" y="4397829"/>
+            <a:ext cx="1072730" cy="369332"/>
+          </a:xfrm>
+          <a:prstGeom prst="rect">
+            <a:avLst/>
+          </a:prstGeom>
+          <a:noFill/>
+        </p:spPr>
+        <p:txBody>
+          <a:bodyPr wrap="none" rtlCol="0">
+            <a:spAutoFit/>
+          </a:bodyPr>
+          <a:lstStyle/>
+          <a:p>
+            <a:pPr algn="l"/>
+            <a:r>
+              <a:rPr lang="en-US">
+                <a:latin typeface="Avenir Book" panose="02000503020000020003" pitchFamily="2" charset="0"/>
+              </a:rPr>
+              <a:t>(binders)</a:t>
+            </a:r>
+          </a:p>
+        </p:txBody>
+      </p:sp>
+      <p:sp>
+        <p:nvSpPr>
+          <p:cNvPr id="9" name="TextBox 8">
+            <a:extLst>
+              <a:ext uri="{FF2B5EF4-FFF2-40B4-BE49-F238E27FC236}">
+                <a16:creationId xmlns:a16="http://schemas.microsoft.com/office/drawing/2014/main" id="{F950DE08-9E9F-1D1D-5154-1B75123C2041}"/>
+              </a:ext>
+            </a:extLst>
+          </p:cNvPr>
+          <p:cNvSpPr txBox="1"/>
+          <p:nvPr/>
+        </p:nvSpPr>
+        <p:spPr>
+          <a:xfrm>
+            <a:off x="5972628" y="2605316"/>
+            <a:ext cx="1072730" cy="369332"/>
+          </a:xfrm>
+          <a:prstGeom prst="rect">
+            <a:avLst/>
+          </a:prstGeom>
+          <a:noFill/>
+        </p:spPr>
+        <p:txBody>
+          <a:bodyPr wrap="none" rtlCol="0">
+            <a:spAutoFit/>
+          </a:bodyPr>
+          <a:lstStyle/>
+          <a:p>
+            <a:pPr algn="l"/>
+            <a:r>
+              <a:rPr lang="en-US">
+                <a:latin typeface="Avenir Book" panose="02000503020000020003" pitchFamily="2" charset="0"/>
+              </a:rPr>
+              <a:t>(binders)</a:t>
+            </a:r>
+          </a:p>
+        </p:txBody>
+      </p:sp>
+      <p:sp>
+        <p:nvSpPr>
+          <p:cNvPr id="12" name="TextBox 11">
+            <a:extLst>
+              <a:ext uri="{FF2B5EF4-FFF2-40B4-BE49-F238E27FC236}">
+                <a16:creationId xmlns:a16="http://schemas.microsoft.com/office/drawing/2014/main" id="{5069673E-EC9D-BA15-DBB0-34872624800B}"/>
+              </a:ext>
+            </a:extLst>
+          </p:cNvPr>
+          <p:cNvSpPr txBox="1"/>
+          <p:nvPr/>
+        </p:nvSpPr>
+        <p:spPr>
+          <a:xfrm>
+            <a:off x="5136244" y="869043"/>
+            <a:ext cx="2752677" cy="369332"/>
+          </a:xfrm>
+          <a:prstGeom prst="rect">
+            <a:avLst/>
+          </a:prstGeom>
+          <a:noFill/>
+        </p:spPr>
+        <p:txBody>
+          <a:bodyPr wrap="none" rtlCol="0">
+            <a:spAutoFit/>
+          </a:bodyPr>
+          <a:lstStyle/>
+          <a:p>
+            <a:pPr algn="l"/>
+            <a:r>
+              <a:rPr lang="en-US">
+                <a:latin typeface="Avenir Book" panose="02000503020000020003" pitchFamily="2" charset="0"/>
+              </a:rPr>
+              <a:t>(binders and nonbinders)</a:t>
+            </a:r>
+          </a:p>
+        </p:txBody>
+      </p:sp>
+      <p:cxnSp>
+        <p:nvCxnSpPr>
+          <p:cNvPr id="15" name="Straight Arrow Connector 14">
+            <a:extLst>
+              <a:ext uri="{FF2B5EF4-FFF2-40B4-BE49-F238E27FC236}">
+                <a16:creationId xmlns:a16="http://schemas.microsoft.com/office/drawing/2014/main" id="{03A55DD2-2697-3004-310D-82576272943D}"/>
+              </a:ext>
+            </a:extLst>
+          </p:cNvPr>
+          <p:cNvCxnSpPr>
+            <a:cxnSpLocks/>
+          </p:cNvCxnSpPr>
+          <p:nvPr/>
+        </p:nvCxnSpPr>
+        <p:spPr>
+          <a:xfrm>
+            <a:off x="1304890" y="3657600"/>
+            <a:ext cx="0" cy="1424354"/>
+          </a:xfrm>
+          <a:prstGeom prst="straightConnector1">
+            <a:avLst/>
+          </a:prstGeom>
+          <a:ln>
+            <a:tailEnd type="triangle"/>
+          </a:ln>
+        </p:spPr>
+        <p:style>
+          <a:lnRef idx="1">
+            <a:schemeClr val="accent1"/>
+          </a:lnRef>
+          <a:fillRef idx="0">
+            <a:schemeClr val="accent1"/>
+          </a:fillRef>
+          <a:effectRef idx="0">
+            <a:schemeClr val="accent1"/>
+          </a:effectRef>
+          <a:fontRef idx="minor">
+            <a:schemeClr val="tx1"/>
+          </a:fontRef>
+        </p:style>
+      </p:cxnSp>
+      <p:sp>
+        <p:nvSpPr>
+          <p:cNvPr id="17" name="TextBox 16">
+            <a:extLst>
+              <a:ext uri="{FF2B5EF4-FFF2-40B4-BE49-F238E27FC236}">
+                <a16:creationId xmlns:a16="http://schemas.microsoft.com/office/drawing/2014/main" id="{C85CDC9F-597E-E4E6-F52E-62FE769E7333}"/>
+              </a:ext>
+            </a:extLst>
+          </p:cNvPr>
+          <p:cNvSpPr txBox="1"/>
+          <p:nvPr/>
+        </p:nvSpPr>
+        <p:spPr>
+          <a:xfrm>
+            <a:off x="224971" y="5121310"/>
+            <a:ext cx="2028119" cy="369332"/>
+          </a:xfrm>
+          <a:prstGeom prst="rect">
+            <a:avLst/>
+          </a:prstGeom>
+          <a:noFill/>
+        </p:spPr>
+        <p:txBody>
+          <a:bodyPr wrap="none" rtlCol="0">
+            <a:spAutoFit/>
+          </a:bodyPr>
+          <a:lstStyle/>
+          <a:p>
+            <a:pPr algn="l"/>
+            <a:r>
+              <a:rPr lang="en-US">
+                <a:latin typeface="Avenir Book" panose="02000503020000020003" pitchFamily="2" charset="0"/>
+              </a:rPr>
+              <a:t>all binders (PSSM)</a:t>
+            </a:r>
+          </a:p>
+        </p:txBody>
+      </p:sp>
+      <p:sp>
+        <p:nvSpPr>
+          <p:cNvPr id="22" name="5-Point Star 21">
+            <a:extLst>
+              <a:ext uri="{FF2B5EF4-FFF2-40B4-BE49-F238E27FC236}">
+                <a16:creationId xmlns:a16="http://schemas.microsoft.com/office/drawing/2014/main" id="{C5359CCF-C4B2-B0D3-3850-454241543E23}"/>
+              </a:ext>
+            </a:extLst>
+          </p:cNvPr>
+          <p:cNvSpPr/>
+          <p:nvPr/>
+        </p:nvSpPr>
+        <p:spPr>
+          <a:xfrm>
+            <a:off x="1515270" y="4831255"/>
+            <a:ext cx="294968" cy="250723"/>
+          </a:xfrm>
+          <a:prstGeom prst="star5">
+            <a:avLst/>
+          </a:prstGeom>
+          <a:solidFill>
+            <a:srgbClr val="FF0000"/>
+          </a:solidFill>
+        </p:spPr>
+        <p:style>
+          <a:lnRef idx="2">
+            <a:schemeClr val="accent1">
+              <a:shade val="15000"/>
+            </a:schemeClr>
+          </a:lnRef>
+          <a:fillRef idx="1">
+            <a:schemeClr val="accent1"/>
+          </a:fillRef>
+          <a:effectRef idx="0">
+            <a:schemeClr val="accent1"/>
+          </a:effectRef>
+          <a:fontRef idx="minor">
+            <a:schemeClr val="lt1"/>
+          </a:fontRef>
+        </p:style>
+        <p:txBody>
+          <a:bodyPr rtlCol="0" anchor="ctr"/>
+          <a:lstStyle/>
+          <a:p>
+            <a:pPr algn="ctr"/>
+            <a:endParaRPr lang="en-US"/>
+          </a:p>
+        </p:txBody>
+      </p:sp>
+      <p:grpSp>
+        <p:nvGrpSpPr>
+          <p:cNvPr id="10" name="Group 9">
+            <a:extLst>
+              <a:ext uri="{FF2B5EF4-FFF2-40B4-BE49-F238E27FC236}">
+                <a16:creationId xmlns:a16="http://schemas.microsoft.com/office/drawing/2014/main" id="{EA6F02D7-5665-B077-A1D6-3E11E3AFFE11}"/>
+              </a:ext>
+            </a:extLst>
+          </p:cNvPr>
+          <p:cNvGrpSpPr/>
+          <p:nvPr/>
+        </p:nvGrpSpPr>
+        <p:grpSpPr>
+          <a:xfrm>
+            <a:off x="114300" y="838200"/>
+            <a:ext cx="2235200" cy="850900"/>
+            <a:chOff x="114300" y="165100"/>
+            <a:chExt cx="2235200" cy="850900"/>
+          </a:xfrm>
+        </p:grpSpPr>
+        <p:sp>
+          <p:nvSpPr>
+            <p:cNvPr id="23" name="5-Point Star 22">
+              <a:extLst>
+                <a:ext uri="{FF2B5EF4-FFF2-40B4-BE49-F238E27FC236}">
+                  <a16:creationId xmlns:a16="http://schemas.microsoft.com/office/drawing/2014/main" id="{244D8567-A945-28ED-AB2A-FC0791CE648E}"/>
+                </a:ext>
+              </a:extLst>
+            </p:cNvPr>
+            <p:cNvSpPr/>
+            <p:nvPr/>
+          </p:nvSpPr>
+          <p:spPr>
+            <a:xfrm>
+              <a:off x="340520" y="246555"/>
+              <a:ext cx="294968" cy="250723"/>
+            </a:xfrm>
+            <a:prstGeom prst="star5">
+              <a:avLst/>
+            </a:prstGeom>
+            <a:solidFill>
+              <a:srgbClr val="FF0000"/>
+            </a:solidFill>
+          </p:spPr>
+          <p:style>
+            <a:lnRef idx="2">
+              <a:schemeClr val="accent1">
+                <a:shade val="15000"/>
+              </a:schemeClr>
+            </a:lnRef>
+            <a:fillRef idx="1">
+              <a:schemeClr val="accent1"/>
+            </a:fillRef>
+            <a:effectRef idx="0">
+              <a:schemeClr val="accent1"/>
+            </a:effectRef>
+            <a:fontRef idx="minor">
+              <a:schemeClr val="lt1"/>
+            </a:fontRef>
+          </p:style>
+          <p:txBody>
+            <a:bodyPr rtlCol="0" anchor="ctr"/>
+            <a:lstStyle/>
+            <a:p>
+              <a:pPr algn="ctr"/>
+              <a:endParaRPr lang="en-US"/>
+            </a:p>
+          </p:txBody>
+        </p:sp>
+        <p:sp>
+          <p:nvSpPr>
+            <p:cNvPr id="26" name="Rounded Rectangle 25">
+              <a:extLst>
+                <a:ext uri="{FF2B5EF4-FFF2-40B4-BE49-F238E27FC236}">
+                  <a16:creationId xmlns:a16="http://schemas.microsoft.com/office/drawing/2014/main" id="{A3D31D89-57EA-5991-6BCB-3FBCAF909267}"/>
+                </a:ext>
+              </a:extLst>
+            </p:cNvPr>
+            <p:cNvSpPr/>
+            <p:nvPr/>
+          </p:nvSpPr>
+          <p:spPr>
+            <a:xfrm>
+              <a:off x="114300" y="165100"/>
+              <a:ext cx="2235200" cy="850900"/>
+            </a:xfrm>
+            <a:prstGeom prst="roundRect">
+              <a:avLst/>
+            </a:prstGeom>
+            <a:noFill/>
+            <a:ln>
+              <a:solidFill>
+                <a:schemeClr val="tx1"/>
+              </a:solidFill>
+            </a:ln>
+          </p:spPr>
+          <p:style>
+            <a:lnRef idx="2">
+              <a:schemeClr val="accent1">
+                <a:shade val="15000"/>
+              </a:schemeClr>
+            </a:lnRef>
+            <a:fillRef idx="1">
+              <a:schemeClr val="accent1"/>
+            </a:fillRef>
+            <a:effectRef idx="0">
+              <a:schemeClr val="accent1"/>
+            </a:effectRef>
+            <a:fontRef idx="minor">
+              <a:schemeClr val="lt1"/>
+            </a:fontRef>
+          </p:style>
+          <p:txBody>
+            <a:bodyPr rtlCol="0" anchor="ctr"/>
+            <a:lstStyle/>
+            <a:p>
+              <a:pPr algn="ctr"/>
+              <a:endParaRPr lang="en-US"/>
+            </a:p>
+          </p:txBody>
+        </p:sp>
+        <p:sp>
+          <p:nvSpPr>
+            <p:cNvPr id="29" name="TextBox 28">
+              <a:extLst>
+                <a:ext uri="{FF2B5EF4-FFF2-40B4-BE49-F238E27FC236}">
+                  <a16:creationId xmlns:a16="http://schemas.microsoft.com/office/drawing/2014/main" id="{D4EF09C7-70D1-6D5A-AD45-7E67D0182C39}"/>
+                </a:ext>
+              </a:extLst>
+            </p:cNvPr>
+            <p:cNvSpPr txBox="1"/>
+            <p:nvPr/>
+          </p:nvSpPr>
+          <p:spPr>
+            <a:xfrm>
+              <a:off x="685800" y="228600"/>
+              <a:ext cx="1553630" cy="369332"/>
+            </a:xfrm>
+            <a:prstGeom prst="rect">
+              <a:avLst/>
+            </a:prstGeom>
+            <a:noFill/>
+          </p:spPr>
+          <p:txBody>
+            <a:bodyPr wrap="none" rtlCol="0">
+              <a:spAutoFit/>
+            </a:bodyPr>
+            <a:lstStyle/>
+            <a:p>
+              <a:pPr algn="l"/>
+              <a:r>
+                <a:rPr lang="en-US">
+                  <a:latin typeface="Avenir Book" panose="02000503020000020003" pitchFamily="2" charset="0"/>
+                </a:rPr>
+                <a:t>= training set</a:t>
+              </a:r>
+            </a:p>
+          </p:txBody>
+        </p:sp>
+        <p:sp>
+          <p:nvSpPr>
+            <p:cNvPr id="30" name="5-Point Star 29">
+              <a:extLst>
+                <a:ext uri="{FF2B5EF4-FFF2-40B4-BE49-F238E27FC236}">
+                  <a16:creationId xmlns:a16="http://schemas.microsoft.com/office/drawing/2014/main" id="{D040A990-E888-7EB8-84C3-E8B877355C02}"/>
+                </a:ext>
+              </a:extLst>
+            </p:cNvPr>
+            <p:cNvSpPr/>
+            <p:nvPr/>
+          </p:nvSpPr>
+          <p:spPr>
+            <a:xfrm>
+              <a:off x="349128" y="631173"/>
+              <a:ext cx="294968" cy="250723"/>
+            </a:xfrm>
+            <a:prstGeom prst="star5">
+              <a:avLst/>
+            </a:prstGeom>
+            <a:solidFill>
+              <a:schemeClr val="accent1"/>
+            </a:solidFill>
+          </p:spPr>
+          <p:style>
+            <a:lnRef idx="2">
+              <a:schemeClr val="accent1">
+                <a:shade val="15000"/>
+              </a:schemeClr>
+            </a:lnRef>
+            <a:fillRef idx="1">
+              <a:schemeClr val="accent1"/>
+            </a:fillRef>
+            <a:effectRef idx="0">
+              <a:schemeClr val="accent1"/>
+            </a:effectRef>
+            <a:fontRef idx="minor">
+              <a:schemeClr val="lt1"/>
+            </a:fontRef>
+          </p:style>
+          <p:txBody>
+            <a:bodyPr rtlCol="0" anchor="ctr"/>
+            <a:lstStyle/>
+            <a:p>
+              <a:pPr algn="ctr"/>
+              <a:endParaRPr lang="en-US"/>
+            </a:p>
+          </p:txBody>
+        </p:sp>
+        <p:sp>
+          <p:nvSpPr>
+            <p:cNvPr id="31" name="TextBox 30">
+              <a:extLst>
+                <a:ext uri="{FF2B5EF4-FFF2-40B4-BE49-F238E27FC236}">
+                  <a16:creationId xmlns:a16="http://schemas.microsoft.com/office/drawing/2014/main" id="{795E4486-4179-7B01-694A-546F1E75E527}"/>
+                </a:ext>
+              </a:extLst>
+            </p:cNvPr>
+            <p:cNvSpPr txBox="1"/>
+            <p:nvPr/>
+          </p:nvSpPr>
+          <p:spPr>
+            <a:xfrm>
+              <a:off x="685800" y="571500"/>
+              <a:ext cx="1149674" cy="369332"/>
+            </a:xfrm>
+            <a:prstGeom prst="rect">
+              <a:avLst/>
+            </a:prstGeom>
+            <a:noFill/>
+          </p:spPr>
+          <p:txBody>
+            <a:bodyPr wrap="none" rtlCol="0">
+              <a:spAutoFit/>
+            </a:bodyPr>
+            <a:lstStyle/>
+            <a:p>
+              <a:pPr algn="l"/>
+              <a:r>
+                <a:rPr lang="en-US">
+                  <a:latin typeface="Avenir Book" panose="02000503020000020003" pitchFamily="2" charset="0"/>
+                </a:rPr>
+                <a:t>= test set</a:t>
+              </a:r>
+            </a:p>
+          </p:txBody>
+        </p:sp>
+      </p:grpSp>
+      <p:sp>
+        <p:nvSpPr>
+          <p:cNvPr id="35" name="TextBox 34">
+            <a:extLst>
+              <a:ext uri="{FF2B5EF4-FFF2-40B4-BE49-F238E27FC236}">
+                <a16:creationId xmlns:a16="http://schemas.microsoft.com/office/drawing/2014/main" id="{D6A5C553-D5AD-3D6E-C2A1-9460C7DB7B74}"/>
+              </a:ext>
+            </a:extLst>
+          </p:cNvPr>
+          <p:cNvSpPr txBox="1"/>
+          <p:nvPr/>
+        </p:nvSpPr>
+        <p:spPr>
+          <a:xfrm>
+            <a:off x="11226800" y="1193800"/>
+            <a:ext cx="429926" cy="369332"/>
+          </a:xfrm>
+          <a:prstGeom prst="rect">
+            <a:avLst/>
+          </a:prstGeom>
+          <a:noFill/>
+        </p:spPr>
+        <p:txBody>
+          <a:bodyPr wrap="none" rtlCol="0">
+            <a:spAutoFit/>
+          </a:bodyPr>
+          <a:lstStyle/>
+          <a:p>
+            <a:pPr algn="l"/>
+            <a:r>
+              <a:rPr lang="en-US">
+                <a:latin typeface="Avenir Book" panose="02000503020000020003" pitchFamily="2" charset="0"/>
+              </a:rPr>
+              <a:t>ilir</a:t>
+            </a:r>
+          </a:p>
+        </p:txBody>
+      </p:sp>
+      <p:sp>
+        <p:nvSpPr>
+          <p:cNvPr id="37" name="5-Point Star 36">
+            <a:extLst>
+              <a:ext uri="{FF2B5EF4-FFF2-40B4-BE49-F238E27FC236}">
+                <a16:creationId xmlns:a16="http://schemas.microsoft.com/office/drawing/2014/main" id="{DAF34DC4-A62B-BEBD-4667-E4243CD00BCB}"/>
+              </a:ext>
+            </a:extLst>
+          </p:cNvPr>
+          <p:cNvSpPr/>
+          <p:nvPr/>
+        </p:nvSpPr>
+        <p:spPr>
+          <a:xfrm>
+            <a:off x="11554620" y="970455"/>
+            <a:ext cx="294968" cy="250723"/>
+          </a:xfrm>
+          <a:prstGeom prst="star5">
+            <a:avLst/>
+          </a:prstGeom>
+          <a:solidFill>
+            <a:srgbClr val="FF0000"/>
+          </a:solidFill>
+        </p:spPr>
+        <p:style>
+          <a:lnRef idx="2">
+            <a:schemeClr val="accent1">
+              <a:shade val="15000"/>
+            </a:schemeClr>
+          </a:lnRef>
+          <a:fillRef idx="1">
+            <a:schemeClr val="accent1"/>
+          </a:fillRef>
+          <a:effectRef idx="0">
+            <a:schemeClr val="accent1"/>
+          </a:effectRef>
+          <a:fontRef idx="minor">
+            <a:schemeClr val="lt1"/>
+          </a:fontRef>
+        </p:style>
+        <p:txBody>
+          <a:bodyPr rtlCol="0" anchor="ctr"/>
+          <a:lstStyle/>
+          <a:p>
+            <a:pPr algn="ctr"/>
+            <a:endParaRPr lang="en-US"/>
+          </a:p>
+        </p:txBody>
+      </p:sp>
+      <p:sp>
+        <p:nvSpPr>
+          <p:cNvPr id="39" name="TextBox 38">
+            <a:extLst>
+              <a:ext uri="{FF2B5EF4-FFF2-40B4-BE49-F238E27FC236}">
+                <a16:creationId xmlns:a16="http://schemas.microsoft.com/office/drawing/2014/main" id="{2AE3FBBB-A099-FA44-663C-F5B2BC022EAC}"/>
+              </a:ext>
+            </a:extLst>
+          </p:cNvPr>
+          <p:cNvSpPr txBox="1"/>
+          <p:nvPr/>
+        </p:nvSpPr>
+        <p:spPr>
+          <a:xfrm>
+            <a:off x="10257204" y="555869"/>
+            <a:ext cx="1135247" cy="369332"/>
+          </a:xfrm>
+          <a:prstGeom prst="rect">
+            <a:avLst/>
+          </a:prstGeom>
+          <a:noFill/>
+        </p:spPr>
+        <p:txBody>
+          <a:bodyPr wrap="none" rtlCol="0">
+            <a:spAutoFit/>
+          </a:bodyPr>
+          <a:lstStyle/>
+          <a:p>
+            <a:pPr algn="l"/>
+            <a:r>
+              <a:rPr lang="en-US">
+                <a:latin typeface="Avenir Book" panose="02000503020000020003" pitchFamily="2" charset="0"/>
+              </a:rPr>
+              <a:t>lir central</a:t>
+            </a:r>
+          </a:p>
+        </p:txBody>
+      </p:sp>
+      <p:sp>
+        <p:nvSpPr>
+          <p:cNvPr id="40" name="5-Point Star 39">
+            <a:extLst>
+              <a:ext uri="{FF2B5EF4-FFF2-40B4-BE49-F238E27FC236}">
+                <a16:creationId xmlns:a16="http://schemas.microsoft.com/office/drawing/2014/main" id="{62B29192-865D-A9A2-694A-59159456A02F}"/>
+              </a:ext>
+            </a:extLst>
+          </p:cNvPr>
+          <p:cNvSpPr/>
+          <p:nvPr/>
+        </p:nvSpPr>
+        <p:spPr>
+          <a:xfrm>
+            <a:off x="11156828" y="351773"/>
+            <a:ext cx="294968" cy="250723"/>
+          </a:xfrm>
+          <a:prstGeom prst="star5">
+            <a:avLst/>
+          </a:prstGeom>
+          <a:solidFill>
+            <a:schemeClr val="accent1"/>
+          </a:solidFill>
+        </p:spPr>
+        <p:style>
+          <a:lnRef idx="2">
+            <a:schemeClr val="accent1">
+              <a:shade val="15000"/>
+            </a:schemeClr>
+          </a:lnRef>
+          <a:fillRef idx="1">
+            <a:schemeClr val="accent1"/>
+          </a:fillRef>
+          <a:effectRef idx="0">
+            <a:schemeClr val="accent1"/>
+          </a:effectRef>
+          <a:fontRef idx="minor">
+            <a:schemeClr val="lt1"/>
+          </a:fontRef>
+        </p:style>
+        <p:txBody>
+          <a:bodyPr rtlCol="0" anchor="ctr"/>
+          <a:lstStyle/>
+          <a:p>
+            <a:pPr algn="ctr"/>
+            <a:endParaRPr lang="en-US"/>
+          </a:p>
+        </p:txBody>
+      </p:sp>
+      <p:sp>
+        <p:nvSpPr>
+          <p:cNvPr id="45" name="TextBox 44">
+            <a:extLst>
+              <a:ext uri="{FF2B5EF4-FFF2-40B4-BE49-F238E27FC236}">
+                <a16:creationId xmlns:a16="http://schemas.microsoft.com/office/drawing/2014/main" id="{9640FFC7-EC97-CAED-A899-6F437D578645}"/>
+              </a:ext>
+            </a:extLst>
+          </p:cNvPr>
+          <p:cNvSpPr txBox="1"/>
+          <p:nvPr/>
+        </p:nvSpPr>
+        <p:spPr>
+          <a:xfrm>
+            <a:off x="215900" y="177800"/>
+            <a:ext cx="1645002" cy="369332"/>
+          </a:xfrm>
+          <a:prstGeom prst="rect">
+            <a:avLst/>
+          </a:prstGeom>
+          <a:noFill/>
+        </p:spPr>
+        <p:txBody>
+          <a:bodyPr wrap="none" rtlCol="0">
+            <a:spAutoFit/>
+          </a:bodyPr>
+          <a:lstStyle/>
+          <a:p>
+            <a:pPr algn="l"/>
+            <a:r>
+              <a:rPr lang="en-US" b="1">
+                <a:latin typeface="Avenir Black" panose="02000503020000020003" pitchFamily="2" charset="0"/>
+              </a:rPr>
+              <a:t>experiment 1</a:t>
+            </a:r>
+          </a:p>
+        </p:txBody>
+      </p:sp>
+    </p:spTree>
+    <p:extLst>
+      <p:ext uri="{BB962C8B-B14F-4D97-AF65-F5344CB8AC3E}">
+        <p14:creationId xmlns:p14="http://schemas.microsoft.com/office/powerpoint/2010/main" val="2117648288"/>
+      </p:ext>
+    </p:extLst>
+  </p:cSld>
+  <p:clrMapOvr>
+    <a:masterClrMapping/>
+  </p:clrMapOvr>
+</p:sld>
+</file>
+
+<file path=ppt/slides/slide19.xml><?xml version="1.0" encoding="utf-8"?>
 <p:sld xmlns:a="http://schemas.openxmlformats.org/drawingml/2006/main" xmlns:r="http://schemas.openxmlformats.org/officeDocument/2006/relationships" xmlns:p="http://schemas.openxmlformats.org/presentationml/2006/main">
   <p:cSld>
     <p:spTree>
@@ -7194,7 +9417,7 @@
           <p:cNvPr id="2" name="Picture 1">
             <a:extLst>
               <a:ext uri="{FF2B5EF4-FFF2-40B4-BE49-F238E27FC236}">
-                <a16:creationId xmlns:a16="http://schemas.microsoft.com/office/drawing/2014/main" id="{2F44EC26-71E9-6F62-3542-F59962E5BB28}"/>
+                <a16:creationId xmlns:a16="http://schemas.microsoft.com/office/drawing/2014/main" id="{F8AA51EB-4B5E-C174-1449-3A2A9184C1C9}"/>
               </a:ext>
             </a:extLst>
           </p:cNvPr>
@@ -7204,166 +9427,13 @@
           <p:nvPr/>
         </p:nvPicPr>
         <p:blipFill>
-          <a:blip r:embed="rId2"/>
+          <a:blip r:embed="rId3"/>
           <a:stretch>
             <a:fillRect/>
           </a:stretch>
         </p:blipFill>
         <p:spPr>
           <a:xfrm>
-            <a:off x="216383" y="1892558"/>
-            <a:ext cx="11630025" cy="4965442"/>
-          </a:xfrm>
-          <a:prstGeom prst="rect">
-            <a:avLst/>
-          </a:prstGeom>
-        </p:spPr>
-      </p:pic>
-      <p:pic>
-        <p:nvPicPr>
-          <p:cNvPr id="3" name="Picture 2">
-            <a:extLst>
-              <a:ext uri="{FF2B5EF4-FFF2-40B4-BE49-F238E27FC236}">
-                <a16:creationId xmlns:a16="http://schemas.microsoft.com/office/drawing/2014/main" id="{08F96B11-729F-D5E6-EAEE-A750CCF37DCD}"/>
-              </a:ext>
-            </a:extLst>
-          </p:cNvPr>
-          <p:cNvPicPr>
-            <a:picLocks noChangeAspect="1"/>
-          </p:cNvPicPr>
-          <p:nvPr/>
-        </p:nvPicPr>
-        <p:blipFill>
-          <a:blip r:embed="rId3"/>
-          <a:srcRect b="69120"/>
-          <a:stretch>
-            <a:fillRect/>
-          </a:stretch>
-        </p:blipFill>
-        <p:spPr>
-          <a:xfrm>
-            <a:off x="178719" y="557399"/>
-            <a:ext cx="3758614" cy="1085871"/>
-          </a:xfrm>
-          <a:prstGeom prst="rect">
-            <a:avLst/>
-          </a:prstGeom>
-        </p:spPr>
-      </p:pic>
-      <p:pic>
-        <p:nvPicPr>
-          <p:cNvPr id="4" name="Picture 3">
-            <a:extLst>
-              <a:ext uri="{FF2B5EF4-FFF2-40B4-BE49-F238E27FC236}">
-                <a16:creationId xmlns:a16="http://schemas.microsoft.com/office/drawing/2014/main" id="{E3E06D8B-8643-B18D-3848-D59BD7EED978}"/>
-              </a:ext>
-            </a:extLst>
-          </p:cNvPr>
-          <p:cNvPicPr>
-            <a:picLocks noChangeAspect="1"/>
-          </p:cNvPicPr>
-          <p:nvPr/>
-        </p:nvPicPr>
-        <p:blipFill>
-          <a:blip r:embed="rId3"/>
-          <a:srcRect t="31657" b="37463"/>
-          <a:stretch>
-            <a:fillRect/>
-          </a:stretch>
-        </p:blipFill>
-        <p:spPr>
-          <a:xfrm>
-            <a:off x="4233884" y="597156"/>
-            <a:ext cx="3758614" cy="1085871"/>
-          </a:xfrm>
-          <a:prstGeom prst="rect">
-            <a:avLst/>
-          </a:prstGeom>
-        </p:spPr>
-      </p:pic>
-      <p:pic>
-        <p:nvPicPr>
-          <p:cNvPr id="5" name="Picture 4">
-            <a:extLst>
-              <a:ext uri="{FF2B5EF4-FFF2-40B4-BE49-F238E27FC236}">
-                <a16:creationId xmlns:a16="http://schemas.microsoft.com/office/drawing/2014/main" id="{319E5290-9F71-2F51-CD8F-FEE3839F71E1}"/>
-              </a:ext>
-            </a:extLst>
-          </p:cNvPr>
-          <p:cNvPicPr>
-            <a:picLocks noChangeAspect="1"/>
-          </p:cNvPicPr>
-          <p:nvPr/>
-        </p:nvPicPr>
-        <p:blipFill>
-          <a:blip r:embed="rId3"/>
-          <a:srcRect l="1233" t="63602" r="-1233" b="6971"/>
-          <a:stretch>
-            <a:fillRect/>
-          </a:stretch>
-        </p:blipFill>
-        <p:spPr>
-          <a:xfrm>
-            <a:off x="8110002" y="603259"/>
-            <a:ext cx="3758614" cy="1034768"/>
-          </a:xfrm>
-          <a:prstGeom prst="rect">
-            <a:avLst/>
-          </a:prstGeom>
-        </p:spPr>
-      </p:pic>
-    </p:spTree>
-    <p:extLst>
-      <p:ext uri="{BB962C8B-B14F-4D97-AF65-F5344CB8AC3E}">
-        <p14:creationId xmlns:p14="http://schemas.microsoft.com/office/powerpoint/2010/main" val="627302401"/>
-      </p:ext>
-    </p:extLst>
-  </p:cSld>
-  <p:clrMapOvr>
-    <a:masterClrMapping/>
-  </p:clrMapOvr>
-</p:sld>
-</file>
-
-<file path=ppt/slides/slide18.xml><?xml version="1.0" encoding="utf-8"?>
-<p:sld xmlns:a="http://schemas.openxmlformats.org/drawingml/2006/main" xmlns:r="http://schemas.openxmlformats.org/officeDocument/2006/relationships" xmlns:p="http://schemas.openxmlformats.org/presentationml/2006/main">
-  <p:cSld>
-    <p:spTree>
-      <p:nvGrpSpPr>
-        <p:cNvPr id="1" name=""/>
-        <p:cNvGrpSpPr/>
-        <p:nvPr/>
-      </p:nvGrpSpPr>
-      <p:grpSpPr>
-        <a:xfrm>
-          <a:off x="0" y="0"/>
-          <a:ext cx="0" cy="0"/>
-          <a:chOff x="0" y="0"/>
-          <a:chExt cx="0" cy="0"/>
-        </a:xfrm>
-      </p:grpSpPr>
-      <p:pic>
-        <p:nvPicPr>
-          <p:cNvPr id="2" name="Picture 1">
-            <a:extLst>
-              <a:ext uri="{FF2B5EF4-FFF2-40B4-BE49-F238E27FC236}">
-                <a16:creationId xmlns:a16="http://schemas.microsoft.com/office/drawing/2014/main" id="{F8AA51EB-4B5E-C174-1449-3A2A9184C1C9}"/>
-              </a:ext>
-            </a:extLst>
-          </p:cNvPr>
-          <p:cNvPicPr>
-            <a:picLocks noChangeAspect="1"/>
-          </p:cNvPicPr>
-          <p:nvPr/>
-        </p:nvPicPr>
-        <p:blipFill>
-          <a:blip r:embed="rId2"/>
-          <a:stretch>
-            <a:fillRect/>
-          </a:stretch>
-        </p:blipFill>
-        <p:spPr>
-          <a:xfrm>
             <a:off x="162636" y="1181055"/>
             <a:ext cx="11800246" cy="4919493"/>
           </a:xfrm>
@@ -7372,86 +9442,64 @@
           </a:prstGeom>
         </p:spPr>
       </p:pic>
-    </p:spTree>
-    <p:extLst>
-      <p:ext uri="{BB962C8B-B14F-4D97-AF65-F5344CB8AC3E}">
-        <p14:creationId xmlns:p14="http://schemas.microsoft.com/office/powerpoint/2010/main" val="3540687329"/>
-      </p:ext>
-    </p:extLst>
-  </p:cSld>
-  <p:clrMapOvr>
-    <a:masterClrMapping/>
-  </p:clrMapOvr>
-</p:sld>
-</file>
-
-<file path=ppt/slides/slide19.xml><?xml version="1.0" encoding="utf-8"?>
-<p:sld xmlns:a="http://schemas.openxmlformats.org/drawingml/2006/main" xmlns:r="http://schemas.openxmlformats.org/officeDocument/2006/relationships" xmlns:p="http://schemas.openxmlformats.org/presentationml/2006/main">
-  <p:cSld>
-    <p:spTree>
-      <p:nvGrpSpPr>
-        <p:cNvPr id="1" name="">
-          <a:extLst>
-            <a:ext uri="{FF2B5EF4-FFF2-40B4-BE49-F238E27FC236}">
-              <a16:creationId xmlns:a16="http://schemas.microsoft.com/office/drawing/2014/main" id="{9D45E729-62D5-574A-3D52-6116D25180EF}"/>
-            </a:ext>
-          </a:extLst>
-        </p:cNvPr>
-        <p:cNvGrpSpPr/>
-        <p:nvPr/>
-      </p:nvGrpSpPr>
-      <p:grpSpPr>
-        <a:xfrm>
-          <a:off x="0" y="0"/>
-          <a:ext cx="0" cy="0"/>
-          <a:chOff x="0" y="0"/>
-          <a:chExt cx="0" cy="0"/>
-        </a:xfrm>
-      </p:grpSpPr>
-      <p:sp>
-        <p:nvSpPr>
-          <p:cNvPr id="2" name="TextBox 1">
-            <a:extLst>
-              <a:ext uri="{FF2B5EF4-FFF2-40B4-BE49-F238E27FC236}">
-                <a16:creationId xmlns:a16="http://schemas.microsoft.com/office/drawing/2014/main" id="{63E6C56B-EB59-C6D5-F726-33D009A83ACE}"/>
-              </a:ext>
-            </a:extLst>
-          </p:cNvPr>
-          <p:cNvSpPr txBox="1"/>
-          <p:nvPr/>
-        </p:nvSpPr>
-        <p:spPr>
-          <a:xfrm>
-            <a:off x="2089726" y="3195012"/>
-            <a:ext cx="1698542" cy="369332"/>
-          </a:xfrm>
-          <a:prstGeom prst="rect">
+      <p:sp>
+        <p:nvSpPr>
+          <p:cNvPr id="3" name="Oval 2">
+            <a:extLst>
+              <a:ext uri="{FF2B5EF4-FFF2-40B4-BE49-F238E27FC236}">
+                <a16:creationId xmlns:a16="http://schemas.microsoft.com/office/drawing/2014/main" id="{895DC5E9-DAB8-5F34-E3E0-E5697607D3E0}"/>
+              </a:ext>
+            </a:extLst>
+          </p:cNvPr>
+          <p:cNvSpPr/>
+          <p:nvPr/>
+        </p:nvSpPr>
+        <p:spPr>
+          <a:xfrm>
+            <a:off x="1770434" y="1079771"/>
+            <a:ext cx="1215958" cy="486383"/>
+          </a:xfrm>
+          <a:prstGeom prst="ellipse">
             <a:avLst/>
           </a:prstGeom>
           <a:noFill/>
-        </p:spPr>
-        <p:txBody>
-          <a:bodyPr wrap="none" rtlCol="0">
-            <a:spAutoFit/>
-          </a:bodyPr>
-          <a:lstStyle/>
-          <a:p>
-            <a:pPr algn="l"/>
-            <a:r>
-              <a:rPr lang="en-US">
-                <a:latin typeface="Avenir Book" panose="02000503020000020003" pitchFamily="2" charset="0"/>
-              </a:rPr>
-              <a:t>screening data</a:t>
-            </a:r>
+          <a:ln>
+            <a:solidFill>
+              <a:srgbClr val="FF0000"/>
+            </a:solidFill>
+          </a:ln>
+        </p:spPr>
+        <p:style>
+          <a:lnRef idx="2">
+            <a:schemeClr val="accent1">
+              <a:shade val="15000"/>
+            </a:schemeClr>
+          </a:lnRef>
+          <a:fillRef idx="1">
+            <a:schemeClr val="accent1"/>
+          </a:fillRef>
+          <a:effectRef idx="0">
+            <a:schemeClr val="accent1"/>
+          </a:effectRef>
+          <a:fontRef idx="minor">
+            <a:schemeClr val="lt1"/>
+          </a:fontRef>
+        </p:style>
+        <p:txBody>
+          <a:bodyPr rtlCol="0" anchor="ctr"/>
+          <a:lstStyle/>
+          <a:p>
+            <a:pPr algn="ctr"/>
+            <a:endParaRPr lang="en-US"/>
           </a:p>
         </p:txBody>
       </p:sp>
       <p:cxnSp>
         <p:nvCxnSpPr>
-          <p:cNvPr id="4" name="Straight Arrow Connector 3">
-            <a:extLst>
-              <a:ext uri="{FF2B5EF4-FFF2-40B4-BE49-F238E27FC236}">
-                <a16:creationId xmlns:a16="http://schemas.microsoft.com/office/drawing/2014/main" id="{939F4F54-80AB-CA6C-9604-04683A380219}"/>
+          <p:cNvPr id="5" name="Straight Arrow Connector 4">
+            <a:extLst>
+              <a:ext uri="{FF2B5EF4-FFF2-40B4-BE49-F238E27FC236}">
+                <a16:creationId xmlns:a16="http://schemas.microsoft.com/office/drawing/2014/main" id="{6C2E803C-F2DF-554B-F700-416E67673B6E}"/>
               </a:ext>
             </a:extLst>
           </p:cNvPr>
@@ -7461,102 +9509,17 @@
           <p:nvPr/>
         </p:nvCxnSpPr>
         <p:spPr>
-          <a:xfrm>
-            <a:off x="3854147" y="3439413"/>
-            <a:ext cx="1092502" cy="0"/>
+          <a:xfrm flipV="1">
+            <a:off x="933855" y="4542817"/>
+            <a:ext cx="0" cy="1624519"/>
           </a:xfrm>
           <a:prstGeom prst="straightConnector1">
             <a:avLst/>
           </a:prstGeom>
           <a:ln>
-            <a:tailEnd type="triangle"/>
-          </a:ln>
-        </p:spPr>
-        <p:style>
-          <a:lnRef idx="1">
-            <a:schemeClr val="accent1"/>
-          </a:lnRef>
-          <a:fillRef idx="0">
-            <a:schemeClr val="accent1"/>
-          </a:fillRef>
-          <a:effectRef idx="0">
-            <a:schemeClr val="accent1"/>
-          </a:effectRef>
-          <a:fontRef idx="minor">
-            <a:schemeClr val="tx1"/>
-          </a:fontRef>
-        </p:style>
-      </p:cxnSp>
-      <p:sp>
-        <p:nvSpPr>
-          <p:cNvPr id="38" name="TextBox 37">
-            <a:extLst>
-              <a:ext uri="{FF2B5EF4-FFF2-40B4-BE49-F238E27FC236}">
-                <a16:creationId xmlns:a16="http://schemas.microsoft.com/office/drawing/2014/main" id="{658D8FB3-08B2-5564-DB14-2A43026837A4}"/>
-              </a:ext>
-            </a:extLst>
-          </p:cNvPr>
-          <p:cNvSpPr txBox="1"/>
-          <p:nvPr/>
-        </p:nvSpPr>
-        <p:spPr>
-          <a:xfrm>
-            <a:off x="5168921" y="3124025"/>
-            <a:ext cx="2422779" cy="646331"/>
-          </a:xfrm>
-          <a:prstGeom prst="rect">
-            <a:avLst/>
-          </a:prstGeom>
-          <a:noFill/>
-        </p:spPr>
-        <p:txBody>
-          <a:bodyPr wrap="none" rtlCol="0">
-            <a:spAutoFit/>
-          </a:bodyPr>
-          <a:lstStyle/>
-          <a:p>
-            <a:pPr algn="l"/>
-            <a:r>
-              <a:rPr lang="en-US">
-                <a:latin typeface="Avenir Book" panose="02000503020000020003" pitchFamily="2" charset="0"/>
-              </a:rPr>
-              <a:t>binders from different</a:t>
-            </a:r>
-          </a:p>
-          <a:p>
-            <a:pPr algn="l"/>
-            <a:r>
-              <a:rPr lang="en-US">
-                <a:latin typeface="Avenir Book" panose="02000503020000020003" pitchFamily="2" charset="0"/>
-              </a:rPr>
-              <a:t>z-score ranges</a:t>
-            </a:r>
-          </a:p>
-        </p:txBody>
-      </p:sp>
-      <p:cxnSp>
-        <p:nvCxnSpPr>
-          <p:cNvPr id="17" name="Straight Arrow Connector 16">
-            <a:extLst>
-              <a:ext uri="{FF2B5EF4-FFF2-40B4-BE49-F238E27FC236}">
-                <a16:creationId xmlns:a16="http://schemas.microsoft.com/office/drawing/2014/main" id="{A71808E5-9856-2547-2FE1-7C8E44EA90BD}"/>
-              </a:ext>
-            </a:extLst>
-          </p:cNvPr>
-          <p:cNvCxnSpPr>
-            <a:cxnSpLocks/>
-          </p:cNvCxnSpPr>
-          <p:nvPr/>
-        </p:nvCxnSpPr>
-        <p:spPr>
-          <a:xfrm>
-            <a:off x="7627861" y="3497470"/>
-            <a:ext cx="1048960" cy="637287"/>
-          </a:xfrm>
-          <a:prstGeom prst="straightConnector1">
-            <a:avLst/>
-          </a:prstGeom>
-          <a:ln>
+            <a:solidFill>
+              <a:srgbClr val="FF0000"/>
+            </a:solidFill>
             <a:tailEnd type="triangle"/>
           </a:ln>
         </p:spPr>
@@ -7577,10 +9540,10 @@
       </p:cxnSp>
       <p:cxnSp>
         <p:nvCxnSpPr>
-          <p:cNvPr id="22" name="Straight Arrow Connector 21">
-            <a:extLst>
-              <a:ext uri="{FF2B5EF4-FFF2-40B4-BE49-F238E27FC236}">
-                <a16:creationId xmlns:a16="http://schemas.microsoft.com/office/drawing/2014/main" id="{D061C43B-6E37-B290-0E84-B308001EB697}"/>
+          <p:cNvPr id="6" name="Straight Arrow Connector 5">
+            <a:extLst>
+              <a:ext uri="{FF2B5EF4-FFF2-40B4-BE49-F238E27FC236}">
+                <a16:creationId xmlns:a16="http://schemas.microsoft.com/office/drawing/2014/main" id="{902506B4-CF02-02DE-CB1F-135176AB2946}"/>
               </a:ext>
             </a:extLst>
           </p:cNvPr>
@@ -7591,92 +9554,16 @@
         </p:nvCxnSpPr>
         <p:spPr>
           <a:xfrm>
-            <a:off x="7689850" y="1841499"/>
-            <a:ext cx="963246" cy="312616"/>
+            <a:off x="4756826" y="632298"/>
+            <a:ext cx="904672" cy="564204"/>
           </a:xfrm>
           <a:prstGeom prst="straightConnector1">
             <a:avLst/>
           </a:prstGeom>
           <a:ln>
-            <a:tailEnd type="triangle"/>
-          </a:ln>
-        </p:spPr>
-        <p:style>
-          <a:lnRef idx="1">
-            <a:schemeClr val="accent1"/>
-          </a:lnRef>
-          <a:fillRef idx="0">
-            <a:schemeClr val="accent1"/>
-          </a:fillRef>
-          <a:effectRef idx="0">
-            <a:schemeClr val="accent1"/>
-          </a:effectRef>
-          <a:fontRef idx="minor">
-            <a:schemeClr val="tx1"/>
-          </a:fontRef>
-        </p:style>
-      </p:cxnSp>
-      <p:sp>
-        <p:nvSpPr>
-          <p:cNvPr id="26" name="TextBox 25">
-            <a:extLst>
-              <a:ext uri="{FF2B5EF4-FFF2-40B4-BE49-F238E27FC236}">
-                <a16:creationId xmlns:a16="http://schemas.microsoft.com/office/drawing/2014/main" id="{9824A793-F7B8-1FEB-2399-D2192E2B1C3E}"/>
-              </a:ext>
-            </a:extLst>
-          </p:cNvPr>
-          <p:cNvSpPr txBox="1"/>
-          <p:nvPr/>
-        </p:nvSpPr>
-        <p:spPr>
-          <a:xfrm>
-            <a:off x="5106307" y="1623786"/>
-            <a:ext cx="2402261" cy="369332"/>
-          </a:xfrm>
-          <a:prstGeom prst="rect">
-            <a:avLst/>
-          </a:prstGeom>
-          <a:noFill/>
-        </p:spPr>
-        <p:txBody>
-          <a:bodyPr wrap="none" rtlCol="0">
-            <a:spAutoFit/>
-          </a:bodyPr>
-          <a:lstStyle/>
-          <a:p>
-            <a:pPr algn="l"/>
-            <a:r>
-              <a:rPr lang="en-US">
-                <a:latin typeface="Avenir Book" panose="02000503020000020003" pitchFamily="2" charset="0"/>
-              </a:rPr>
-              <a:t>screening nonbinders</a:t>
-            </a:r>
-          </a:p>
-        </p:txBody>
-      </p:sp>
-      <p:cxnSp>
-        <p:nvCxnSpPr>
-          <p:cNvPr id="29" name="Straight Arrow Connector 28">
-            <a:extLst>
-              <a:ext uri="{FF2B5EF4-FFF2-40B4-BE49-F238E27FC236}">
-                <a16:creationId xmlns:a16="http://schemas.microsoft.com/office/drawing/2014/main" id="{BF920E17-76E1-3A23-066B-2F73C6030622}"/>
-              </a:ext>
-            </a:extLst>
-          </p:cNvPr>
-          <p:cNvCxnSpPr>
-            <a:cxnSpLocks/>
-          </p:cNvCxnSpPr>
-          <p:nvPr/>
-        </p:nvCxnSpPr>
-        <p:spPr>
-          <a:xfrm flipV="1">
-            <a:off x="3767061" y="2247900"/>
-            <a:ext cx="990903" cy="683513"/>
-          </a:xfrm>
-          <a:prstGeom prst="straightConnector1">
-            <a:avLst/>
-          </a:prstGeom>
-          <a:ln>
+            <a:solidFill>
+              <a:srgbClr val="FF0000"/>
+            </a:solidFill>
             <a:tailEnd type="triangle"/>
           </a:ln>
         </p:spPr>
@@ -7697,10 +9584,10 @@
       </p:cxnSp>
       <p:cxnSp>
         <p:nvCxnSpPr>
-          <p:cNvPr id="37" name="Straight Arrow Connector 36">
-            <a:extLst>
-              <a:ext uri="{FF2B5EF4-FFF2-40B4-BE49-F238E27FC236}">
-                <a16:creationId xmlns:a16="http://schemas.microsoft.com/office/drawing/2014/main" id="{DCFB45A0-ABC7-86E8-7207-17851BA0AF61}"/>
+          <p:cNvPr id="8" name="Straight Arrow Connector 7">
+            <a:extLst>
+              <a:ext uri="{FF2B5EF4-FFF2-40B4-BE49-F238E27FC236}">
+                <a16:creationId xmlns:a16="http://schemas.microsoft.com/office/drawing/2014/main" id="{6DEDDFC1-9120-DFFF-54CC-1B832D77FF8B}"/>
               </a:ext>
             </a:extLst>
           </p:cNvPr>
@@ -7710,14 +9597,344 @@
           <p:nvPr/>
         </p:nvCxnSpPr>
         <p:spPr>
-          <a:xfrm flipV="1">
-            <a:off x="7627861" y="2552700"/>
-            <a:ext cx="1019932" cy="596427"/>
+          <a:xfrm>
+            <a:off x="4873557" y="554477"/>
+            <a:ext cx="4600643" cy="652023"/>
           </a:xfrm>
           <a:prstGeom prst="straightConnector1">
             <a:avLst/>
           </a:prstGeom>
           <a:ln>
+            <a:solidFill>
+              <a:srgbClr val="FF0000"/>
+            </a:solidFill>
+            <a:tailEnd type="triangle"/>
+          </a:ln>
+        </p:spPr>
+        <p:style>
+          <a:lnRef idx="1">
+            <a:schemeClr val="accent1"/>
+          </a:lnRef>
+          <a:fillRef idx="0">
+            <a:schemeClr val="accent1"/>
+          </a:fillRef>
+          <a:effectRef idx="0">
+            <a:schemeClr val="accent1"/>
+          </a:effectRef>
+          <a:fontRef idx="minor">
+            <a:schemeClr val="tx1"/>
+          </a:fontRef>
+        </p:style>
+      </p:cxnSp>
+      <p:sp>
+        <p:nvSpPr>
+          <p:cNvPr id="10" name="Oval 9">
+            <a:extLst>
+              <a:ext uri="{FF2B5EF4-FFF2-40B4-BE49-F238E27FC236}">
+                <a16:creationId xmlns:a16="http://schemas.microsoft.com/office/drawing/2014/main" id="{483017D2-E963-945F-BAC9-7848963F0F3E}"/>
+              </a:ext>
+            </a:extLst>
+          </p:cNvPr>
+          <p:cNvSpPr/>
+          <p:nvPr/>
+        </p:nvSpPr>
+        <p:spPr>
+          <a:xfrm>
+            <a:off x="5612859" y="1108954"/>
+            <a:ext cx="1215958" cy="486383"/>
+          </a:xfrm>
+          <a:prstGeom prst="ellipse">
+            <a:avLst/>
+          </a:prstGeom>
+          <a:noFill/>
+          <a:ln>
+            <a:solidFill>
+              <a:srgbClr val="FF0000"/>
+            </a:solidFill>
+          </a:ln>
+        </p:spPr>
+        <p:style>
+          <a:lnRef idx="2">
+            <a:schemeClr val="accent1">
+              <a:shade val="15000"/>
+            </a:schemeClr>
+          </a:lnRef>
+          <a:fillRef idx="1">
+            <a:schemeClr val="accent1"/>
+          </a:fillRef>
+          <a:effectRef idx="0">
+            <a:schemeClr val="accent1"/>
+          </a:effectRef>
+          <a:fontRef idx="minor">
+            <a:schemeClr val="lt1"/>
+          </a:fontRef>
+        </p:style>
+        <p:txBody>
+          <a:bodyPr rtlCol="0" anchor="ctr"/>
+          <a:lstStyle/>
+          <a:p>
+            <a:pPr algn="ctr"/>
+            <a:endParaRPr lang="en-US"/>
+          </a:p>
+        </p:txBody>
+      </p:sp>
+      <p:sp>
+        <p:nvSpPr>
+          <p:cNvPr id="12" name="Oval 11">
+            <a:extLst>
+              <a:ext uri="{FF2B5EF4-FFF2-40B4-BE49-F238E27FC236}">
+                <a16:creationId xmlns:a16="http://schemas.microsoft.com/office/drawing/2014/main" id="{F723DFEB-FB5E-07D7-D8EA-AB8E3AB9B225}"/>
+              </a:ext>
+            </a:extLst>
+          </p:cNvPr>
+          <p:cNvSpPr/>
+          <p:nvPr/>
+        </p:nvSpPr>
+        <p:spPr>
+          <a:xfrm>
+            <a:off x="9474740" y="1079771"/>
+            <a:ext cx="1215958" cy="486383"/>
+          </a:xfrm>
+          <a:prstGeom prst="ellipse">
+            <a:avLst/>
+          </a:prstGeom>
+          <a:noFill/>
+          <a:ln>
+            <a:solidFill>
+              <a:srgbClr val="FF0000"/>
+            </a:solidFill>
+          </a:ln>
+        </p:spPr>
+        <p:style>
+          <a:lnRef idx="2">
+            <a:schemeClr val="accent1">
+              <a:shade val="15000"/>
+            </a:schemeClr>
+          </a:lnRef>
+          <a:fillRef idx="1">
+            <a:schemeClr val="accent1"/>
+          </a:fillRef>
+          <a:effectRef idx="0">
+            <a:schemeClr val="accent1"/>
+          </a:effectRef>
+          <a:fontRef idx="minor">
+            <a:schemeClr val="lt1"/>
+          </a:fontRef>
+        </p:style>
+        <p:txBody>
+          <a:bodyPr rtlCol="0" anchor="ctr"/>
+          <a:lstStyle/>
+          <a:p>
+            <a:pPr algn="ctr"/>
+            <a:endParaRPr lang="en-US"/>
+          </a:p>
+        </p:txBody>
+      </p:sp>
+      <p:sp>
+        <p:nvSpPr>
+          <p:cNvPr id="13" name="TextBox 12">
+            <a:extLst>
+              <a:ext uri="{FF2B5EF4-FFF2-40B4-BE49-F238E27FC236}">
+                <a16:creationId xmlns:a16="http://schemas.microsoft.com/office/drawing/2014/main" id="{09663130-ED52-F593-5744-5DB34FF603ED}"/>
+              </a:ext>
+            </a:extLst>
+          </p:cNvPr>
+          <p:cNvSpPr txBox="1"/>
+          <p:nvPr/>
+        </p:nvSpPr>
+        <p:spPr>
+          <a:xfrm>
+            <a:off x="3686783" y="330740"/>
+            <a:ext cx="1029449" cy="369332"/>
+          </a:xfrm>
+          <a:prstGeom prst="rect">
+            <a:avLst/>
+          </a:prstGeom>
+          <a:noFill/>
+        </p:spPr>
+        <p:txBody>
+          <a:bodyPr wrap="none" rtlCol="0">
+            <a:spAutoFit/>
+          </a:bodyPr>
+          <a:lstStyle/>
+          <a:p>
+            <a:pPr algn="l"/>
+            <a:r>
+              <a:rPr lang="en-US">
+                <a:solidFill>
+                  <a:srgbClr val="FF0000"/>
+                </a:solidFill>
+                <a:latin typeface="Avenir Book" panose="02000503020000020003" pitchFamily="2" charset="0"/>
+              </a:rPr>
+              <a:t>test sets</a:t>
+            </a:r>
+          </a:p>
+        </p:txBody>
+      </p:sp>
+      <p:sp>
+        <p:nvSpPr>
+          <p:cNvPr id="19" name="TextBox 18">
+            <a:extLst>
+              <a:ext uri="{FF2B5EF4-FFF2-40B4-BE49-F238E27FC236}">
+                <a16:creationId xmlns:a16="http://schemas.microsoft.com/office/drawing/2014/main" id="{119115D5-FC92-47B1-02B9-FB6F8713E29D}"/>
+              </a:ext>
+            </a:extLst>
+          </p:cNvPr>
+          <p:cNvSpPr txBox="1"/>
+          <p:nvPr/>
+        </p:nvSpPr>
+        <p:spPr>
+          <a:xfrm>
+            <a:off x="0" y="6245158"/>
+            <a:ext cx="2004523" cy="276999"/>
+          </a:xfrm>
+          <a:prstGeom prst="rect">
+            <a:avLst/>
+          </a:prstGeom>
+          <a:noFill/>
+        </p:spPr>
+        <p:txBody>
+          <a:bodyPr wrap="none" rtlCol="0">
+            <a:spAutoFit/>
+          </a:bodyPr>
+          <a:lstStyle/>
+          <a:p>
+            <a:pPr algn="l"/>
+            <a:r>
+              <a:rPr lang="en-US" sz="1200">
+                <a:solidFill>
+                  <a:srgbClr val="FF0000"/>
+                </a:solidFill>
+                <a:latin typeface="Avenir Book" panose="02000503020000020003" pitchFamily="2" charset="0"/>
+              </a:rPr>
+              <a:t>all binders (z-score &gt;= 1.7)</a:t>
+            </a:r>
+          </a:p>
+        </p:txBody>
+      </p:sp>
+      <p:cxnSp>
+        <p:nvCxnSpPr>
+          <p:cNvPr id="20" name="Straight Arrow Connector 19">
+            <a:extLst>
+              <a:ext uri="{FF2B5EF4-FFF2-40B4-BE49-F238E27FC236}">
+                <a16:creationId xmlns:a16="http://schemas.microsoft.com/office/drawing/2014/main" id="{8AB2468D-6615-8570-935D-A116F06846DB}"/>
+              </a:ext>
+            </a:extLst>
+          </p:cNvPr>
+          <p:cNvCxnSpPr>
+            <a:cxnSpLocks/>
+          </p:cNvCxnSpPr>
+          <p:nvPr/>
+        </p:nvCxnSpPr>
+        <p:spPr>
+          <a:xfrm flipH="1">
+            <a:off x="2791838" y="642026"/>
+            <a:ext cx="846307" cy="418289"/>
+          </a:xfrm>
+          <a:prstGeom prst="straightConnector1">
+            <a:avLst/>
+          </a:prstGeom>
+          <a:ln>
+            <a:solidFill>
+              <a:srgbClr val="FF0000"/>
+            </a:solidFill>
+            <a:tailEnd type="triangle"/>
+          </a:ln>
+        </p:spPr>
+        <p:style>
+          <a:lnRef idx="1">
+            <a:schemeClr val="accent1"/>
+          </a:lnRef>
+          <a:fillRef idx="0">
+            <a:schemeClr val="accent1"/>
+          </a:fillRef>
+          <a:effectRef idx="0">
+            <a:schemeClr val="accent1"/>
+          </a:effectRef>
+          <a:fontRef idx="minor">
+            <a:schemeClr val="tx1"/>
+          </a:fontRef>
+        </p:style>
+      </p:cxnSp>
+      <p:sp>
+        <p:nvSpPr>
+          <p:cNvPr id="22" name="TextBox 21">
+            <a:extLst>
+              <a:ext uri="{FF2B5EF4-FFF2-40B4-BE49-F238E27FC236}">
+                <a16:creationId xmlns:a16="http://schemas.microsoft.com/office/drawing/2014/main" id="{6B55E2C3-7969-024C-CE09-37C3FC924090}"/>
+              </a:ext>
+            </a:extLst>
+          </p:cNvPr>
+          <p:cNvSpPr txBox="1"/>
+          <p:nvPr/>
+        </p:nvSpPr>
+        <p:spPr>
+          <a:xfrm>
+            <a:off x="2626468" y="6361890"/>
+            <a:ext cx="1967205" cy="461665"/>
+          </a:xfrm>
+          <a:prstGeom prst="rect">
+            <a:avLst/>
+          </a:prstGeom>
+          <a:noFill/>
+        </p:spPr>
+        <p:txBody>
+          <a:bodyPr wrap="none" rtlCol="0">
+            <a:spAutoFit/>
+          </a:bodyPr>
+          <a:lstStyle/>
+          <a:p>
+            <a:pPr algn="l"/>
+            <a:r>
+              <a:rPr lang="en-US" sz="1200">
+                <a:solidFill>
+                  <a:srgbClr val="FF0000"/>
+                </a:solidFill>
+                <a:latin typeface="Avenir Book" panose="02000503020000020003" pitchFamily="2" charset="0"/>
+              </a:rPr>
+              <a:t>z-score &gt;= 1.7</a:t>
+            </a:r>
+          </a:p>
+          <a:p>
+            <a:pPr algn="l"/>
+            <a:r>
+              <a:rPr lang="en-US" sz="1200">
+                <a:solidFill>
+                  <a:srgbClr val="FF0000"/>
+                </a:solidFill>
+                <a:latin typeface="Avenir Book" panose="02000503020000020003" pitchFamily="2" charset="0"/>
+              </a:rPr>
+              <a:t>matching the motif shown</a:t>
+            </a:r>
+          </a:p>
+        </p:txBody>
+      </p:sp>
+      <p:cxnSp>
+        <p:nvCxnSpPr>
+          <p:cNvPr id="23" name="Straight Arrow Connector 22">
+            <a:extLst>
+              <a:ext uri="{FF2B5EF4-FFF2-40B4-BE49-F238E27FC236}">
+                <a16:creationId xmlns:a16="http://schemas.microsoft.com/office/drawing/2014/main" id="{BCB177A1-67B3-1EB3-E17C-2F13D40263E8}"/>
+              </a:ext>
+            </a:extLst>
+          </p:cNvPr>
+          <p:cNvCxnSpPr>
+            <a:cxnSpLocks/>
+          </p:cNvCxnSpPr>
+          <p:nvPr/>
+        </p:nvCxnSpPr>
+        <p:spPr>
+          <a:xfrm flipH="1" flipV="1">
+            <a:off x="2821021" y="5797686"/>
+            <a:ext cx="350196" cy="535020"/>
+          </a:xfrm>
+          <a:prstGeom prst="straightConnector1">
+            <a:avLst/>
+          </a:prstGeom>
+          <a:ln>
+            <a:solidFill>
+              <a:srgbClr val="FF0000"/>
+            </a:solidFill>
             <a:tailEnd type="triangle"/>
           </a:ln>
         </p:spPr>
@@ -7738,10 +9955,10 @@
       </p:cxnSp>
       <p:cxnSp>
         <p:nvCxnSpPr>
-          <p:cNvPr id="40" name="Straight Arrow Connector 39">
-            <a:extLst>
-              <a:ext uri="{FF2B5EF4-FFF2-40B4-BE49-F238E27FC236}">
-                <a16:creationId xmlns:a16="http://schemas.microsoft.com/office/drawing/2014/main" id="{6B2E9CD2-6D27-4A24-AC53-855FBEF0549F}"/>
+          <p:cNvPr id="25" name="Straight Arrow Connector 24">
+            <a:extLst>
+              <a:ext uri="{FF2B5EF4-FFF2-40B4-BE49-F238E27FC236}">
+                <a16:creationId xmlns:a16="http://schemas.microsoft.com/office/drawing/2014/main" id="{1EE8446D-E034-2FAC-876C-C0EB2F035AC1}"/>
               </a:ext>
             </a:extLst>
           </p:cNvPr>
@@ -7751,14 +9968,17 @@
           <p:nvPr/>
         </p:nvCxnSpPr>
         <p:spPr>
-          <a:xfrm>
-            <a:off x="2695540" y="3771900"/>
-            <a:ext cx="0" cy="1424354"/>
+          <a:xfrm flipV="1">
+            <a:off x="3297677" y="5729593"/>
+            <a:ext cx="0" cy="554475"/>
           </a:xfrm>
           <a:prstGeom prst="straightConnector1">
             <a:avLst/>
           </a:prstGeom>
           <a:ln>
+            <a:solidFill>
+              <a:srgbClr val="FF0000"/>
+            </a:solidFill>
             <a:tailEnd type="triangle"/>
           </a:ln>
         </p:spPr>
@@ -7777,12 +9997,56 @@
           </a:fontRef>
         </p:style>
       </p:cxnSp>
-      <p:sp>
-        <p:nvSpPr>
-          <p:cNvPr id="45" name="TextBox 44">
-            <a:extLst>
-              <a:ext uri="{FF2B5EF4-FFF2-40B4-BE49-F238E27FC236}">
-                <a16:creationId xmlns:a16="http://schemas.microsoft.com/office/drawing/2014/main" id="{61F12D4D-165C-054C-1CFE-72EE7AE900A2}"/>
+      <p:cxnSp>
+        <p:nvCxnSpPr>
+          <p:cNvPr id="28" name="Straight Arrow Connector 27">
+            <a:extLst>
+              <a:ext uri="{FF2B5EF4-FFF2-40B4-BE49-F238E27FC236}">
+                <a16:creationId xmlns:a16="http://schemas.microsoft.com/office/drawing/2014/main" id="{8BD8A675-75AA-7966-33D6-2A810204164C}"/>
+              </a:ext>
+            </a:extLst>
+          </p:cNvPr>
+          <p:cNvCxnSpPr>
+            <a:cxnSpLocks/>
+          </p:cNvCxnSpPr>
+          <p:nvPr/>
+        </p:nvCxnSpPr>
+        <p:spPr>
+          <a:xfrm flipH="1">
+            <a:off x="6502400" y="647700"/>
+            <a:ext cx="228600" cy="393700"/>
+          </a:xfrm>
+          <a:prstGeom prst="straightConnector1">
+            <a:avLst/>
+          </a:prstGeom>
+          <a:ln>
+            <a:solidFill>
+              <a:srgbClr val="FF0000"/>
+            </a:solidFill>
+            <a:tailEnd type="triangle"/>
+          </a:ln>
+        </p:spPr>
+        <p:style>
+          <a:lnRef idx="1">
+            <a:schemeClr val="accent1"/>
+          </a:lnRef>
+          <a:fillRef idx="0">
+            <a:schemeClr val="accent1"/>
+          </a:fillRef>
+          <a:effectRef idx="0">
+            <a:schemeClr val="accent1"/>
+          </a:effectRef>
+          <a:fontRef idx="minor">
+            <a:schemeClr val="tx1"/>
+          </a:fontRef>
+        </p:style>
+      </p:cxnSp>
+      <p:sp>
+        <p:nvSpPr>
+          <p:cNvPr id="29" name="TextBox 28">
+            <a:extLst>
+              <a:ext uri="{FF2B5EF4-FFF2-40B4-BE49-F238E27FC236}">
+                <a16:creationId xmlns:a16="http://schemas.microsoft.com/office/drawing/2014/main" id="{2FA71C77-0C7E-5E73-3A20-744B9A023E98}"/>
               </a:ext>
             </a:extLst>
           </p:cNvPr>
@@ -7791,8 +10055,8 @@
         </p:nvSpPr>
         <p:spPr>
           <a:xfrm>
-            <a:off x="1615621" y="5235610"/>
-            <a:ext cx="2028119" cy="369332"/>
+            <a:off x="5765800" y="165100"/>
+            <a:ext cx="2401107" cy="523220"/>
           </a:xfrm>
           <a:prstGeom prst="rect">
             <a:avLst/>
@@ -7807,69 +10071,35 @@
           <a:p>
             <a:pPr algn="l"/>
             <a:r>
-              <a:rPr lang="en-US">
+              <a:rPr lang="en-US" sz="1400">
+                <a:solidFill>
+                  <a:srgbClr val="FF0000"/>
+                </a:solidFill>
                 <a:latin typeface="Avenir Book" panose="02000503020000020003" pitchFamily="2" charset="0"/>
               </a:rPr>
-              <a:t>all binders (PSSM)</a:t>
-            </a:r>
-          </a:p>
-        </p:txBody>
-      </p:sp>
-      <p:sp>
-        <p:nvSpPr>
-          <p:cNvPr id="49" name="5-Point Star 48">
-            <a:extLst>
-              <a:ext uri="{FF2B5EF4-FFF2-40B4-BE49-F238E27FC236}">
-                <a16:creationId xmlns:a16="http://schemas.microsoft.com/office/drawing/2014/main" id="{754FDAEE-3799-3B3B-3168-101870CF768F}"/>
-              </a:ext>
-            </a:extLst>
-          </p:cNvPr>
-          <p:cNvSpPr/>
-          <p:nvPr/>
-        </p:nvSpPr>
-        <p:spPr>
-          <a:xfrm>
-            <a:off x="2905920" y="4945555"/>
-            <a:ext cx="294968" cy="250723"/>
-          </a:xfrm>
-          <a:prstGeom prst="star5">
-            <a:avLst/>
-          </a:prstGeom>
-          <a:solidFill>
-            <a:srgbClr val="FF0000"/>
-          </a:solidFill>
-        </p:spPr>
-        <p:style>
-          <a:lnRef idx="2">
-            <a:schemeClr val="accent1">
-              <a:shade val="15000"/>
-            </a:schemeClr>
-          </a:lnRef>
-          <a:fillRef idx="1">
-            <a:schemeClr val="accent1"/>
-          </a:fillRef>
-          <a:effectRef idx="0">
-            <a:schemeClr val="accent1"/>
-          </a:effectRef>
-          <a:fontRef idx="minor">
-            <a:schemeClr val="lt1"/>
-          </a:fontRef>
-        </p:style>
-        <p:txBody>
-          <a:bodyPr rtlCol="0" anchor="ctr"/>
-          <a:lstStyle/>
-          <a:p>
-            <a:pPr algn="ctr"/>
-            <a:endParaRPr lang="en-US"/>
-          </a:p>
-        </p:txBody>
-      </p:sp>
-      <p:sp>
-        <p:nvSpPr>
-          <p:cNvPr id="51" name="TextBox 50">
-            <a:extLst>
-              <a:ext uri="{FF2B5EF4-FFF2-40B4-BE49-F238E27FC236}">
-                <a16:creationId xmlns:a16="http://schemas.microsoft.com/office/drawing/2014/main" id="{9FFF0496-022E-6BE4-954D-FD5232883077}"/>
+              <a:t>binders (z-score &gt;= 1.7)</a:t>
+            </a:r>
+          </a:p>
+          <a:p>
+            <a:pPr algn="l"/>
+            <a:r>
+              <a:rPr lang="en-US" sz="1400">
+                <a:solidFill>
+                  <a:srgbClr val="FF0000"/>
+                </a:solidFill>
+                <a:latin typeface="Avenir Book" panose="02000503020000020003" pitchFamily="2" charset="0"/>
+              </a:rPr>
+              <a:t>matching motif [FWY]xx[LVI]</a:t>
+            </a:r>
+          </a:p>
+        </p:txBody>
+      </p:sp>
+      <p:sp>
+        <p:nvSpPr>
+          <p:cNvPr id="32" name="TextBox 31">
+            <a:extLst>
+              <a:ext uri="{FF2B5EF4-FFF2-40B4-BE49-F238E27FC236}">
+                <a16:creationId xmlns:a16="http://schemas.microsoft.com/office/drawing/2014/main" id="{4740A33E-08A9-B213-0B58-AE61C3C343F1}"/>
               </a:ext>
             </a:extLst>
           </p:cNvPr>
@@ -7878,8 +10108,8 @@
         </p:nvSpPr>
         <p:spPr>
           <a:xfrm>
-            <a:off x="8758604" y="2206869"/>
-            <a:ext cx="931665" cy="369332"/>
+            <a:off x="9245600" y="215900"/>
+            <a:ext cx="2542684" cy="523220"/>
           </a:xfrm>
           <a:prstGeom prst="rect">
             <a:avLst/>
@@ -7894,192 +10124,76 @@
           <a:p>
             <a:pPr algn="l"/>
             <a:r>
-              <a:rPr lang="en-US">
+              <a:rPr lang="en-US" sz="1400">
+                <a:solidFill>
+                  <a:srgbClr val="FF0000"/>
+                </a:solidFill>
                 <a:latin typeface="Avenir Book" panose="02000503020000020003" pitchFamily="2" charset="0"/>
               </a:rPr>
-              <a:t>test set</a:t>
-            </a:r>
-          </a:p>
-        </p:txBody>
-      </p:sp>
-      <p:sp>
-        <p:nvSpPr>
-          <p:cNvPr id="52" name="TextBox 51">
-            <a:extLst>
-              <a:ext uri="{FF2B5EF4-FFF2-40B4-BE49-F238E27FC236}">
-                <a16:creationId xmlns:a16="http://schemas.microsoft.com/office/drawing/2014/main" id="{F94390A4-669F-A1B9-6520-1E629B1BD5C4}"/>
-              </a:ext>
-            </a:extLst>
-          </p:cNvPr>
-          <p:cNvSpPr txBox="1"/>
-          <p:nvPr/>
-        </p:nvSpPr>
-        <p:spPr>
-          <a:xfrm>
-            <a:off x="8723435" y="4070839"/>
-            <a:ext cx="883575" cy="369332"/>
-          </a:xfrm>
-          <a:prstGeom prst="rect">
-            <a:avLst/>
-          </a:prstGeom>
-          <a:noFill/>
-        </p:spPr>
-        <p:txBody>
-          <a:bodyPr wrap="none" rtlCol="0">
-            <a:spAutoFit/>
-          </a:bodyPr>
-          <a:lstStyle/>
-          <a:p>
-            <a:pPr algn="l"/>
-            <a:r>
-              <a:rPr lang="en-US">
+              <a:t>binders (z-score &gt;= 1.7)</a:t>
+            </a:r>
+          </a:p>
+          <a:p>
+            <a:r>
+              <a:rPr lang="en-US" sz="1400">
+                <a:solidFill>
+                  <a:srgbClr val="FF0000"/>
+                </a:solidFill>
                 <a:latin typeface="Avenir Book" panose="02000503020000020003" pitchFamily="2" charset="0"/>
               </a:rPr>
-              <a:t>”train”</a:t>
-            </a:r>
-          </a:p>
-        </p:txBody>
-      </p:sp>
-      <p:sp>
-        <p:nvSpPr>
-          <p:cNvPr id="53" name="TextBox 52">
-            <a:extLst>
-              <a:ext uri="{FF2B5EF4-FFF2-40B4-BE49-F238E27FC236}">
-                <a16:creationId xmlns:a16="http://schemas.microsoft.com/office/drawing/2014/main" id="{DE150935-F09F-D729-266A-174BF5B3EAE0}"/>
-              </a:ext>
-            </a:extLst>
-          </p:cNvPr>
-          <p:cNvSpPr txBox="1"/>
-          <p:nvPr/>
-        </p:nvSpPr>
-        <p:spPr>
-          <a:xfrm>
-            <a:off x="9514742" y="4023946"/>
-            <a:ext cx="779381" cy="369332"/>
-          </a:xfrm>
-          <a:prstGeom prst="rect">
-            <a:avLst/>
-          </a:prstGeom>
-          <a:noFill/>
-        </p:spPr>
-        <p:txBody>
-          <a:bodyPr wrap="none" rtlCol="0">
-            <a:spAutoFit/>
-          </a:bodyPr>
-          <a:lstStyle/>
-          <a:p>
-            <a:pPr algn="l"/>
-            <a:r>
-              <a:rPr lang="en-US">
-                <a:latin typeface="Avenir Book" panose="02000503020000020003" pitchFamily="2" charset="0"/>
-              </a:rPr>
-              <a:t>PSSM</a:t>
-            </a:r>
-          </a:p>
-        </p:txBody>
-      </p:sp>
-      <p:sp>
-        <p:nvSpPr>
-          <p:cNvPr id="54" name="5-Point Star 53">
-            <a:extLst>
-              <a:ext uri="{FF2B5EF4-FFF2-40B4-BE49-F238E27FC236}">
-                <a16:creationId xmlns:a16="http://schemas.microsoft.com/office/drawing/2014/main" id="{9CE3D9B9-C717-9FDD-DF33-44F439EA4CEB}"/>
-              </a:ext>
-            </a:extLst>
-          </p:cNvPr>
-          <p:cNvSpPr/>
-          <p:nvPr/>
-        </p:nvSpPr>
-        <p:spPr>
-          <a:xfrm>
-            <a:off x="10103357" y="3715387"/>
-            <a:ext cx="294968" cy="250723"/>
-          </a:xfrm>
-          <a:prstGeom prst="star5">
-            <a:avLst/>
-          </a:prstGeom>
-          <a:solidFill>
-            <a:srgbClr val="FF0000"/>
-          </a:solidFill>
+              <a:t>matching motif [FWY]xx[FWY]</a:t>
+            </a:r>
+          </a:p>
+        </p:txBody>
+      </p:sp>
+      <p:cxnSp>
+        <p:nvCxnSpPr>
+          <p:cNvPr id="33" name="Straight Arrow Connector 32">
+            <a:extLst>
+              <a:ext uri="{FF2B5EF4-FFF2-40B4-BE49-F238E27FC236}">
+                <a16:creationId xmlns:a16="http://schemas.microsoft.com/office/drawing/2014/main" id="{BB24E15C-89A8-2263-A691-528F5A55884B}"/>
+              </a:ext>
+            </a:extLst>
+          </p:cNvPr>
+          <p:cNvCxnSpPr>
+            <a:cxnSpLocks/>
+          </p:cNvCxnSpPr>
+          <p:nvPr/>
+        </p:nvCxnSpPr>
+        <p:spPr>
+          <a:xfrm flipH="1">
+            <a:off x="10127014" y="711200"/>
+            <a:ext cx="134586" cy="325542"/>
+          </a:xfrm>
+          <a:prstGeom prst="straightConnector1">
+            <a:avLst/>
+          </a:prstGeom>
+          <a:ln>
+            <a:solidFill>
+              <a:srgbClr val="FF0000"/>
+            </a:solidFill>
+            <a:tailEnd type="triangle"/>
+          </a:ln>
         </p:spPr>
         <p:style>
-          <a:lnRef idx="2">
-            <a:schemeClr val="accent1">
-              <a:shade val="15000"/>
-            </a:schemeClr>
+          <a:lnRef idx="1">
+            <a:schemeClr val="accent1"/>
           </a:lnRef>
-          <a:fillRef idx="1">
+          <a:fillRef idx="0">
             <a:schemeClr val="accent1"/>
           </a:fillRef>
           <a:effectRef idx="0">
             <a:schemeClr val="accent1"/>
           </a:effectRef>
           <a:fontRef idx="minor">
-            <a:schemeClr val="lt1"/>
+            <a:schemeClr val="tx1"/>
           </a:fontRef>
         </p:style>
-        <p:txBody>
-          <a:bodyPr rtlCol="0" anchor="ctr"/>
-          <a:lstStyle/>
-          <a:p>
-            <a:pPr algn="ctr"/>
-            <a:endParaRPr lang="en-US"/>
-          </a:p>
-        </p:txBody>
-      </p:sp>
-      <p:sp>
-        <p:nvSpPr>
-          <p:cNvPr id="55" name="5-Point Star 54">
-            <a:extLst>
-              <a:ext uri="{FF2B5EF4-FFF2-40B4-BE49-F238E27FC236}">
-                <a16:creationId xmlns:a16="http://schemas.microsoft.com/office/drawing/2014/main" id="{B574ED03-D8F6-903A-4879-D58E514E56F9}"/>
-              </a:ext>
-            </a:extLst>
-          </p:cNvPr>
-          <p:cNvSpPr/>
-          <p:nvPr/>
-        </p:nvSpPr>
-        <p:spPr>
-          <a:xfrm>
-            <a:off x="9658228" y="2002773"/>
-            <a:ext cx="294968" cy="250723"/>
-          </a:xfrm>
-          <a:prstGeom prst="star5">
-            <a:avLst/>
-          </a:prstGeom>
-          <a:solidFill>
-            <a:schemeClr val="accent1"/>
-          </a:solidFill>
-        </p:spPr>
-        <p:style>
-          <a:lnRef idx="2">
-            <a:schemeClr val="accent1">
-              <a:shade val="15000"/>
-            </a:schemeClr>
-          </a:lnRef>
-          <a:fillRef idx="1">
-            <a:schemeClr val="accent1"/>
-          </a:fillRef>
-          <a:effectRef idx="0">
-            <a:schemeClr val="accent1"/>
-          </a:effectRef>
-          <a:fontRef idx="minor">
-            <a:schemeClr val="lt1"/>
-          </a:fontRef>
-        </p:style>
-        <p:txBody>
-          <a:bodyPr rtlCol="0" anchor="ctr"/>
-          <a:lstStyle/>
-          <a:p>
-            <a:pPr algn="ctr"/>
-            <a:endParaRPr lang="en-US"/>
-          </a:p>
-        </p:txBody>
-      </p:sp>
+      </p:cxnSp>
     </p:spTree>
     <p:extLst>
       <p:ext uri="{BB962C8B-B14F-4D97-AF65-F5344CB8AC3E}">
-        <p14:creationId xmlns:p14="http://schemas.microsoft.com/office/powerpoint/2010/main" val="2300690411"/>
+        <p14:creationId xmlns:p14="http://schemas.microsoft.com/office/powerpoint/2010/main" val="3540687329"/>
       </p:ext>
     </p:extLst>
   </p:cSld>
@@ -8395,6 +10509,1429 @@
         <p:cNvPr id="1" name="">
           <a:extLst>
             <a:ext uri="{FF2B5EF4-FFF2-40B4-BE49-F238E27FC236}">
+              <a16:creationId xmlns:a16="http://schemas.microsoft.com/office/drawing/2014/main" id="{9D45E729-62D5-574A-3D52-6116D25180EF}"/>
+            </a:ext>
+          </a:extLst>
+        </p:cNvPr>
+        <p:cNvGrpSpPr/>
+        <p:nvPr/>
+      </p:nvGrpSpPr>
+      <p:grpSpPr>
+        <a:xfrm>
+          <a:off x="0" y="0"/>
+          <a:ext cx="0" cy="0"/>
+          <a:chOff x="0" y="0"/>
+          <a:chExt cx="0" cy="0"/>
+        </a:xfrm>
+      </p:grpSpPr>
+      <p:sp>
+        <p:nvSpPr>
+          <p:cNvPr id="2" name="TextBox 1">
+            <a:extLst>
+              <a:ext uri="{FF2B5EF4-FFF2-40B4-BE49-F238E27FC236}">
+                <a16:creationId xmlns:a16="http://schemas.microsoft.com/office/drawing/2014/main" id="{63E6C56B-EB59-C6D5-F726-33D009A83ACE}"/>
+              </a:ext>
+            </a:extLst>
+          </p:cNvPr>
+          <p:cNvSpPr txBox="1"/>
+          <p:nvPr/>
+        </p:nvSpPr>
+        <p:spPr>
+          <a:xfrm>
+            <a:off x="1696026" y="3728412"/>
+            <a:ext cx="1698542" cy="369332"/>
+          </a:xfrm>
+          <a:prstGeom prst="rect">
+            <a:avLst/>
+          </a:prstGeom>
+          <a:noFill/>
+        </p:spPr>
+        <p:txBody>
+          <a:bodyPr wrap="none" rtlCol="0">
+            <a:spAutoFit/>
+          </a:bodyPr>
+          <a:lstStyle/>
+          <a:p>
+            <a:pPr algn="l"/>
+            <a:r>
+              <a:rPr lang="en-US">
+                <a:latin typeface="Avenir Book" panose="02000503020000020003" pitchFamily="2" charset="0"/>
+              </a:rPr>
+              <a:t>screening data</a:t>
+            </a:r>
+          </a:p>
+        </p:txBody>
+      </p:sp>
+      <p:cxnSp>
+        <p:nvCxnSpPr>
+          <p:cNvPr id="4" name="Straight Arrow Connector 3">
+            <a:extLst>
+              <a:ext uri="{FF2B5EF4-FFF2-40B4-BE49-F238E27FC236}">
+                <a16:creationId xmlns:a16="http://schemas.microsoft.com/office/drawing/2014/main" id="{939F4F54-80AB-CA6C-9604-04683A380219}"/>
+              </a:ext>
+            </a:extLst>
+          </p:cNvPr>
+          <p:cNvCxnSpPr>
+            <a:cxnSpLocks/>
+          </p:cNvCxnSpPr>
+          <p:nvPr/>
+        </p:nvCxnSpPr>
+        <p:spPr>
+          <a:xfrm>
+            <a:off x="3460447" y="3972813"/>
+            <a:ext cx="1092502" cy="0"/>
+          </a:xfrm>
+          <a:prstGeom prst="straightConnector1">
+            <a:avLst/>
+          </a:prstGeom>
+          <a:ln>
+            <a:tailEnd type="triangle"/>
+          </a:ln>
+        </p:spPr>
+        <p:style>
+          <a:lnRef idx="1">
+            <a:schemeClr val="accent1"/>
+          </a:lnRef>
+          <a:fillRef idx="0">
+            <a:schemeClr val="accent1"/>
+          </a:fillRef>
+          <a:effectRef idx="0">
+            <a:schemeClr val="accent1"/>
+          </a:effectRef>
+          <a:fontRef idx="minor">
+            <a:schemeClr val="tx1"/>
+          </a:fontRef>
+        </p:style>
+      </p:cxnSp>
+      <p:sp>
+        <p:nvSpPr>
+          <p:cNvPr id="38" name="TextBox 37">
+            <a:extLst>
+              <a:ext uri="{FF2B5EF4-FFF2-40B4-BE49-F238E27FC236}">
+                <a16:creationId xmlns:a16="http://schemas.microsoft.com/office/drawing/2014/main" id="{658D8FB3-08B2-5564-DB14-2A43026837A4}"/>
+              </a:ext>
+            </a:extLst>
+          </p:cNvPr>
+          <p:cNvSpPr txBox="1"/>
+          <p:nvPr/>
+        </p:nvSpPr>
+        <p:spPr>
+          <a:xfrm>
+            <a:off x="4775221" y="3657425"/>
+            <a:ext cx="2422779" cy="646331"/>
+          </a:xfrm>
+          <a:prstGeom prst="rect">
+            <a:avLst/>
+          </a:prstGeom>
+          <a:noFill/>
+        </p:spPr>
+        <p:txBody>
+          <a:bodyPr wrap="none" rtlCol="0">
+            <a:spAutoFit/>
+          </a:bodyPr>
+          <a:lstStyle/>
+          <a:p>
+            <a:pPr algn="l"/>
+            <a:r>
+              <a:rPr lang="en-US">
+                <a:latin typeface="Avenir Book" panose="02000503020000020003" pitchFamily="2" charset="0"/>
+              </a:rPr>
+              <a:t>binders from different</a:t>
+            </a:r>
+          </a:p>
+          <a:p>
+            <a:pPr algn="l"/>
+            <a:r>
+              <a:rPr lang="en-US">
+                <a:latin typeface="Avenir Book" panose="02000503020000020003" pitchFamily="2" charset="0"/>
+              </a:rPr>
+              <a:t>z-score ranges</a:t>
+            </a:r>
+          </a:p>
+        </p:txBody>
+      </p:sp>
+      <p:cxnSp>
+        <p:nvCxnSpPr>
+          <p:cNvPr id="17" name="Straight Arrow Connector 16">
+            <a:extLst>
+              <a:ext uri="{FF2B5EF4-FFF2-40B4-BE49-F238E27FC236}">
+                <a16:creationId xmlns:a16="http://schemas.microsoft.com/office/drawing/2014/main" id="{A71808E5-9856-2547-2FE1-7C8E44EA90BD}"/>
+              </a:ext>
+            </a:extLst>
+          </p:cNvPr>
+          <p:cNvCxnSpPr>
+            <a:cxnSpLocks/>
+          </p:cNvCxnSpPr>
+          <p:nvPr/>
+        </p:nvCxnSpPr>
+        <p:spPr>
+          <a:xfrm>
+            <a:off x="7234161" y="4030870"/>
+            <a:ext cx="1048960" cy="637287"/>
+          </a:xfrm>
+          <a:prstGeom prst="straightConnector1">
+            <a:avLst/>
+          </a:prstGeom>
+          <a:ln>
+            <a:tailEnd type="triangle"/>
+          </a:ln>
+        </p:spPr>
+        <p:style>
+          <a:lnRef idx="1">
+            <a:schemeClr val="accent1"/>
+          </a:lnRef>
+          <a:fillRef idx="0">
+            <a:schemeClr val="accent1"/>
+          </a:fillRef>
+          <a:effectRef idx="0">
+            <a:schemeClr val="accent1"/>
+          </a:effectRef>
+          <a:fontRef idx="minor">
+            <a:schemeClr val="tx1"/>
+          </a:fontRef>
+        </p:style>
+      </p:cxnSp>
+      <p:cxnSp>
+        <p:nvCxnSpPr>
+          <p:cNvPr id="22" name="Straight Arrow Connector 21">
+            <a:extLst>
+              <a:ext uri="{FF2B5EF4-FFF2-40B4-BE49-F238E27FC236}">
+                <a16:creationId xmlns:a16="http://schemas.microsoft.com/office/drawing/2014/main" id="{D061C43B-6E37-B290-0E84-B308001EB697}"/>
+              </a:ext>
+            </a:extLst>
+          </p:cNvPr>
+          <p:cNvCxnSpPr>
+            <a:cxnSpLocks/>
+          </p:cNvCxnSpPr>
+          <p:nvPr/>
+        </p:nvCxnSpPr>
+        <p:spPr>
+          <a:xfrm>
+            <a:off x="7296150" y="2374899"/>
+            <a:ext cx="963246" cy="312616"/>
+          </a:xfrm>
+          <a:prstGeom prst="straightConnector1">
+            <a:avLst/>
+          </a:prstGeom>
+          <a:ln>
+            <a:tailEnd type="triangle"/>
+          </a:ln>
+        </p:spPr>
+        <p:style>
+          <a:lnRef idx="1">
+            <a:schemeClr val="accent1"/>
+          </a:lnRef>
+          <a:fillRef idx="0">
+            <a:schemeClr val="accent1"/>
+          </a:fillRef>
+          <a:effectRef idx="0">
+            <a:schemeClr val="accent1"/>
+          </a:effectRef>
+          <a:fontRef idx="minor">
+            <a:schemeClr val="tx1"/>
+          </a:fontRef>
+        </p:style>
+      </p:cxnSp>
+      <p:sp>
+        <p:nvSpPr>
+          <p:cNvPr id="26" name="TextBox 25">
+            <a:extLst>
+              <a:ext uri="{FF2B5EF4-FFF2-40B4-BE49-F238E27FC236}">
+                <a16:creationId xmlns:a16="http://schemas.microsoft.com/office/drawing/2014/main" id="{9824A793-F7B8-1FEB-2399-D2192E2B1C3E}"/>
+              </a:ext>
+            </a:extLst>
+          </p:cNvPr>
+          <p:cNvSpPr txBox="1"/>
+          <p:nvPr/>
+        </p:nvSpPr>
+        <p:spPr>
+          <a:xfrm>
+            <a:off x="4712607" y="2157186"/>
+            <a:ext cx="2402261" cy="369332"/>
+          </a:xfrm>
+          <a:prstGeom prst="rect">
+            <a:avLst/>
+          </a:prstGeom>
+          <a:noFill/>
+        </p:spPr>
+        <p:txBody>
+          <a:bodyPr wrap="none" rtlCol="0">
+            <a:spAutoFit/>
+          </a:bodyPr>
+          <a:lstStyle/>
+          <a:p>
+            <a:pPr algn="l"/>
+            <a:r>
+              <a:rPr lang="en-US">
+                <a:latin typeface="Avenir Book" panose="02000503020000020003" pitchFamily="2" charset="0"/>
+              </a:rPr>
+              <a:t>screening nonbinders</a:t>
+            </a:r>
+          </a:p>
+        </p:txBody>
+      </p:sp>
+      <p:cxnSp>
+        <p:nvCxnSpPr>
+          <p:cNvPr id="29" name="Straight Arrow Connector 28">
+            <a:extLst>
+              <a:ext uri="{FF2B5EF4-FFF2-40B4-BE49-F238E27FC236}">
+                <a16:creationId xmlns:a16="http://schemas.microsoft.com/office/drawing/2014/main" id="{BF920E17-76E1-3A23-066B-2F73C6030622}"/>
+              </a:ext>
+            </a:extLst>
+          </p:cNvPr>
+          <p:cNvCxnSpPr>
+            <a:cxnSpLocks/>
+          </p:cNvCxnSpPr>
+          <p:nvPr/>
+        </p:nvCxnSpPr>
+        <p:spPr>
+          <a:xfrm flipV="1">
+            <a:off x="3373361" y="2476500"/>
+            <a:ext cx="1236739" cy="988313"/>
+          </a:xfrm>
+          <a:prstGeom prst="straightConnector1">
+            <a:avLst/>
+          </a:prstGeom>
+          <a:ln>
+            <a:tailEnd type="triangle"/>
+          </a:ln>
+        </p:spPr>
+        <p:style>
+          <a:lnRef idx="1">
+            <a:schemeClr val="accent1"/>
+          </a:lnRef>
+          <a:fillRef idx="0">
+            <a:schemeClr val="accent1"/>
+          </a:fillRef>
+          <a:effectRef idx="0">
+            <a:schemeClr val="accent1"/>
+          </a:effectRef>
+          <a:fontRef idx="minor">
+            <a:schemeClr val="tx1"/>
+          </a:fontRef>
+        </p:style>
+      </p:cxnSp>
+      <p:cxnSp>
+        <p:nvCxnSpPr>
+          <p:cNvPr id="37" name="Straight Arrow Connector 36">
+            <a:extLst>
+              <a:ext uri="{FF2B5EF4-FFF2-40B4-BE49-F238E27FC236}">
+                <a16:creationId xmlns:a16="http://schemas.microsoft.com/office/drawing/2014/main" id="{DCFB45A0-ABC7-86E8-7207-17851BA0AF61}"/>
+              </a:ext>
+            </a:extLst>
+          </p:cNvPr>
+          <p:cNvCxnSpPr>
+            <a:cxnSpLocks/>
+          </p:cNvCxnSpPr>
+          <p:nvPr/>
+        </p:nvCxnSpPr>
+        <p:spPr>
+          <a:xfrm flipV="1">
+            <a:off x="7234161" y="3086100"/>
+            <a:ext cx="1019932" cy="596427"/>
+          </a:xfrm>
+          <a:prstGeom prst="straightConnector1">
+            <a:avLst/>
+          </a:prstGeom>
+          <a:ln>
+            <a:tailEnd type="triangle"/>
+          </a:ln>
+        </p:spPr>
+        <p:style>
+          <a:lnRef idx="1">
+            <a:schemeClr val="accent1"/>
+          </a:lnRef>
+          <a:fillRef idx="0">
+            <a:schemeClr val="accent1"/>
+          </a:fillRef>
+          <a:effectRef idx="0">
+            <a:schemeClr val="accent1"/>
+          </a:effectRef>
+          <a:fontRef idx="minor">
+            <a:schemeClr val="tx1"/>
+          </a:fontRef>
+        </p:style>
+      </p:cxnSp>
+      <p:cxnSp>
+        <p:nvCxnSpPr>
+          <p:cNvPr id="40" name="Straight Arrow Connector 39">
+            <a:extLst>
+              <a:ext uri="{FF2B5EF4-FFF2-40B4-BE49-F238E27FC236}">
+                <a16:creationId xmlns:a16="http://schemas.microsoft.com/office/drawing/2014/main" id="{6B2E9CD2-6D27-4A24-AC53-855FBEF0549F}"/>
+              </a:ext>
+            </a:extLst>
+          </p:cNvPr>
+          <p:cNvCxnSpPr>
+            <a:cxnSpLocks/>
+          </p:cNvCxnSpPr>
+          <p:nvPr/>
+        </p:nvCxnSpPr>
+        <p:spPr>
+          <a:xfrm>
+            <a:off x="2301840" y="4305300"/>
+            <a:ext cx="0" cy="1424354"/>
+          </a:xfrm>
+          <a:prstGeom prst="straightConnector1">
+            <a:avLst/>
+          </a:prstGeom>
+          <a:ln>
+            <a:tailEnd type="triangle"/>
+          </a:ln>
+        </p:spPr>
+        <p:style>
+          <a:lnRef idx="1">
+            <a:schemeClr val="accent1"/>
+          </a:lnRef>
+          <a:fillRef idx="0">
+            <a:schemeClr val="accent1"/>
+          </a:fillRef>
+          <a:effectRef idx="0">
+            <a:schemeClr val="accent1"/>
+          </a:effectRef>
+          <a:fontRef idx="minor">
+            <a:schemeClr val="tx1"/>
+          </a:fontRef>
+        </p:style>
+      </p:cxnSp>
+      <p:sp>
+        <p:nvSpPr>
+          <p:cNvPr id="45" name="TextBox 44">
+            <a:extLst>
+              <a:ext uri="{FF2B5EF4-FFF2-40B4-BE49-F238E27FC236}">
+                <a16:creationId xmlns:a16="http://schemas.microsoft.com/office/drawing/2014/main" id="{61F12D4D-165C-054C-1CFE-72EE7AE900A2}"/>
+              </a:ext>
+            </a:extLst>
+          </p:cNvPr>
+          <p:cNvSpPr txBox="1"/>
+          <p:nvPr/>
+        </p:nvSpPr>
+        <p:spPr>
+          <a:xfrm>
+            <a:off x="1221921" y="5769010"/>
+            <a:ext cx="2028119" cy="369332"/>
+          </a:xfrm>
+          <a:prstGeom prst="rect">
+            <a:avLst/>
+          </a:prstGeom>
+          <a:noFill/>
+        </p:spPr>
+        <p:txBody>
+          <a:bodyPr wrap="none" rtlCol="0">
+            <a:spAutoFit/>
+          </a:bodyPr>
+          <a:lstStyle/>
+          <a:p>
+            <a:pPr algn="l"/>
+            <a:r>
+              <a:rPr lang="en-US">
+                <a:latin typeface="Avenir Book" panose="02000503020000020003" pitchFamily="2" charset="0"/>
+              </a:rPr>
+              <a:t>all binders (PSSM)</a:t>
+            </a:r>
+          </a:p>
+        </p:txBody>
+      </p:sp>
+      <p:sp>
+        <p:nvSpPr>
+          <p:cNvPr id="51" name="TextBox 50">
+            <a:extLst>
+              <a:ext uri="{FF2B5EF4-FFF2-40B4-BE49-F238E27FC236}">
+                <a16:creationId xmlns:a16="http://schemas.microsoft.com/office/drawing/2014/main" id="{9FFF0496-022E-6BE4-954D-FD5232883077}"/>
+              </a:ext>
+            </a:extLst>
+          </p:cNvPr>
+          <p:cNvSpPr txBox="1"/>
+          <p:nvPr/>
+        </p:nvSpPr>
+        <p:spPr>
+          <a:xfrm>
+            <a:off x="8364904" y="2740269"/>
+            <a:ext cx="931665" cy="369332"/>
+          </a:xfrm>
+          <a:prstGeom prst="rect">
+            <a:avLst/>
+          </a:prstGeom>
+          <a:noFill/>
+        </p:spPr>
+        <p:txBody>
+          <a:bodyPr wrap="none" rtlCol="0">
+            <a:spAutoFit/>
+          </a:bodyPr>
+          <a:lstStyle/>
+          <a:p>
+            <a:pPr algn="l"/>
+            <a:r>
+              <a:rPr lang="en-US">
+                <a:latin typeface="Avenir Book" panose="02000503020000020003" pitchFamily="2" charset="0"/>
+              </a:rPr>
+              <a:t>test set</a:t>
+            </a:r>
+          </a:p>
+        </p:txBody>
+      </p:sp>
+      <p:sp>
+        <p:nvSpPr>
+          <p:cNvPr id="52" name="TextBox 51">
+            <a:extLst>
+              <a:ext uri="{FF2B5EF4-FFF2-40B4-BE49-F238E27FC236}">
+                <a16:creationId xmlns:a16="http://schemas.microsoft.com/office/drawing/2014/main" id="{F94390A4-669F-A1B9-6520-1E629B1BD5C4}"/>
+              </a:ext>
+            </a:extLst>
+          </p:cNvPr>
+          <p:cNvSpPr txBox="1"/>
+          <p:nvPr/>
+        </p:nvSpPr>
+        <p:spPr>
+          <a:xfrm>
+            <a:off x="8329735" y="4604239"/>
+            <a:ext cx="883575" cy="369332"/>
+          </a:xfrm>
+          <a:prstGeom prst="rect">
+            <a:avLst/>
+          </a:prstGeom>
+          <a:noFill/>
+        </p:spPr>
+        <p:txBody>
+          <a:bodyPr wrap="none" rtlCol="0">
+            <a:spAutoFit/>
+          </a:bodyPr>
+          <a:lstStyle/>
+          <a:p>
+            <a:pPr algn="l"/>
+            <a:r>
+              <a:rPr lang="en-US">
+                <a:latin typeface="Avenir Book" panose="02000503020000020003" pitchFamily="2" charset="0"/>
+              </a:rPr>
+              <a:t>”train”</a:t>
+            </a:r>
+          </a:p>
+        </p:txBody>
+      </p:sp>
+      <p:sp>
+        <p:nvSpPr>
+          <p:cNvPr id="53" name="TextBox 52">
+            <a:extLst>
+              <a:ext uri="{FF2B5EF4-FFF2-40B4-BE49-F238E27FC236}">
+                <a16:creationId xmlns:a16="http://schemas.microsoft.com/office/drawing/2014/main" id="{DE150935-F09F-D729-266A-174BF5B3EAE0}"/>
+              </a:ext>
+            </a:extLst>
+          </p:cNvPr>
+          <p:cNvSpPr txBox="1"/>
+          <p:nvPr/>
+        </p:nvSpPr>
+        <p:spPr>
+          <a:xfrm>
+            <a:off x="9121042" y="4557346"/>
+            <a:ext cx="779381" cy="369332"/>
+          </a:xfrm>
+          <a:prstGeom prst="rect">
+            <a:avLst/>
+          </a:prstGeom>
+          <a:noFill/>
+        </p:spPr>
+        <p:txBody>
+          <a:bodyPr wrap="none" rtlCol="0">
+            <a:spAutoFit/>
+          </a:bodyPr>
+          <a:lstStyle/>
+          <a:p>
+            <a:pPr algn="l"/>
+            <a:r>
+              <a:rPr lang="en-US">
+                <a:latin typeface="Avenir Book" panose="02000503020000020003" pitchFamily="2" charset="0"/>
+              </a:rPr>
+              <a:t>PSSM</a:t>
+            </a:r>
+          </a:p>
+        </p:txBody>
+      </p:sp>
+      <p:sp>
+        <p:nvSpPr>
+          <p:cNvPr id="54" name="5-Point Star 53">
+            <a:extLst>
+              <a:ext uri="{FF2B5EF4-FFF2-40B4-BE49-F238E27FC236}">
+                <a16:creationId xmlns:a16="http://schemas.microsoft.com/office/drawing/2014/main" id="{9CE3D9B9-C717-9FDD-DF33-44F439EA4CEB}"/>
+              </a:ext>
+            </a:extLst>
+          </p:cNvPr>
+          <p:cNvSpPr/>
+          <p:nvPr/>
+        </p:nvSpPr>
+        <p:spPr>
+          <a:xfrm>
+            <a:off x="9709657" y="4248787"/>
+            <a:ext cx="294968" cy="250723"/>
+          </a:xfrm>
+          <a:prstGeom prst="star5">
+            <a:avLst/>
+          </a:prstGeom>
+          <a:solidFill>
+            <a:srgbClr val="FF0000"/>
+          </a:solidFill>
+        </p:spPr>
+        <p:style>
+          <a:lnRef idx="2">
+            <a:schemeClr val="accent1">
+              <a:shade val="15000"/>
+            </a:schemeClr>
+          </a:lnRef>
+          <a:fillRef idx="1">
+            <a:schemeClr val="accent1"/>
+          </a:fillRef>
+          <a:effectRef idx="0">
+            <a:schemeClr val="accent1"/>
+          </a:effectRef>
+          <a:fontRef idx="minor">
+            <a:schemeClr val="lt1"/>
+          </a:fontRef>
+        </p:style>
+        <p:txBody>
+          <a:bodyPr rtlCol="0" anchor="ctr"/>
+          <a:lstStyle/>
+          <a:p>
+            <a:pPr algn="ctr"/>
+            <a:endParaRPr lang="en-US"/>
+          </a:p>
+        </p:txBody>
+      </p:sp>
+      <p:sp>
+        <p:nvSpPr>
+          <p:cNvPr id="55" name="5-Point Star 54">
+            <a:extLst>
+              <a:ext uri="{FF2B5EF4-FFF2-40B4-BE49-F238E27FC236}">
+                <a16:creationId xmlns:a16="http://schemas.microsoft.com/office/drawing/2014/main" id="{B574ED03-D8F6-903A-4879-D58E514E56F9}"/>
+              </a:ext>
+            </a:extLst>
+          </p:cNvPr>
+          <p:cNvSpPr/>
+          <p:nvPr/>
+        </p:nvSpPr>
+        <p:spPr>
+          <a:xfrm>
+            <a:off x="9264528" y="2536173"/>
+            <a:ext cx="294968" cy="250723"/>
+          </a:xfrm>
+          <a:prstGeom prst="star5">
+            <a:avLst/>
+          </a:prstGeom>
+          <a:solidFill>
+            <a:schemeClr val="accent1"/>
+          </a:solidFill>
+        </p:spPr>
+        <p:style>
+          <a:lnRef idx="2">
+            <a:schemeClr val="accent1">
+              <a:shade val="15000"/>
+            </a:schemeClr>
+          </a:lnRef>
+          <a:fillRef idx="1">
+            <a:schemeClr val="accent1"/>
+          </a:fillRef>
+          <a:effectRef idx="0">
+            <a:schemeClr val="accent1"/>
+          </a:effectRef>
+          <a:fontRef idx="minor">
+            <a:schemeClr val="lt1"/>
+          </a:fontRef>
+        </p:style>
+        <p:txBody>
+          <a:bodyPr rtlCol="0" anchor="ctr"/>
+          <a:lstStyle/>
+          <a:p>
+            <a:pPr algn="ctr"/>
+            <a:endParaRPr lang="en-US"/>
+          </a:p>
+        </p:txBody>
+      </p:sp>
+      <p:sp>
+        <p:nvSpPr>
+          <p:cNvPr id="3" name="5-Point Star 2">
+            <a:extLst>
+              <a:ext uri="{FF2B5EF4-FFF2-40B4-BE49-F238E27FC236}">
+                <a16:creationId xmlns:a16="http://schemas.microsoft.com/office/drawing/2014/main" id="{135FBB17-93BA-183F-22A4-54ED32FAB12A}"/>
+              </a:ext>
+            </a:extLst>
+          </p:cNvPr>
+          <p:cNvSpPr/>
+          <p:nvPr/>
+        </p:nvSpPr>
+        <p:spPr>
+          <a:xfrm>
+            <a:off x="2474120" y="5491655"/>
+            <a:ext cx="294968" cy="250723"/>
+          </a:xfrm>
+          <a:prstGeom prst="star5">
+            <a:avLst/>
+          </a:prstGeom>
+          <a:solidFill>
+            <a:srgbClr val="FF0000"/>
+          </a:solidFill>
+        </p:spPr>
+        <p:style>
+          <a:lnRef idx="2">
+            <a:schemeClr val="accent1">
+              <a:shade val="15000"/>
+            </a:schemeClr>
+          </a:lnRef>
+          <a:fillRef idx="1">
+            <a:schemeClr val="accent1"/>
+          </a:fillRef>
+          <a:effectRef idx="0">
+            <a:schemeClr val="accent1"/>
+          </a:effectRef>
+          <a:fontRef idx="minor">
+            <a:schemeClr val="lt1"/>
+          </a:fontRef>
+        </p:style>
+        <p:txBody>
+          <a:bodyPr rtlCol="0" anchor="ctr"/>
+          <a:lstStyle/>
+          <a:p>
+            <a:pPr algn="ctr"/>
+            <a:endParaRPr lang="en-US"/>
+          </a:p>
+        </p:txBody>
+      </p:sp>
+      <p:grpSp>
+        <p:nvGrpSpPr>
+          <p:cNvPr id="9" name="Group 8">
+            <a:extLst>
+              <a:ext uri="{FF2B5EF4-FFF2-40B4-BE49-F238E27FC236}">
+                <a16:creationId xmlns:a16="http://schemas.microsoft.com/office/drawing/2014/main" id="{7FD2A1BE-7F2E-F0A8-3F71-53B15E446B76}"/>
+              </a:ext>
+            </a:extLst>
+          </p:cNvPr>
+          <p:cNvGrpSpPr/>
+          <p:nvPr/>
+        </p:nvGrpSpPr>
+        <p:grpSpPr>
+          <a:xfrm>
+            <a:off x="127000" y="647700"/>
+            <a:ext cx="2235200" cy="850900"/>
+            <a:chOff x="114300" y="165100"/>
+            <a:chExt cx="2235200" cy="850900"/>
+          </a:xfrm>
+        </p:grpSpPr>
+        <p:sp>
+          <p:nvSpPr>
+            <p:cNvPr id="49" name="5-Point Star 48">
+              <a:extLst>
+                <a:ext uri="{FF2B5EF4-FFF2-40B4-BE49-F238E27FC236}">
+                  <a16:creationId xmlns:a16="http://schemas.microsoft.com/office/drawing/2014/main" id="{754FDAEE-3799-3B3B-3168-101870CF768F}"/>
+                </a:ext>
+              </a:extLst>
+            </p:cNvPr>
+            <p:cNvSpPr/>
+            <p:nvPr/>
+          </p:nvSpPr>
+          <p:spPr>
+            <a:xfrm>
+              <a:off x="340520" y="246555"/>
+              <a:ext cx="294968" cy="250723"/>
+            </a:xfrm>
+            <a:prstGeom prst="star5">
+              <a:avLst/>
+            </a:prstGeom>
+            <a:solidFill>
+              <a:srgbClr val="FF0000"/>
+            </a:solidFill>
+          </p:spPr>
+          <p:style>
+            <a:lnRef idx="2">
+              <a:schemeClr val="accent1">
+                <a:shade val="15000"/>
+              </a:schemeClr>
+            </a:lnRef>
+            <a:fillRef idx="1">
+              <a:schemeClr val="accent1"/>
+            </a:fillRef>
+            <a:effectRef idx="0">
+              <a:schemeClr val="accent1"/>
+            </a:effectRef>
+            <a:fontRef idx="minor">
+              <a:schemeClr val="lt1"/>
+            </a:fontRef>
+          </p:style>
+          <p:txBody>
+            <a:bodyPr rtlCol="0" anchor="ctr"/>
+            <a:lstStyle/>
+            <a:p>
+              <a:pPr algn="ctr"/>
+              <a:endParaRPr lang="en-US"/>
+            </a:p>
+          </p:txBody>
+        </p:sp>
+        <p:sp>
+          <p:nvSpPr>
+            <p:cNvPr id="5" name="Rounded Rectangle 4">
+              <a:extLst>
+                <a:ext uri="{FF2B5EF4-FFF2-40B4-BE49-F238E27FC236}">
+                  <a16:creationId xmlns:a16="http://schemas.microsoft.com/office/drawing/2014/main" id="{D801B15C-F4A3-DEA8-E11C-3B0BB7335B2B}"/>
+                </a:ext>
+              </a:extLst>
+            </p:cNvPr>
+            <p:cNvSpPr/>
+            <p:nvPr/>
+          </p:nvSpPr>
+          <p:spPr>
+            <a:xfrm>
+              <a:off x="114300" y="165100"/>
+              <a:ext cx="2235200" cy="850900"/>
+            </a:xfrm>
+            <a:prstGeom prst="roundRect">
+              <a:avLst/>
+            </a:prstGeom>
+            <a:noFill/>
+            <a:ln>
+              <a:solidFill>
+                <a:schemeClr val="tx1"/>
+              </a:solidFill>
+            </a:ln>
+          </p:spPr>
+          <p:style>
+            <a:lnRef idx="2">
+              <a:schemeClr val="accent1">
+                <a:shade val="15000"/>
+              </a:schemeClr>
+            </a:lnRef>
+            <a:fillRef idx="1">
+              <a:schemeClr val="accent1"/>
+            </a:fillRef>
+            <a:effectRef idx="0">
+              <a:schemeClr val="accent1"/>
+            </a:effectRef>
+            <a:fontRef idx="minor">
+              <a:schemeClr val="lt1"/>
+            </a:fontRef>
+          </p:style>
+          <p:txBody>
+            <a:bodyPr rtlCol="0" anchor="ctr"/>
+            <a:lstStyle/>
+            <a:p>
+              <a:pPr algn="ctr"/>
+              <a:endParaRPr lang="en-US"/>
+            </a:p>
+          </p:txBody>
+        </p:sp>
+        <p:sp>
+          <p:nvSpPr>
+            <p:cNvPr id="6" name="TextBox 5">
+              <a:extLst>
+                <a:ext uri="{FF2B5EF4-FFF2-40B4-BE49-F238E27FC236}">
+                  <a16:creationId xmlns:a16="http://schemas.microsoft.com/office/drawing/2014/main" id="{8EA68D4E-3934-136B-A53E-80AB206E22CE}"/>
+                </a:ext>
+              </a:extLst>
+            </p:cNvPr>
+            <p:cNvSpPr txBox="1"/>
+            <p:nvPr/>
+          </p:nvSpPr>
+          <p:spPr>
+            <a:xfrm>
+              <a:off x="685800" y="228600"/>
+              <a:ext cx="1553630" cy="369332"/>
+            </a:xfrm>
+            <a:prstGeom prst="rect">
+              <a:avLst/>
+            </a:prstGeom>
+            <a:noFill/>
+          </p:spPr>
+          <p:txBody>
+            <a:bodyPr wrap="none" rtlCol="0">
+              <a:spAutoFit/>
+            </a:bodyPr>
+            <a:lstStyle/>
+            <a:p>
+              <a:pPr algn="l"/>
+              <a:r>
+                <a:rPr lang="en-US">
+                  <a:latin typeface="Avenir Book" panose="02000503020000020003" pitchFamily="2" charset="0"/>
+                </a:rPr>
+                <a:t>= training set</a:t>
+              </a:r>
+            </a:p>
+          </p:txBody>
+        </p:sp>
+        <p:sp>
+          <p:nvSpPr>
+            <p:cNvPr id="7" name="5-Point Star 6">
+              <a:extLst>
+                <a:ext uri="{FF2B5EF4-FFF2-40B4-BE49-F238E27FC236}">
+                  <a16:creationId xmlns:a16="http://schemas.microsoft.com/office/drawing/2014/main" id="{FE7F3B65-B519-F9A4-6144-AE72DA38BAD5}"/>
+                </a:ext>
+              </a:extLst>
+            </p:cNvPr>
+            <p:cNvSpPr/>
+            <p:nvPr/>
+          </p:nvSpPr>
+          <p:spPr>
+            <a:xfrm>
+              <a:off x="349128" y="631173"/>
+              <a:ext cx="294968" cy="250723"/>
+            </a:xfrm>
+            <a:prstGeom prst="star5">
+              <a:avLst/>
+            </a:prstGeom>
+            <a:solidFill>
+              <a:schemeClr val="accent1"/>
+            </a:solidFill>
+          </p:spPr>
+          <p:style>
+            <a:lnRef idx="2">
+              <a:schemeClr val="accent1">
+                <a:shade val="15000"/>
+              </a:schemeClr>
+            </a:lnRef>
+            <a:fillRef idx="1">
+              <a:schemeClr val="accent1"/>
+            </a:fillRef>
+            <a:effectRef idx="0">
+              <a:schemeClr val="accent1"/>
+            </a:effectRef>
+            <a:fontRef idx="minor">
+              <a:schemeClr val="lt1"/>
+            </a:fontRef>
+          </p:style>
+          <p:txBody>
+            <a:bodyPr rtlCol="0" anchor="ctr"/>
+            <a:lstStyle/>
+            <a:p>
+              <a:pPr algn="ctr"/>
+              <a:endParaRPr lang="en-US"/>
+            </a:p>
+          </p:txBody>
+        </p:sp>
+        <p:sp>
+          <p:nvSpPr>
+            <p:cNvPr id="8" name="TextBox 7">
+              <a:extLst>
+                <a:ext uri="{FF2B5EF4-FFF2-40B4-BE49-F238E27FC236}">
+                  <a16:creationId xmlns:a16="http://schemas.microsoft.com/office/drawing/2014/main" id="{3B635626-EEA7-5654-94B2-0F6E1862152C}"/>
+                </a:ext>
+              </a:extLst>
+            </p:cNvPr>
+            <p:cNvSpPr txBox="1"/>
+            <p:nvPr/>
+          </p:nvSpPr>
+          <p:spPr>
+            <a:xfrm>
+              <a:off x="685800" y="571500"/>
+              <a:ext cx="1149674" cy="369332"/>
+            </a:xfrm>
+            <a:prstGeom prst="rect">
+              <a:avLst/>
+            </a:prstGeom>
+            <a:noFill/>
+          </p:spPr>
+          <p:txBody>
+            <a:bodyPr wrap="none" rtlCol="0">
+              <a:spAutoFit/>
+            </a:bodyPr>
+            <a:lstStyle/>
+            <a:p>
+              <a:pPr algn="l"/>
+              <a:r>
+                <a:rPr lang="en-US">
+                  <a:latin typeface="Avenir Book" panose="02000503020000020003" pitchFamily="2" charset="0"/>
+                </a:rPr>
+                <a:t>= test set</a:t>
+              </a:r>
+            </a:p>
+          </p:txBody>
+        </p:sp>
+      </p:grpSp>
+      <p:sp>
+        <p:nvSpPr>
+          <p:cNvPr id="10" name="TextBox 9">
+            <a:extLst>
+              <a:ext uri="{FF2B5EF4-FFF2-40B4-BE49-F238E27FC236}">
+                <a16:creationId xmlns:a16="http://schemas.microsoft.com/office/drawing/2014/main" id="{DC2ACFE2-5F0D-79EC-69BC-97CAAA549950}"/>
+              </a:ext>
+            </a:extLst>
+          </p:cNvPr>
+          <p:cNvSpPr txBox="1"/>
+          <p:nvPr/>
+        </p:nvSpPr>
+        <p:spPr>
+          <a:xfrm>
+            <a:off x="3200400" y="736600"/>
+            <a:ext cx="429926" cy="369332"/>
+          </a:xfrm>
+          <a:prstGeom prst="rect">
+            <a:avLst/>
+          </a:prstGeom>
+          <a:noFill/>
+        </p:spPr>
+        <p:txBody>
+          <a:bodyPr wrap="none" rtlCol="0">
+            <a:spAutoFit/>
+          </a:bodyPr>
+          <a:lstStyle/>
+          <a:p>
+            <a:pPr algn="l"/>
+            <a:r>
+              <a:rPr lang="en-US">
+                <a:latin typeface="Avenir Book" panose="02000503020000020003" pitchFamily="2" charset="0"/>
+              </a:rPr>
+              <a:t>ilir</a:t>
+            </a:r>
+          </a:p>
+        </p:txBody>
+      </p:sp>
+      <p:sp>
+        <p:nvSpPr>
+          <p:cNvPr id="11" name="5-Point Star 10">
+            <a:extLst>
+              <a:ext uri="{FF2B5EF4-FFF2-40B4-BE49-F238E27FC236}">
+                <a16:creationId xmlns:a16="http://schemas.microsoft.com/office/drawing/2014/main" id="{29BC5E91-DBB9-1DBA-68F1-43F4AB8FFB53}"/>
+              </a:ext>
+            </a:extLst>
+          </p:cNvPr>
+          <p:cNvSpPr/>
+          <p:nvPr/>
+        </p:nvSpPr>
+        <p:spPr>
+          <a:xfrm>
+            <a:off x="3528220" y="513255"/>
+            <a:ext cx="294968" cy="250723"/>
+          </a:xfrm>
+          <a:prstGeom prst="star5">
+            <a:avLst/>
+          </a:prstGeom>
+          <a:solidFill>
+            <a:srgbClr val="FF0000"/>
+          </a:solidFill>
+        </p:spPr>
+        <p:style>
+          <a:lnRef idx="2">
+            <a:schemeClr val="accent1">
+              <a:shade val="15000"/>
+            </a:schemeClr>
+          </a:lnRef>
+          <a:fillRef idx="1">
+            <a:schemeClr val="accent1"/>
+          </a:fillRef>
+          <a:effectRef idx="0">
+            <a:schemeClr val="accent1"/>
+          </a:effectRef>
+          <a:fontRef idx="minor">
+            <a:schemeClr val="lt1"/>
+          </a:fontRef>
+        </p:style>
+        <p:txBody>
+          <a:bodyPr rtlCol="0" anchor="ctr"/>
+          <a:lstStyle/>
+          <a:p>
+            <a:pPr algn="ctr"/>
+            <a:endParaRPr lang="en-US"/>
+          </a:p>
+        </p:txBody>
+      </p:sp>
+      <p:sp>
+        <p:nvSpPr>
+          <p:cNvPr id="12" name="TextBox 11">
+            <a:extLst>
+              <a:ext uri="{FF2B5EF4-FFF2-40B4-BE49-F238E27FC236}">
+                <a16:creationId xmlns:a16="http://schemas.microsoft.com/office/drawing/2014/main" id="{9BF1338E-C42A-9352-2FE5-BBCEF5A17406}"/>
+              </a:ext>
+            </a:extLst>
+          </p:cNvPr>
+          <p:cNvSpPr txBox="1"/>
+          <p:nvPr/>
+        </p:nvSpPr>
+        <p:spPr>
+          <a:xfrm>
+            <a:off x="5913804" y="644769"/>
+            <a:ext cx="1135247" cy="369332"/>
+          </a:xfrm>
+          <a:prstGeom prst="rect">
+            <a:avLst/>
+          </a:prstGeom>
+          <a:noFill/>
+        </p:spPr>
+        <p:txBody>
+          <a:bodyPr wrap="none" rtlCol="0">
+            <a:spAutoFit/>
+          </a:bodyPr>
+          <a:lstStyle/>
+          <a:p>
+            <a:pPr algn="l"/>
+            <a:r>
+              <a:rPr lang="en-US">
+                <a:latin typeface="Avenir Book" panose="02000503020000020003" pitchFamily="2" charset="0"/>
+              </a:rPr>
+              <a:t>lir central</a:t>
+            </a:r>
+          </a:p>
+        </p:txBody>
+      </p:sp>
+      <p:sp>
+        <p:nvSpPr>
+          <p:cNvPr id="13" name="5-Point Star 12">
+            <a:extLst>
+              <a:ext uri="{FF2B5EF4-FFF2-40B4-BE49-F238E27FC236}">
+                <a16:creationId xmlns:a16="http://schemas.microsoft.com/office/drawing/2014/main" id="{F1C21CFF-7083-CB6C-CA04-081DC262AC9D}"/>
+              </a:ext>
+            </a:extLst>
+          </p:cNvPr>
+          <p:cNvSpPr/>
+          <p:nvPr/>
+        </p:nvSpPr>
+        <p:spPr>
+          <a:xfrm>
+            <a:off x="6813428" y="440673"/>
+            <a:ext cx="294968" cy="250723"/>
+          </a:xfrm>
+          <a:prstGeom prst="star5">
+            <a:avLst/>
+          </a:prstGeom>
+          <a:solidFill>
+            <a:schemeClr val="accent1"/>
+          </a:solidFill>
+        </p:spPr>
+        <p:style>
+          <a:lnRef idx="2">
+            <a:schemeClr val="accent1">
+              <a:shade val="15000"/>
+            </a:schemeClr>
+          </a:lnRef>
+          <a:fillRef idx="1">
+            <a:schemeClr val="accent1"/>
+          </a:fillRef>
+          <a:effectRef idx="0">
+            <a:schemeClr val="accent1"/>
+          </a:effectRef>
+          <a:fontRef idx="minor">
+            <a:schemeClr val="lt1"/>
+          </a:fontRef>
+        </p:style>
+        <p:txBody>
+          <a:bodyPr rtlCol="0" anchor="ctr"/>
+          <a:lstStyle/>
+          <a:p>
+            <a:pPr algn="ctr"/>
+            <a:endParaRPr lang="en-US"/>
+          </a:p>
+        </p:txBody>
+      </p:sp>
+      <p:sp>
+        <p:nvSpPr>
+          <p:cNvPr id="15" name="TextBox 14">
+            <a:extLst>
+              <a:ext uri="{FF2B5EF4-FFF2-40B4-BE49-F238E27FC236}">
+                <a16:creationId xmlns:a16="http://schemas.microsoft.com/office/drawing/2014/main" id="{87C4A5ED-D122-5FEA-F1B2-AD1FD136B70C}"/>
+              </a:ext>
+            </a:extLst>
+          </p:cNvPr>
+          <p:cNvSpPr txBox="1"/>
+          <p:nvPr/>
+        </p:nvSpPr>
+        <p:spPr>
+          <a:xfrm>
+            <a:off x="215900" y="177800"/>
+            <a:ext cx="1645002" cy="369332"/>
+          </a:xfrm>
+          <a:prstGeom prst="rect">
+            <a:avLst/>
+          </a:prstGeom>
+          <a:noFill/>
+        </p:spPr>
+        <p:txBody>
+          <a:bodyPr wrap="none" rtlCol="0">
+            <a:spAutoFit/>
+          </a:bodyPr>
+          <a:lstStyle/>
+          <a:p>
+            <a:pPr algn="l"/>
+            <a:r>
+              <a:rPr lang="en-US" b="1">
+                <a:latin typeface="Avenir Black" panose="02000503020000020003" pitchFamily="2" charset="0"/>
+              </a:rPr>
+              <a:t>experiment 2</a:t>
+            </a:r>
+          </a:p>
+        </p:txBody>
+      </p:sp>
+      <p:sp>
+        <p:nvSpPr>
+          <p:cNvPr id="16" name="TextBox 15">
+            <a:extLst>
+              <a:ext uri="{FF2B5EF4-FFF2-40B4-BE49-F238E27FC236}">
+                <a16:creationId xmlns:a16="http://schemas.microsoft.com/office/drawing/2014/main" id="{CF4A3FFC-8948-30F3-84C5-27950D535521}"/>
+              </a:ext>
+            </a:extLst>
+          </p:cNvPr>
+          <p:cNvSpPr txBox="1"/>
+          <p:nvPr/>
+        </p:nvSpPr>
+        <p:spPr>
+          <a:xfrm>
+            <a:off x="5158015" y="4650015"/>
+            <a:ext cx="1872629" cy="307777"/>
+          </a:xfrm>
+          <a:prstGeom prst="rect">
+            <a:avLst/>
+          </a:prstGeom>
+          <a:noFill/>
+        </p:spPr>
+        <p:txBody>
+          <a:bodyPr wrap="none" rtlCol="0">
+            <a:spAutoFit/>
+          </a:bodyPr>
+          <a:lstStyle/>
+          <a:p>
+            <a:pPr algn="l"/>
+            <a:r>
+              <a:rPr lang="en-US" sz="1400">
+                <a:solidFill>
+                  <a:schemeClr val="bg2">
+                    <a:lumMod val="50000"/>
+                  </a:schemeClr>
+                </a:solidFill>
+                <a:latin typeface="Avenir Book" panose="02000503020000020003" pitchFamily="2" charset="0"/>
+              </a:rPr>
+              <a:t>1.7&lt;= z-score &lt;= 2.0</a:t>
+            </a:r>
+          </a:p>
+        </p:txBody>
+      </p:sp>
+      <p:sp>
+        <p:nvSpPr>
+          <p:cNvPr id="18" name="TextBox 17">
+            <a:extLst>
+              <a:ext uri="{FF2B5EF4-FFF2-40B4-BE49-F238E27FC236}">
+                <a16:creationId xmlns:a16="http://schemas.microsoft.com/office/drawing/2014/main" id="{E7A8C95F-12E1-1468-915D-CBA780280ADA}"/>
+              </a:ext>
+            </a:extLst>
+          </p:cNvPr>
+          <p:cNvSpPr txBox="1"/>
+          <p:nvPr/>
+        </p:nvSpPr>
+        <p:spPr>
+          <a:xfrm>
+            <a:off x="5127172" y="4918529"/>
+            <a:ext cx="1922321" cy="307777"/>
+          </a:xfrm>
+          <a:prstGeom prst="rect">
+            <a:avLst/>
+          </a:prstGeom>
+          <a:noFill/>
+        </p:spPr>
+        <p:txBody>
+          <a:bodyPr wrap="none" rtlCol="0">
+            <a:spAutoFit/>
+          </a:bodyPr>
+          <a:lstStyle/>
+          <a:p>
+            <a:pPr algn="l"/>
+            <a:r>
+              <a:rPr lang="en-US" sz="1400">
+                <a:solidFill>
+                  <a:schemeClr val="bg2">
+                    <a:lumMod val="50000"/>
+                  </a:schemeClr>
+                </a:solidFill>
+                <a:latin typeface="Avenir Book" panose="02000503020000020003" pitchFamily="2" charset="0"/>
+              </a:rPr>
+              <a:t>2.0 &lt;= z-score &lt;= 2.5</a:t>
+            </a:r>
+          </a:p>
+        </p:txBody>
+      </p:sp>
+      <p:sp>
+        <p:nvSpPr>
+          <p:cNvPr id="19" name="TextBox 18">
+            <a:extLst>
+              <a:ext uri="{FF2B5EF4-FFF2-40B4-BE49-F238E27FC236}">
+                <a16:creationId xmlns:a16="http://schemas.microsoft.com/office/drawing/2014/main" id="{5A52702A-AFDA-3C2B-0FC6-55D28C5A0024}"/>
+              </a:ext>
+            </a:extLst>
+          </p:cNvPr>
+          <p:cNvSpPr txBox="1"/>
+          <p:nvPr/>
+        </p:nvSpPr>
+        <p:spPr>
+          <a:xfrm>
+            <a:off x="5128986" y="5217886"/>
+            <a:ext cx="1922321" cy="307777"/>
+          </a:xfrm>
+          <a:prstGeom prst="rect">
+            <a:avLst/>
+          </a:prstGeom>
+          <a:noFill/>
+        </p:spPr>
+        <p:txBody>
+          <a:bodyPr wrap="none" rtlCol="0">
+            <a:spAutoFit/>
+          </a:bodyPr>
+          <a:lstStyle/>
+          <a:p>
+            <a:pPr algn="l"/>
+            <a:r>
+              <a:rPr lang="en-US" sz="1400">
+                <a:solidFill>
+                  <a:schemeClr val="bg2">
+                    <a:lumMod val="50000"/>
+                  </a:schemeClr>
+                </a:solidFill>
+                <a:latin typeface="Avenir Book" panose="02000503020000020003" pitchFamily="2" charset="0"/>
+              </a:rPr>
+              <a:t>2.5 &lt;= z-score &lt;= 4.2</a:t>
+            </a:r>
+          </a:p>
+        </p:txBody>
+      </p:sp>
+      <p:sp>
+        <p:nvSpPr>
+          <p:cNvPr id="20" name="TextBox 19">
+            <a:extLst>
+              <a:ext uri="{FF2B5EF4-FFF2-40B4-BE49-F238E27FC236}">
+                <a16:creationId xmlns:a16="http://schemas.microsoft.com/office/drawing/2014/main" id="{FCB258D1-1BC2-E152-D2DE-4F49F718BDC3}"/>
+              </a:ext>
+            </a:extLst>
+          </p:cNvPr>
+          <p:cNvSpPr txBox="1"/>
+          <p:nvPr/>
+        </p:nvSpPr>
+        <p:spPr>
+          <a:xfrm>
+            <a:off x="5194300" y="4343400"/>
+            <a:ext cx="1922321" cy="307777"/>
+          </a:xfrm>
+          <a:prstGeom prst="rect">
+            <a:avLst/>
+          </a:prstGeom>
+          <a:noFill/>
+        </p:spPr>
+        <p:txBody>
+          <a:bodyPr wrap="none" rtlCol="0">
+            <a:spAutoFit/>
+          </a:bodyPr>
+          <a:lstStyle/>
+          <a:p>
+            <a:r>
+              <a:rPr lang="en-US" sz="1400">
+                <a:solidFill>
+                  <a:schemeClr val="bg2">
+                    <a:lumMod val="50000"/>
+                  </a:schemeClr>
+                </a:solidFill>
+                <a:latin typeface="Avenir Book" panose="02000503020000020003" pitchFamily="2" charset="0"/>
+              </a:rPr>
+              <a:t>1.7 &lt;= z-score &lt;= 4.2</a:t>
+            </a:r>
+          </a:p>
+        </p:txBody>
+      </p:sp>
+      <p:cxnSp>
+        <p:nvCxnSpPr>
+          <p:cNvPr id="21" name="Straight Arrow Connector 20">
+            <a:extLst>
+              <a:ext uri="{FF2B5EF4-FFF2-40B4-BE49-F238E27FC236}">
+                <a16:creationId xmlns:a16="http://schemas.microsoft.com/office/drawing/2014/main" id="{E4262A6C-1B9A-10E3-AFE0-F59F00147A90}"/>
+              </a:ext>
+            </a:extLst>
+          </p:cNvPr>
+          <p:cNvCxnSpPr>
+            <a:cxnSpLocks/>
+          </p:cNvCxnSpPr>
+          <p:nvPr/>
+        </p:nvCxnSpPr>
+        <p:spPr>
+          <a:xfrm flipV="1">
+            <a:off x="4762500" y="4506213"/>
+            <a:ext cx="438149" cy="243587"/>
+          </a:xfrm>
+          <a:prstGeom prst="straightConnector1">
+            <a:avLst/>
+          </a:prstGeom>
+          <a:ln>
+            <a:solidFill>
+              <a:schemeClr val="bg2">
+                <a:lumMod val="50000"/>
+              </a:schemeClr>
+            </a:solidFill>
+            <a:tailEnd type="triangle"/>
+          </a:ln>
+        </p:spPr>
+        <p:style>
+          <a:lnRef idx="1">
+            <a:schemeClr val="accent1"/>
+          </a:lnRef>
+          <a:fillRef idx="0">
+            <a:schemeClr val="accent1"/>
+          </a:fillRef>
+          <a:effectRef idx="0">
+            <a:schemeClr val="accent1"/>
+          </a:effectRef>
+          <a:fontRef idx="minor">
+            <a:schemeClr val="tx1"/>
+          </a:fontRef>
+        </p:style>
+      </p:cxnSp>
+      <p:sp>
+        <p:nvSpPr>
+          <p:cNvPr id="24" name="TextBox 23">
+            <a:extLst>
+              <a:ext uri="{FF2B5EF4-FFF2-40B4-BE49-F238E27FC236}">
+                <a16:creationId xmlns:a16="http://schemas.microsoft.com/office/drawing/2014/main" id="{25725622-5E7D-ACB0-6751-2FAC3CFC341A}"/>
+              </a:ext>
+            </a:extLst>
+          </p:cNvPr>
+          <p:cNvSpPr txBox="1"/>
+          <p:nvPr/>
+        </p:nvSpPr>
+        <p:spPr>
+          <a:xfrm>
+            <a:off x="3784600" y="4762500"/>
+            <a:ext cx="1250663" cy="369332"/>
+          </a:xfrm>
+          <a:prstGeom prst="rect">
+            <a:avLst/>
+          </a:prstGeom>
+          <a:noFill/>
+        </p:spPr>
+        <p:txBody>
+          <a:bodyPr wrap="none" rtlCol="0">
+            <a:spAutoFit/>
+          </a:bodyPr>
+          <a:lstStyle/>
+          <a:p>
+            <a:pPr algn="l"/>
+            <a:r>
+              <a:rPr lang="en-US">
+                <a:solidFill>
+                  <a:schemeClr val="bg2">
+                    <a:lumMod val="50000"/>
+                  </a:schemeClr>
+                </a:solidFill>
+                <a:latin typeface="Avenir Book" panose="02000503020000020003" pitchFamily="2" charset="0"/>
+              </a:rPr>
+              <a:t>all binders</a:t>
+            </a:r>
+          </a:p>
+        </p:txBody>
+      </p:sp>
+    </p:spTree>
+    <p:extLst>
+      <p:ext uri="{BB962C8B-B14F-4D97-AF65-F5344CB8AC3E}">
+        <p14:creationId xmlns:p14="http://schemas.microsoft.com/office/powerpoint/2010/main" val="2300690411"/>
+      </p:ext>
+    </p:extLst>
+  </p:cSld>
+  <p:clrMapOvr>
+    <a:masterClrMapping/>
+  </p:clrMapOvr>
+</p:sld>
+</file>
+
+<file path=ppt/slides/slide21.xml><?xml version="1.0" encoding="utf-8"?>
+<p:sld xmlns:a="http://schemas.openxmlformats.org/drawingml/2006/main" xmlns:r="http://schemas.openxmlformats.org/officeDocument/2006/relationships" xmlns:p="http://schemas.openxmlformats.org/presentationml/2006/main">
+  <p:cSld>
+    <p:spTree>
+      <p:nvGrpSpPr>
+        <p:cNvPr id="1" name="">
+          <a:extLst>
+            <a:ext uri="{FF2B5EF4-FFF2-40B4-BE49-F238E27FC236}">
               <a16:creationId xmlns:a16="http://schemas.microsoft.com/office/drawing/2014/main" id="{524C2A1E-CE82-911E-016A-36DFC0737C5E}"/>
             </a:ext>
           </a:extLst>
@@ -8412,10 +11949,763 @@
       </p:grpSpPr>
       <p:pic>
         <p:nvPicPr>
+          <p:cNvPr id="18" name="Picture 17">
+            <a:extLst>
+              <a:ext uri="{FF2B5EF4-FFF2-40B4-BE49-F238E27FC236}">
+                <a16:creationId xmlns:a16="http://schemas.microsoft.com/office/drawing/2014/main" id="{8F866817-3AC4-504C-7C18-AF30C8D3F09C}"/>
+              </a:ext>
+            </a:extLst>
+          </p:cNvPr>
+          <p:cNvPicPr>
+            <a:picLocks noChangeAspect="1"/>
+          </p:cNvPicPr>
+          <p:nvPr/>
+        </p:nvPicPr>
+        <p:blipFill>
+          <a:blip r:embed="rId2"/>
+          <a:srcRect r="1416"/>
+          <a:stretch>
+            <a:fillRect/>
+          </a:stretch>
+        </p:blipFill>
+        <p:spPr>
+          <a:xfrm>
+            <a:off x="1" y="1822893"/>
+            <a:ext cx="12090400" cy="3104707"/>
+          </a:xfrm>
+          <a:prstGeom prst="rect">
+            <a:avLst/>
+          </a:prstGeom>
+        </p:spPr>
+      </p:pic>
+      <p:sp>
+        <p:nvSpPr>
+          <p:cNvPr id="3" name="Oval 2">
+            <a:extLst>
+              <a:ext uri="{FF2B5EF4-FFF2-40B4-BE49-F238E27FC236}">
+                <a16:creationId xmlns:a16="http://schemas.microsoft.com/office/drawing/2014/main" id="{97AC13ED-7567-C223-3215-767AA0B8BC4A}"/>
+              </a:ext>
+            </a:extLst>
+          </p:cNvPr>
+          <p:cNvSpPr/>
+          <p:nvPr/>
+        </p:nvSpPr>
+        <p:spPr>
+          <a:xfrm>
+            <a:off x="640134" y="1613171"/>
+            <a:ext cx="1215958" cy="486383"/>
+          </a:xfrm>
+          <a:prstGeom prst="ellipse">
+            <a:avLst/>
+          </a:prstGeom>
+          <a:noFill/>
+          <a:ln>
+            <a:solidFill>
+              <a:srgbClr val="FF0000"/>
+            </a:solidFill>
+          </a:ln>
+        </p:spPr>
+        <p:style>
+          <a:lnRef idx="2">
+            <a:schemeClr val="accent1">
+              <a:shade val="15000"/>
+            </a:schemeClr>
+          </a:lnRef>
+          <a:fillRef idx="1">
+            <a:schemeClr val="accent1"/>
+          </a:fillRef>
+          <a:effectRef idx="0">
+            <a:schemeClr val="accent1"/>
+          </a:effectRef>
+          <a:fontRef idx="minor">
+            <a:schemeClr val="lt1"/>
+          </a:fontRef>
+        </p:style>
+        <p:txBody>
+          <a:bodyPr rtlCol="0" anchor="ctr"/>
+          <a:lstStyle/>
+          <a:p>
+            <a:pPr algn="ctr"/>
+            <a:endParaRPr lang="en-US"/>
+          </a:p>
+        </p:txBody>
+      </p:sp>
+      <p:cxnSp>
+        <p:nvCxnSpPr>
+          <p:cNvPr id="4" name="Straight Arrow Connector 3">
+            <a:extLst>
+              <a:ext uri="{FF2B5EF4-FFF2-40B4-BE49-F238E27FC236}">
+                <a16:creationId xmlns:a16="http://schemas.microsoft.com/office/drawing/2014/main" id="{8FFCE3CC-81B9-93E4-9445-A26411679CA4}"/>
+              </a:ext>
+            </a:extLst>
+          </p:cNvPr>
+          <p:cNvCxnSpPr>
+            <a:cxnSpLocks/>
+          </p:cNvCxnSpPr>
+          <p:nvPr/>
+        </p:nvCxnSpPr>
+        <p:spPr>
+          <a:xfrm flipH="1">
+            <a:off x="4051300" y="812800"/>
+            <a:ext cx="101600" cy="863600"/>
+          </a:xfrm>
+          <a:prstGeom prst="straightConnector1">
+            <a:avLst/>
+          </a:prstGeom>
+          <a:ln>
+            <a:solidFill>
+              <a:srgbClr val="FF0000"/>
+            </a:solidFill>
+            <a:tailEnd type="triangle"/>
+          </a:ln>
+        </p:spPr>
+        <p:style>
+          <a:lnRef idx="1">
+            <a:schemeClr val="accent1"/>
+          </a:lnRef>
+          <a:fillRef idx="0">
+            <a:schemeClr val="accent1"/>
+          </a:fillRef>
+          <a:effectRef idx="0">
+            <a:schemeClr val="accent1"/>
+          </a:effectRef>
+          <a:fontRef idx="minor">
+            <a:schemeClr val="tx1"/>
+          </a:fontRef>
+        </p:style>
+      </p:cxnSp>
+      <p:cxnSp>
+        <p:nvCxnSpPr>
+          <p:cNvPr id="5" name="Straight Arrow Connector 4">
+            <a:extLst>
+              <a:ext uri="{FF2B5EF4-FFF2-40B4-BE49-F238E27FC236}">
+                <a16:creationId xmlns:a16="http://schemas.microsoft.com/office/drawing/2014/main" id="{3262D718-EEE4-6AD9-F68D-B3DF41FB0F53}"/>
+              </a:ext>
+            </a:extLst>
+          </p:cNvPr>
+          <p:cNvCxnSpPr>
+            <a:cxnSpLocks/>
+          </p:cNvCxnSpPr>
+          <p:nvPr/>
+        </p:nvCxnSpPr>
+        <p:spPr>
+          <a:xfrm>
+            <a:off x="4483100" y="812800"/>
+            <a:ext cx="1397000" cy="838200"/>
+          </a:xfrm>
+          <a:prstGeom prst="straightConnector1">
+            <a:avLst/>
+          </a:prstGeom>
+          <a:ln>
+            <a:solidFill>
+              <a:srgbClr val="FF0000"/>
+            </a:solidFill>
+            <a:tailEnd type="triangle"/>
+          </a:ln>
+        </p:spPr>
+        <p:style>
+          <a:lnRef idx="1">
+            <a:schemeClr val="accent1"/>
+          </a:lnRef>
+          <a:fillRef idx="0">
+            <a:schemeClr val="accent1"/>
+          </a:fillRef>
+          <a:effectRef idx="0">
+            <a:schemeClr val="accent1"/>
+          </a:effectRef>
+          <a:fontRef idx="minor">
+            <a:schemeClr val="tx1"/>
+          </a:fontRef>
+        </p:style>
+      </p:cxnSp>
+      <p:sp>
+        <p:nvSpPr>
+          <p:cNvPr id="6" name="Oval 5">
+            <a:extLst>
+              <a:ext uri="{FF2B5EF4-FFF2-40B4-BE49-F238E27FC236}">
+                <a16:creationId xmlns:a16="http://schemas.microsoft.com/office/drawing/2014/main" id="{A5DF5866-3C16-BA0E-4F6A-24661702DBC8}"/>
+              </a:ext>
+            </a:extLst>
+          </p:cNvPr>
+          <p:cNvSpPr/>
+          <p:nvPr/>
+        </p:nvSpPr>
+        <p:spPr>
+          <a:xfrm>
+            <a:off x="2869658" y="1718554"/>
+            <a:ext cx="2057941" cy="486383"/>
+          </a:xfrm>
+          <a:prstGeom prst="ellipse">
+            <a:avLst/>
+          </a:prstGeom>
+          <a:noFill/>
+          <a:ln>
+            <a:solidFill>
+              <a:srgbClr val="FF0000"/>
+            </a:solidFill>
+          </a:ln>
+        </p:spPr>
+        <p:style>
+          <a:lnRef idx="2">
+            <a:schemeClr val="accent1">
+              <a:shade val="15000"/>
+            </a:schemeClr>
+          </a:lnRef>
+          <a:fillRef idx="1">
+            <a:schemeClr val="accent1"/>
+          </a:fillRef>
+          <a:effectRef idx="0">
+            <a:schemeClr val="accent1"/>
+          </a:effectRef>
+          <a:fontRef idx="minor">
+            <a:schemeClr val="lt1"/>
+          </a:fontRef>
+        </p:style>
+        <p:txBody>
+          <a:bodyPr rtlCol="0" anchor="ctr"/>
+          <a:lstStyle/>
+          <a:p>
+            <a:pPr algn="ctr"/>
+            <a:endParaRPr lang="en-US"/>
+          </a:p>
+        </p:txBody>
+      </p:sp>
+      <p:sp>
+        <p:nvSpPr>
+          <p:cNvPr id="7" name="Oval 6">
+            <a:extLst>
+              <a:ext uri="{FF2B5EF4-FFF2-40B4-BE49-F238E27FC236}">
+                <a16:creationId xmlns:a16="http://schemas.microsoft.com/office/drawing/2014/main" id="{926A480B-738F-B65E-E91F-DA5CED46B9AB}"/>
+              </a:ext>
+            </a:extLst>
+          </p:cNvPr>
+          <p:cNvSpPr/>
+          <p:nvPr/>
+        </p:nvSpPr>
+        <p:spPr>
+          <a:xfrm>
+            <a:off x="5232940" y="1689371"/>
+            <a:ext cx="1967960" cy="486383"/>
+          </a:xfrm>
+          <a:prstGeom prst="ellipse">
+            <a:avLst/>
+          </a:prstGeom>
+          <a:noFill/>
+          <a:ln>
+            <a:solidFill>
+              <a:srgbClr val="FF0000"/>
+            </a:solidFill>
+          </a:ln>
+        </p:spPr>
+        <p:style>
+          <a:lnRef idx="2">
+            <a:schemeClr val="accent1">
+              <a:shade val="15000"/>
+            </a:schemeClr>
+          </a:lnRef>
+          <a:fillRef idx="1">
+            <a:schemeClr val="accent1"/>
+          </a:fillRef>
+          <a:effectRef idx="0">
+            <a:schemeClr val="accent1"/>
+          </a:effectRef>
+          <a:fontRef idx="minor">
+            <a:schemeClr val="lt1"/>
+          </a:fontRef>
+        </p:style>
+        <p:txBody>
+          <a:bodyPr rtlCol="0" anchor="ctr"/>
+          <a:lstStyle/>
+          <a:p>
+            <a:pPr algn="ctr"/>
+            <a:endParaRPr lang="en-US"/>
+          </a:p>
+        </p:txBody>
+      </p:sp>
+      <p:sp>
+        <p:nvSpPr>
+          <p:cNvPr id="8" name="TextBox 7">
+            <a:extLst>
+              <a:ext uri="{FF2B5EF4-FFF2-40B4-BE49-F238E27FC236}">
+                <a16:creationId xmlns:a16="http://schemas.microsoft.com/office/drawing/2014/main" id="{B6AC5FF7-AD20-B529-4384-97EE5EB3E4DF}"/>
+              </a:ext>
+            </a:extLst>
+          </p:cNvPr>
+          <p:cNvSpPr txBox="1"/>
+          <p:nvPr/>
+        </p:nvSpPr>
+        <p:spPr>
+          <a:xfrm>
+            <a:off x="3686783" y="330740"/>
+            <a:ext cx="1029449" cy="369332"/>
+          </a:xfrm>
+          <a:prstGeom prst="rect">
+            <a:avLst/>
+          </a:prstGeom>
+          <a:noFill/>
+        </p:spPr>
+        <p:txBody>
+          <a:bodyPr wrap="none" rtlCol="0">
+            <a:spAutoFit/>
+          </a:bodyPr>
+          <a:lstStyle/>
+          <a:p>
+            <a:pPr algn="l"/>
+            <a:r>
+              <a:rPr lang="en-US">
+                <a:solidFill>
+                  <a:srgbClr val="FF0000"/>
+                </a:solidFill>
+                <a:latin typeface="Avenir Book" panose="02000503020000020003" pitchFamily="2" charset="0"/>
+              </a:rPr>
+              <a:t>test sets</a:t>
+            </a:r>
+          </a:p>
+        </p:txBody>
+      </p:sp>
+      <p:cxnSp>
+        <p:nvCxnSpPr>
+          <p:cNvPr id="9" name="Straight Arrow Connector 8">
+            <a:extLst>
+              <a:ext uri="{FF2B5EF4-FFF2-40B4-BE49-F238E27FC236}">
+                <a16:creationId xmlns:a16="http://schemas.microsoft.com/office/drawing/2014/main" id="{3BA9BC43-B2A0-8B26-731E-93F9DF7AF5BD}"/>
+              </a:ext>
+            </a:extLst>
+          </p:cNvPr>
+          <p:cNvCxnSpPr>
+            <a:cxnSpLocks/>
+            <a:endCxn id="3" idx="7"/>
+          </p:cNvCxnSpPr>
+          <p:nvPr/>
+        </p:nvCxnSpPr>
+        <p:spPr>
+          <a:xfrm flipH="1">
+            <a:off x="1678019" y="660400"/>
+            <a:ext cx="1928781" cy="1024000"/>
+          </a:xfrm>
+          <a:prstGeom prst="straightConnector1">
+            <a:avLst/>
+          </a:prstGeom>
+          <a:ln>
+            <a:solidFill>
+              <a:srgbClr val="FF0000"/>
+            </a:solidFill>
+            <a:tailEnd type="triangle"/>
+          </a:ln>
+        </p:spPr>
+        <p:style>
+          <a:lnRef idx="1">
+            <a:schemeClr val="accent1"/>
+          </a:lnRef>
+          <a:fillRef idx="0">
+            <a:schemeClr val="accent1"/>
+          </a:fillRef>
+          <a:effectRef idx="0">
+            <a:schemeClr val="accent1"/>
+          </a:effectRef>
+          <a:fontRef idx="minor">
+            <a:schemeClr val="tx1"/>
+          </a:fontRef>
+        </p:style>
+      </p:cxnSp>
+      <p:sp>
+        <p:nvSpPr>
+          <p:cNvPr id="13" name="Oval 12">
+            <a:extLst>
+              <a:ext uri="{FF2B5EF4-FFF2-40B4-BE49-F238E27FC236}">
+                <a16:creationId xmlns:a16="http://schemas.microsoft.com/office/drawing/2014/main" id="{BD5DE0A7-4D8D-CE31-3102-CF72FEACC6B1}"/>
+              </a:ext>
+            </a:extLst>
+          </p:cNvPr>
+          <p:cNvSpPr/>
+          <p:nvPr/>
+        </p:nvSpPr>
+        <p:spPr>
+          <a:xfrm>
+            <a:off x="7684040" y="1714771"/>
+            <a:ext cx="1967960" cy="486383"/>
+          </a:xfrm>
+          <a:prstGeom prst="ellipse">
+            <a:avLst/>
+          </a:prstGeom>
+          <a:noFill/>
+          <a:ln>
+            <a:solidFill>
+              <a:srgbClr val="FF0000"/>
+            </a:solidFill>
+          </a:ln>
+        </p:spPr>
+        <p:style>
+          <a:lnRef idx="2">
+            <a:schemeClr val="accent1">
+              <a:shade val="15000"/>
+            </a:schemeClr>
+          </a:lnRef>
+          <a:fillRef idx="1">
+            <a:schemeClr val="accent1"/>
+          </a:fillRef>
+          <a:effectRef idx="0">
+            <a:schemeClr val="accent1"/>
+          </a:effectRef>
+          <a:fontRef idx="minor">
+            <a:schemeClr val="lt1"/>
+          </a:fontRef>
+        </p:style>
+        <p:txBody>
+          <a:bodyPr rtlCol="0" anchor="ctr"/>
+          <a:lstStyle/>
+          <a:p>
+            <a:pPr algn="ctr"/>
+            <a:endParaRPr lang="en-US"/>
+          </a:p>
+        </p:txBody>
+      </p:sp>
+      <p:cxnSp>
+        <p:nvCxnSpPr>
+          <p:cNvPr id="14" name="Straight Arrow Connector 13">
+            <a:extLst>
+              <a:ext uri="{FF2B5EF4-FFF2-40B4-BE49-F238E27FC236}">
+                <a16:creationId xmlns:a16="http://schemas.microsoft.com/office/drawing/2014/main" id="{8DEF11A7-604D-EB4D-2411-AA27F7EDCA82}"/>
+              </a:ext>
+            </a:extLst>
+          </p:cNvPr>
+          <p:cNvCxnSpPr>
+            <a:cxnSpLocks/>
+          </p:cNvCxnSpPr>
+          <p:nvPr/>
+        </p:nvCxnSpPr>
+        <p:spPr>
+          <a:xfrm>
+            <a:off x="4749800" y="774700"/>
+            <a:ext cx="3708400" cy="901700"/>
+          </a:xfrm>
+          <a:prstGeom prst="straightConnector1">
+            <a:avLst/>
+          </a:prstGeom>
+          <a:ln>
+            <a:solidFill>
+              <a:srgbClr val="FF0000"/>
+            </a:solidFill>
+            <a:tailEnd type="triangle"/>
+          </a:ln>
+        </p:spPr>
+        <p:style>
+          <a:lnRef idx="1">
+            <a:schemeClr val="accent1"/>
+          </a:lnRef>
+          <a:fillRef idx="0">
+            <a:schemeClr val="accent1"/>
+          </a:fillRef>
+          <a:effectRef idx="0">
+            <a:schemeClr val="accent1"/>
+          </a:effectRef>
+          <a:fontRef idx="minor">
+            <a:schemeClr val="tx1"/>
+          </a:fontRef>
+        </p:style>
+      </p:cxnSp>
+      <p:cxnSp>
+        <p:nvCxnSpPr>
+          <p:cNvPr id="16" name="Straight Arrow Connector 15">
+            <a:extLst>
+              <a:ext uri="{FF2B5EF4-FFF2-40B4-BE49-F238E27FC236}">
+                <a16:creationId xmlns:a16="http://schemas.microsoft.com/office/drawing/2014/main" id="{67AA62F1-90FA-F26E-10BF-463EFBD5CEAF}"/>
+              </a:ext>
+            </a:extLst>
+          </p:cNvPr>
+          <p:cNvCxnSpPr>
+            <a:cxnSpLocks/>
+          </p:cNvCxnSpPr>
+          <p:nvPr/>
+        </p:nvCxnSpPr>
+        <p:spPr>
+          <a:xfrm flipV="1">
+            <a:off x="476655" y="4885717"/>
+            <a:ext cx="0" cy="549883"/>
+          </a:xfrm>
+          <a:prstGeom prst="straightConnector1">
+            <a:avLst/>
+          </a:prstGeom>
+          <a:ln>
+            <a:solidFill>
+              <a:srgbClr val="FF0000"/>
+            </a:solidFill>
+            <a:tailEnd type="triangle"/>
+          </a:ln>
+        </p:spPr>
+        <p:style>
+          <a:lnRef idx="1">
+            <a:schemeClr val="accent1"/>
+          </a:lnRef>
+          <a:fillRef idx="0">
+            <a:schemeClr val="accent1"/>
+          </a:fillRef>
+          <a:effectRef idx="0">
+            <a:schemeClr val="accent1"/>
+          </a:effectRef>
+          <a:fontRef idx="minor">
+            <a:schemeClr val="tx1"/>
+          </a:fontRef>
+        </p:style>
+      </p:cxnSp>
+      <p:sp>
+        <p:nvSpPr>
+          <p:cNvPr id="17" name="TextBox 16">
+            <a:extLst>
+              <a:ext uri="{FF2B5EF4-FFF2-40B4-BE49-F238E27FC236}">
+                <a16:creationId xmlns:a16="http://schemas.microsoft.com/office/drawing/2014/main" id="{1F0F0DB2-9E5F-A4E2-2BA0-F27FCB5738F6}"/>
+              </a:ext>
+            </a:extLst>
+          </p:cNvPr>
+          <p:cNvSpPr txBox="1"/>
+          <p:nvPr/>
+        </p:nvSpPr>
+        <p:spPr>
+          <a:xfrm>
+            <a:off x="88900" y="5495858"/>
+            <a:ext cx="894797" cy="276999"/>
+          </a:xfrm>
+          <a:prstGeom prst="rect">
+            <a:avLst/>
+          </a:prstGeom>
+          <a:noFill/>
+        </p:spPr>
+        <p:txBody>
+          <a:bodyPr wrap="none" rtlCol="0">
+            <a:spAutoFit/>
+          </a:bodyPr>
+          <a:lstStyle/>
+          <a:p>
+            <a:pPr algn="l"/>
+            <a:r>
+              <a:rPr lang="en-US" sz="1200">
+                <a:solidFill>
+                  <a:srgbClr val="FF0000"/>
+                </a:solidFill>
+                <a:latin typeface="Avenir Book" panose="02000503020000020003" pitchFamily="2" charset="0"/>
+              </a:rPr>
+              <a:t>all binders</a:t>
+            </a:r>
+          </a:p>
+        </p:txBody>
+      </p:sp>
+      <p:sp>
+        <p:nvSpPr>
+          <p:cNvPr id="20" name="Oval 19">
+            <a:extLst>
+              <a:ext uri="{FF2B5EF4-FFF2-40B4-BE49-F238E27FC236}">
+                <a16:creationId xmlns:a16="http://schemas.microsoft.com/office/drawing/2014/main" id="{7389711D-A07B-3754-B95E-EA75E12450C3}"/>
+              </a:ext>
+            </a:extLst>
+          </p:cNvPr>
+          <p:cNvSpPr/>
+          <p:nvPr/>
+        </p:nvSpPr>
+        <p:spPr>
+          <a:xfrm>
+            <a:off x="10224040" y="1676671"/>
+            <a:ext cx="1801383" cy="486383"/>
+          </a:xfrm>
+          <a:prstGeom prst="ellipse">
+            <a:avLst/>
+          </a:prstGeom>
+          <a:noFill/>
+          <a:ln>
+            <a:solidFill>
+              <a:srgbClr val="FF0000"/>
+            </a:solidFill>
+          </a:ln>
+        </p:spPr>
+        <p:style>
+          <a:lnRef idx="2">
+            <a:schemeClr val="accent1">
+              <a:shade val="15000"/>
+            </a:schemeClr>
+          </a:lnRef>
+          <a:fillRef idx="1">
+            <a:schemeClr val="accent1"/>
+          </a:fillRef>
+          <a:effectRef idx="0">
+            <a:schemeClr val="accent1"/>
+          </a:effectRef>
+          <a:fontRef idx="minor">
+            <a:schemeClr val="lt1"/>
+          </a:fontRef>
+        </p:style>
+        <p:txBody>
+          <a:bodyPr rtlCol="0" anchor="ctr"/>
+          <a:lstStyle/>
+          <a:p>
+            <a:pPr algn="ctr"/>
+            <a:endParaRPr lang="en-US"/>
+          </a:p>
+        </p:txBody>
+      </p:sp>
+      <p:cxnSp>
+        <p:nvCxnSpPr>
+          <p:cNvPr id="21" name="Straight Arrow Connector 20">
+            <a:extLst>
+              <a:ext uri="{FF2B5EF4-FFF2-40B4-BE49-F238E27FC236}">
+                <a16:creationId xmlns:a16="http://schemas.microsoft.com/office/drawing/2014/main" id="{F6F9209F-53F4-49F1-EEDC-D81BFD03AF22}"/>
+              </a:ext>
+            </a:extLst>
+          </p:cNvPr>
+          <p:cNvCxnSpPr>
+            <a:cxnSpLocks/>
+          </p:cNvCxnSpPr>
+          <p:nvPr/>
+        </p:nvCxnSpPr>
+        <p:spPr>
+          <a:xfrm>
+            <a:off x="4953000" y="660400"/>
+            <a:ext cx="5410200" cy="1079500"/>
+          </a:xfrm>
+          <a:prstGeom prst="straightConnector1">
+            <a:avLst/>
+          </a:prstGeom>
+          <a:ln>
+            <a:solidFill>
+              <a:srgbClr val="FF0000"/>
+            </a:solidFill>
+            <a:tailEnd type="triangle"/>
+          </a:ln>
+        </p:spPr>
+        <p:style>
+          <a:lnRef idx="1">
+            <a:schemeClr val="accent1"/>
+          </a:lnRef>
+          <a:fillRef idx="0">
+            <a:schemeClr val="accent1"/>
+          </a:fillRef>
+          <a:effectRef idx="0">
+            <a:schemeClr val="accent1"/>
+          </a:effectRef>
+          <a:fontRef idx="minor">
+            <a:schemeClr val="tx1"/>
+          </a:fontRef>
+        </p:style>
+      </p:cxnSp>
+      <p:cxnSp>
+        <p:nvCxnSpPr>
+          <p:cNvPr id="27" name="Straight Arrow Connector 26">
+            <a:extLst>
+              <a:ext uri="{FF2B5EF4-FFF2-40B4-BE49-F238E27FC236}">
+                <a16:creationId xmlns:a16="http://schemas.microsoft.com/office/drawing/2014/main" id="{CA58C25C-0AB4-5977-27AD-FEE9218AD8DB}"/>
+              </a:ext>
+            </a:extLst>
+          </p:cNvPr>
+          <p:cNvCxnSpPr>
+            <a:cxnSpLocks/>
+          </p:cNvCxnSpPr>
+          <p:nvPr/>
+        </p:nvCxnSpPr>
+        <p:spPr>
+          <a:xfrm>
+            <a:off x="3077308" y="1553308"/>
+            <a:ext cx="231530" cy="180730"/>
+          </a:xfrm>
+          <a:prstGeom prst="straightConnector1">
+            <a:avLst/>
+          </a:prstGeom>
+          <a:ln>
+            <a:solidFill>
+              <a:srgbClr val="FF0000"/>
+            </a:solidFill>
+            <a:tailEnd type="triangle"/>
+          </a:ln>
+        </p:spPr>
+        <p:style>
+          <a:lnRef idx="1">
+            <a:schemeClr val="accent1"/>
+          </a:lnRef>
+          <a:fillRef idx="0">
+            <a:schemeClr val="accent1"/>
+          </a:fillRef>
+          <a:effectRef idx="0">
+            <a:schemeClr val="accent1"/>
+          </a:effectRef>
+          <a:fontRef idx="minor">
+            <a:schemeClr val="tx1"/>
+          </a:fontRef>
+        </p:style>
+      </p:cxnSp>
+      <p:sp>
+        <p:nvSpPr>
+          <p:cNvPr id="28" name="TextBox 27">
+            <a:extLst>
+              <a:ext uri="{FF2B5EF4-FFF2-40B4-BE49-F238E27FC236}">
+                <a16:creationId xmlns:a16="http://schemas.microsoft.com/office/drawing/2014/main" id="{BC4628F7-18F8-7BD0-FA2F-AA27C605264A}"/>
+              </a:ext>
+            </a:extLst>
+          </p:cNvPr>
+          <p:cNvSpPr txBox="1"/>
+          <p:nvPr/>
+        </p:nvSpPr>
+        <p:spPr>
+          <a:xfrm>
+            <a:off x="2476500" y="1292158"/>
+            <a:ext cx="894797" cy="276999"/>
+          </a:xfrm>
+          <a:prstGeom prst="rect">
+            <a:avLst/>
+          </a:prstGeom>
+          <a:noFill/>
+        </p:spPr>
+        <p:txBody>
+          <a:bodyPr wrap="none" rtlCol="0">
+            <a:spAutoFit/>
+          </a:bodyPr>
+          <a:lstStyle/>
+          <a:p>
+            <a:pPr algn="l"/>
+            <a:r>
+              <a:rPr lang="en-US" sz="1200">
+                <a:solidFill>
+                  <a:srgbClr val="FF0000"/>
+                </a:solidFill>
+                <a:latin typeface="Avenir Book" panose="02000503020000020003" pitchFamily="2" charset="0"/>
+              </a:rPr>
+              <a:t>all binders</a:t>
+            </a:r>
+          </a:p>
+        </p:txBody>
+      </p:sp>
+    </p:spTree>
+    <p:extLst>
+      <p:ext uri="{BB962C8B-B14F-4D97-AF65-F5344CB8AC3E}">
+        <p14:creationId xmlns:p14="http://schemas.microsoft.com/office/powerpoint/2010/main" val="433725131"/>
+      </p:ext>
+    </p:extLst>
+  </p:cSld>
+  <p:clrMapOvr>
+    <a:masterClrMapping/>
+  </p:clrMapOvr>
+</p:sld>
+</file>
+
+<file path=ppt/slides/slide22.xml><?xml version="1.0" encoding="utf-8"?>
+<p:sld xmlns:a="http://schemas.openxmlformats.org/drawingml/2006/main" xmlns:r="http://schemas.openxmlformats.org/officeDocument/2006/relationships" xmlns:p="http://schemas.openxmlformats.org/presentationml/2006/main">
+  <p:cSld>
+    <p:spTree>
+      <p:nvGrpSpPr>
+        <p:cNvPr id="1" name=""/>
+        <p:cNvGrpSpPr/>
+        <p:nvPr/>
+      </p:nvGrpSpPr>
+      <p:grpSpPr>
+        <a:xfrm>
+          <a:off x="0" y="0"/>
+          <a:ext cx="0" cy="0"/>
+          <a:chOff x="0" y="0"/>
+          <a:chExt cx="0" cy="0"/>
+        </a:xfrm>
+      </p:grpSpPr>
+      <p:pic>
+        <p:nvPicPr>
           <p:cNvPr id="2" name="Picture 1">
             <a:extLst>
               <a:ext uri="{FF2B5EF4-FFF2-40B4-BE49-F238E27FC236}">
-                <a16:creationId xmlns:a16="http://schemas.microsoft.com/office/drawing/2014/main" id="{D90F3C25-A417-19ED-5FA8-D538E02007CA}"/>
+                <a16:creationId xmlns:a16="http://schemas.microsoft.com/office/drawing/2014/main" id="{B7F19422-1EBA-3125-59A9-6DDE2549638A}"/>
               </a:ext>
             </a:extLst>
           </p:cNvPr>
@@ -8432,18 +12722,583 @@
         </p:blipFill>
         <p:spPr>
           <a:xfrm>
-            <a:off x="128329" y="1548027"/>
-            <a:ext cx="12063671" cy="3774600"/>
+            <a:off x="2209800" y="811707"/>
+            <a:ext cx="7772400" cy="4113707"/>
           </a:xfrm>
           <a:prstGeom prst="rect">
             <a:avLst/>
           </a:prstGeom>
         </p:spPr>
       </p:pic>
+      <p:sp>
+        <p:nvSpPr>
+          <p:cNvPr id="3" name="TextBox 2">
+            <a:extLst>
+              <a:ext uri="{FF2B5EF4-FFF2-40B4-BE49-F238E27FC236}">
+                <a16:creationId xmlns:a16="http://schemas.microsoft.com/office/drawing/2014/main" id="{90900825-0149-5F26-440A-60452FE84483}"/>
+              </a:ext>
+            </a:extLst>
+          </p:cNvPr>
+          <p:cNvSpPr txBox="1"/>
+          <p:nvPr/>
+        </p:nvSpPr>
+        <p:spPr>
+          <a:xfrm>
+            <a:off x="501445" y="157316"/>
+            <a:ext cx="4200830" cy="369332"/>
+          </a:xfrm>
+          <a:prstGeom prst="rect">
+            <a:avLst/>
+          </a:prstGeom>
+          <a:noFill/>
+        </p:spPr>
+        <p:txBody>
+          <a:bodyPr wrap="none" rtlCol="0">
+            <a:spAutoFit/>
+          </a:bodyPr>
+          <a:lstStyle/>
+          <a:p>
+            <a:pPr algn="l"/>
+            <a:r>
+              <a:rPr lang="en-US">
+                <a:latin typeface="Avenir Book" panose="02000503020000020003" pitchFamily="2" charset="0"/>
+              </a:rPr>
+              <a:t>issue with how python handles regexes</a:t>
+            </a:r>
+          </a:p>
+        </p:txBody>
+      </p:sp>
+      <p:sp>
+        <p:nvSpPr>
+          <p:cNvPr id="4" name="TextBox 3">
+            <a:extLst>
+              <a:ext uri="{FF2B5EF4-FFF2-40B4-BE49-F238E27FC236}">
+                <a16:creationId xmlns:a16="http://schemas.microsoft.com/office/drawing/2014/main" id="{3A59761C-77B3-295C-DD35-97A0EA974AB6}"/>
+              </a:ext>
+            </a:extLst>
+          </p:cNvPr>
+          <p:cNvSpPr txBox="1"/>
+          <p:nvPr/>
+        </p:nvSpPr>
+        <p:spPr>
+          <a:xfrm>
+            <a:off x="353961" y="5663381"/>
+            <a:ext cx="11008783" cy="369332"/>
+          </a:xfrm>
+          <a:prstGeom prst="rect">
+            <a:avLst/>
+          </a:prstGeom>
+          <a:noFill/>
+        </p:spPr>
+        <p:txBody>
+          <a:bodyPr wrap="none" rtlCol="0">
+            <a:spAutoFit/>
+          </a:bodyPr>
+          <a:lstStyle/>
+          <a:p>
+            <a:pPr algn="l"/>
+            <a:r>
+              <a:rPr lang="en-US">
+                <a:latin typeface="Avenir Book" panose="02000503020000020003" pitchFamily="2" charset="0"/>
+              </a:rPr>
+              <a:t>For the starting dataset, when overlapping motifs were present, only the first (N-term) motif was counted </a:t>
+            </a:r>
+          </a:p>
+        </p:txBody>
+      </p:sp>
+      <p:cxnSp>
+        <p:nvCxnSpPr>
+          <p:cNvPr id="6" name="Straight Arrow Connector 5">
+            <a:extLst>
+              <a:ext uri="{FF2B5EF4-FFF2-40B4-BE49-F238E27FC236}">
+                <a16:creationId xmlns:a16="http://schemas.microsoft.com/office/drawing/2014/main" id="{17127F58-77FA-0E3A-9686-5B1B119453A9}"/>
+              </a:ext>
+            </a:extLst>
+          </p:cNvPr>
+          <p:cNvCxnSpPr>
+            <a:cxnSpLocks/>
+          </p:cNvCxnSpPr>
+          <p:nvPr/>
+        </p:nvCxnSpPr>
+        <p:spPr>
+          <a:xfrm flipH="1">
+            <a:off x="7970655" y="2686556"/>
+            <a:ext cx="728283" cy="906308"/>
+          </a:xfrm>
+          <a:prstGeom prst="straightConnector1">
+            <a:avLst/>
+          </a:prstGeom>
+          <a:ln>
+            <a:solidFill>
+              <a:srgbClr val="FF0000"/>
+            </a:solidFill>
+            <a:tailEnd type="triangle"/>
+          </a:ln>
+        </p:spPr>
+        <p:style>
+          <a:lnRef idx="1">
+            <a:schemeClr val="accent1"/>
+          </a:lnRef>
+          <a:fillRef idx="0">
+            <a:schemeClr val="accent1"/>
+          </a:fillRef>
+          <a:effectRef idx="0">
+            <a:schemeClr val="accent1"/>
+          </a:effectRef>
+          <a:fontRef idx="minor">
+            <a:schemeClr val="tx1"/>
+          </a:fontRef>
+        </p:style>
+      </p:cxnSp>
+      <p:sp>
+        <p:nvSpPr>
+          <p:cNvPr id="7" name="TextBox 6">
+            <a:extLst>
+              <a:ext uri="{FF2B5EF4-FFF2-40B4-BE49-F238E27FC236}">
+                <a16:creationId xmlns:a16="http://schemas.microsoft.com/office/drawing/2014/main" id="{2C90ADCA-79BE-E1AE-F375-080E6AEBA1D3}"/>
+              </a:ext>
+            </a:extLst>
+          </p:cNvPr>
+          <p:cNvSpPr txBox="1"/>
+          <p:nvPr/>
+        </p:nvSpPr>
+        <p:spPr>
+          <a:xfrm>
+            <a:off x="7841183" y="2281955"/>
+            <a:ext cx="1945404" cy="369332"/>
+          </a:xfrm>
+          <a:prstGeom prst="rect">
+            <a:avLst/>
+          </a:prstGeom>
+          <a:noFill/>
+        </p:spPr>
+        <p:txBody>
+          <a:bodyPr wrap="none" rtlCol="0">
+            <a:spAutoFit/>
+          </a:bodyPr>
+          <a:lstStyle/>
+          <a:p>
+            <a:pPr algn="l"/>
+            <a:r>
+              <a:rPr lang="en-US">
+                <a:solidFill>
+                  <a:srgbClr val="FF0000"/>
+                </a:solidFill>
+                <a:latin typeface="Avenir Book" panose="02000503020000020003" pitchFamily="2" charset="0"/>
+              </a:rPr>
+              <a:t>lookahead group</a:t>
+            </a:r>
+          </a:p>
+        </p:txBody>
+      </p:sp>
     </p:spTree>
     <p:extLst>
       <p:ext uri="{BB962C8B-B14F-4D97-AF65-F5344CB8AC3E}">
-        <p14:creationId xmlns:p14="http://schemas.microsoft.com/office/powerpoint/2010/main" val="433725131"/>
+        <p14:creationId xmlns:p14="http://schemas.microsoft.com/office/powerpoint/2010/main" val="3444858123"/>
+      </p:ext>
+    </p:extLst>
+  </p:cSld>
+  <p:clrMapOvr>
+    <a:masterClrMapping/>
+  </p:clrMapOvr>
+</p:sld>
+</file>
+
+<file path=ppt/slides/slide23.xml><?xml version="1.0" encoding="utf-8"?>
+<p:sld xmlns:a="http://schemas.openxmlformats.org/drawingml/2006/main" xmlns:r="http://schemas.openxmlformats.org/officeDocument/2006/relationships" xmlns:p="http://schemas.openxmlformats.org/presentationml/2006/main">
+  <p:cSld>
+    <p:spTree>
+      <p:nvGrpSpPr>
+        <p:cNvPr id="1" name=""/>
+        <p:cNvGrpSpPr/>
+        <p:nvPr/>
+      </p:nvGrpSpPr>
+      <p:grpSpPr>
+        <a:xfrm>
+          <a:off x="0" y="0"/>
+          <a:ext cx="0" cy="0"/>
+          <a:chOff x="0" y="0"/>
+          <a:chExt cx="0" cy="0"/>
+        </a:xfrm>
+      </p:grpSpPr>
+      <p:sp>
+        <p:nvSpPr>
+          <p:cNvPr id="2" name="TextBox 1">
+            <a:extLst>
+              <a:ext uri="{FF2B5EF4-FFF2-40B4-BE49-F238E27FC236}">
+                <a16:creationId xmlns:a16="http://schemas.microsoft.com/office/drawing/2014/main" id="{88D940A2-9C33-4DBB-BEC5-8D8B64C0D8AF}"/>
+              </a:ext>
+            </a:extLst>
+          </p:cNvPr>
+          <p:cNvSpPr txBox="1"/>
+          <p:nvPr/>
+        </p:nvSpPr>
+        <p:spPr>
+          <a:xfrm>
+            <a:off x="331773" y="242761"/>
+            <a:ext cx="1968809" cy="369332"/>
+          </a:xfrm>
+          <a:prstGeom prst="rect">
+            <a:avLst/>
+          </a:prstGeom>
+          <a:noFill/>
+        </p:spPr>
+        <p:txBody>
+          <a:bodyPr wrap="none" rtlCol="0">
+            <a:spAutoFit/>
+          </a:bodyPr>
+          <a:lstStyle/>
+          <a:p>
+            <a:pPr algn="l"/>
+            <a:r>
+              <a:rPr lang="en-US">
+                <a:latin typeface="Avenir Book" panose="02000503020000020003" pitchFamily="2" charset="0"/>
+              </a:rPr>
+              <a:t>Dataset summary</a:t>
+            </a:r>
+          </a:p>
+        </p:txBody>
+      </p:sp>
+      <p:sp>
+        <p:nvSpPr>
+          <p:cNvPr id="3" name="TextBox 2">
+            <a:extLst>
+              <a:ext uri="{FF2B5EF4-FFF2-40B4-BE49-F238E27FC236}">
+                <a16:creationId xmlns:a16="http://schemas.microsoft.com/office/drawing/2014/main" id="{EC29E047-9A65-3F7B-7EC1-752FD4E8F57D}"/>
+              </a:ext>
+            </a:extLst>
+          </p:cNvPr>
+          <p:cNvSpPr txBox="1"/>
+          <p:nvPr/>
+        </p:nvSpPr>
+        <p:spPr>
+          <a:xfrm>
+            <a:off x="283221" y="946768"/>
+            <a:ext cx="3515386" cy="369332"/>
+          </a:xfrm>
+          <a:prstGeom prst="rect">
+            <a:avLst/>
+          </a:prstGeom>
+          <a:noFill/>
+        </p:spPr>
+        <p:txBody>
+          <a:bodyPr wrap="none" rtlCol="0">
+            <a:spAutoFit/>
+          </a:bodyPr>
+          <a:lstStyle/>
+          <a:p>
+            <a:pPr algn="l"/>
+            <a:r>
+              <a:rPr lang="en-US">
+                <a:latin typeface="Avenir Book" panose="02000503020000020003" pitchFamily="2" charset="0"/>
+              </a:rPr>
+              <a:t>V1 – overlapping regex problem</a:t>
+            </a:r>
+          </a:p>
+        </p:txBody>
+      </p:sp>
+      <p:sp>
+        <p:nvSpPr>
+          <p:cNvPr id="4" name="TextBox 3">
+            <a:extLst>
+              <a:ext uri="{FF2B5EF4-FFF2-40B4-BE49-F238E27FC236}">
+                <a16:creationId xmlns:a16="http://schemas.microsoft.com/office/drawing/2014/main" id="{D365A184-9D75-5D2F-6AD8-C96B13D08452}"/>
+              </a:ext>
+            </a:extLst>
+          </p:cNvPr>
+          <p:cNvSpPr txBox="1"/>
+          <p:nvPr/>
+        </p:nvSpPr>
+        <p:spPr>
+          <a:xfrm>
+            <a:off x="354701" y="3025073"/>
+            <a:ext cx="4625625" cy="369332"/>
+          </a:xfrm>
+          <a:prstGeom prst="rect">
+            <a:avLst/>
+          </a:prstGeom>
+          <a:noFill/>
+        </p:spPr>
+        <p:txBody>
+          <a:bodyPr wrap="none" rtlCol="0">
+            <a:spAutoFit/>
+          </a:bodyPr>
+          <a:lstStyle/>
+          <a:p>
+            <a:pPr algn="l"/>
+            <a:r>
+              <a:rPr lang="en-US">
+                <a:latin typeface="Avenir Book" panose="02000503020000020003" pitchFamily="2" charset="0"/>
+              </a:rPr>
+              <a:t>V2 – removed any sequences with &gt;1 motif</a:t>
+            </a:r>
+          </a:p>
+        </p:txBody>
+      </p:sp>
+      <p:sp>
+        <p:nvSpPr>
+          <p:cNvPr id="5" name="TextBox 4">
+            <a:extLst>
+              <a:ext uri="{FF2B5EF4-FFF2-40B4-BE49-F238E27FC236}">
+                <a16:creationId xmlns:a16="http://schemas.microsoft.com/office/drawing/2014/main" id="{3A348A93-C4B6-A351-9941-AD682706E2A7}"/>
+              </a:ext>
+            </a:extLst>
+          </p:cNvPr>
+          <p:cNvSpPr txBox="1"/>
+          <p:nvPr/>
+        </p:nvSpPr>
+        <p:spPr>
+          <a:xfrm>
+            <a:off x="435621" y="4845780"/>
+            <a:ext cx="5052986" cy="369332"/>
+          </a:xfrm>
+          <a:prstGeom prst="rect">
+            <a:avLst/>
+          </a:prstGeom>
+          <a:noFill/>
+        </p:spPr>
+        <p:txBody>
+          <a:bodyPr wrap="none" rtlCol="0">
+            <a:spAutoFit/>
+          </a:bodyPr>
+          <a:lstStyle/>
+          <a:p>
+            <a:pPr algn="l"/>
+            <a:r>
+              <a:rPr lang="en-US">
+                <a:latin typeface="Avenir Book" panose="02000503020000020003" pitchFamily="2" charset="0"/>
+              </a:rPr>
+              <a:t>V3 – split all motif matches into separate 7mers</a:t>
+            </a:r>
+          </a:p>
+        </p:txBody>
+      </p:sp>
+      <p:sp>
+        <p:nvSpPr>
+          <p:cNvPr id="6" name="TextBox 5">
+            <a:extLst>
+              <a:ext uri="{FF2B5EF4-FFF2-40B4-BE49-F238E27FC236}">
+                <a16:creationId xmlns:a16="http://schemas.microsoft.com/office/drawing/2014/main" id="{8FEA0812-CAE0-7360-157B-E92A4EF691AE}"/>
+              </a:ext>
+            </a:extLst>
+          </p:cNvPr>
+          <p:cNvSpPr txBox="1"/>
+          <p:nvPr/>
+        </p:nvSpPr>
+        <p:spPr>
+          <a:xfrm>
+            <a:off x="493615" y="1335185"/>
+            <a:ext cx="4070293" cy="830997"/>
+          </a:xfrm>
+          <a:prstGeom prst="rect">
+            <a:avLst/>
+          </a:prstGeom>
+          <a:noFill/>
+        </p:spPr>
+        <p:txBody>
+          <a:bodyPr wrap="square" rtlCol="0">
+            <a:spAutoFit/>
+          </a:bodyPr>
+          <a:lstStyle/>
+          <a:p>
+            <a:r>
+              <a:rPr lang="en-US" sz="1600">
+                <a:solidFill>
+                  <a:schemeClr val="bg2">
+                    <a:lumMod val="50000"/>
+                  </a:schemeClr>
+                </a:solidFill>
+                <a:latin typeface="Avenir Book" panose="02000503020000020003" pitchFamily="2" charset="0"/>
+              </a:rPr>
+              <a:t>There is no rationale I can think of to justify using this set? only v2 or v3 make sense to me</a:t>
+            </a:r>
+          </a:p>
+        </p:txBody>
+      </p:sp>
+    </p:spTree>
+    <p:extLst>
+      <p:ext uri="{BB962C8B-B14F-4D97-AF65-F5344CB8AC3E}">
+        <p14:creationId xmlns:p14="http://schemas.microsoft.com/office/powerpoint/2010/main" val="2841465800"/>
+      </p:ext>
+    </p:extLst>
+  </p:cSld>
+  <p:clrMapOvr>
+    <a:masterClrMapping/>
+  </p:clrMapOvr>
+</p:sld>
+</file>
+
+<file path=ppt/slides/slide24.xml><?xml version="1.0" encoding="utf-8"?>
+<p:sld xmlns:a="http://schemas.openxmlformats.org/drawingml/2006/main" xmlns:r="http://schemas.openxmlformats.org/officeDocument/2006/relationships" xmlns:p="http://schemas.openxmlformats.org/presentationml/2006/main">
+  <p:cSld>
+    <p:spTree>
+      <p:nvGrpSpPr>
+        <p:cNvPr id="1" name="">
+          <a:extLst>
+            <a:ext uri="{FF2B5EF4-FFF2-40B4-BE49-F238E27FC236}">
+              <a16:creationId xmlns:a16="http://schemas.microsoft.com/office/drawing/2014/main" id="{334E72B1-290A-8287-862B-58723D90248D}"/>
+            </a:ext>
+          </a:extLst>
+        </p:cNvPr>
+        <p:cNvGrpSpPr/>
+        <p:nvPr/>
+      </p:nvGrpSpPr>
+      <p:grpSpPr>
+        <a:xfrm>
+          <a:off x="0" y="0"/>
+          <a:ext cx="0" cy="0"/>
+          <a:chOff x="0" y="0"/>
+          <a:chExt cx="0" cy="0"/>
+        </a:xfrm>
+      </p:grpSpPr>
+    </p:spTree>
+    <p:extLst>
+      <p:ext uri="{BB962C8B-B14F-4D97-AF65-F5344CB8AC3E}">
+        <p14:creationId xmlns:p14="http://schemas.microsoft.com/office/powerpoint/2010/main" val="4067837191"/>
+      </p:ext>
+    </p:extLst>
+  </p:cSld>
+  <p:clrMapOvr>
+    <a:masterClrMapping/>
+  </p:clrMapOvr>
+</p:sld>
+</file>
+
+<file path=ppt/slides/slide25.xml><?xml version="1.0" encoding="utf-8"?>
+<p:sld xmlns:a="http://schemas.openxmlformats.org/drawingml/2006/main" xmlns:r="http://schemas.openxmlformats.org/officeDocument/2006/relationships" xmlns:p="http://schemas.openxmlformats.org/presentationml/2006/main">
+  <p:cSld>
+    <p:spTree>
+      <p:nvGrpSpPr>
+        <p:cNvPr id="1" name="">
+          <a:extLst>
+            <a:ext uri="{FF2B5EF4-FFF2-40B4-BE49-F238E27FC236}">
+              <a16:creationId xmlns:a16="http://schemas.microsoft.com/office/drawing/2014/main" id="{3BCB343C-2653-BF34-9220-B5BDF9C79783}"/>
+            </a:ext>
+          </a:extLst>
+        </p:cNvPr>
+        <p:cNvGrpSpPr/>
+        <p:nvPr/>
+      </p:nvGrpSpPr>
+      <p:grpSpPr>
+        <a:xfrm>
+          <a:off x="0" y="0"/>
+          <a:ext cx="0" cy="0"/>
+          <a:chOff x="0" y="0"/>
+          <a:chExt cx="0" cy="0"/>
+        </a:xfrm>
+      </p:grpSpPr>
+    </p:spTree>
+    <p:extLst>
+      <p:ext uri="{BB962C8B-B14F-4D97-AF65-F5344CB8AC3E}">
+        <p14:creationId xmlns:p14="http://schemas.microsoft.com/office/powerpoint/2010/main" val="3456952952"/>
+      </p:ext>
+    </p:extLst>
+  </p:cSld>
+  <p:clrMapOvr>
+    <a:masterClrMapping/>
+  </p:clrMapOvr>
+</p:sld>
+</file>
+
+<file path=ppt/slides/slide26.xml><?xml version="1.0" encoding="utf-8"?>
+<p:sld xmlns:a="http://schemas.openxmlformats.org/drawingml/2006/main" xmlns:r="http://schemas.openxmlformats.org/officeDocument/2006/relationships" xmlns:p="http://schemas.openxmlformats.org/presentationml/2006/main">
+  <p:cSld>
+    <p:spTree>
+      <p:nvGrpSpPr>
+        <p:cNvPr id="1" name="">
+          <a:extLst>
+            <a:ext uri="{FF2B5EF4-FFF2-40B4-BE49-F238E27FC236}">
+              <a16:creationId xmlns:a16="http://schemas.microsoft.com/office/drawing/2014/main" id="{5CAFCF27-58CE-A96F-7037-476C791D3948}"/>
+            </a:ext>
+          </a:extLst>
+        </p:cNvPr>
+        <p:cNvGrpSpPr/>
+        <p:nvPr/>
+      </p:nvGrpSpPr>
+      <p:grpSpPr>
+        <a:xfrm>
+          <a:off x="0" y="0"/>
+          <a:ext cx="0" cy="0"/>
+          <a:chOff x="0" y="0"/>
+          <a:chExt cx="0" cy="0"/>
+        </a:xfrm>
+      </p:grpSpPr>
+    </p:spTree>
+    <p:extLst>
+      <p:ext uri="{BB962C8B-B14F-4D97-AF65-F5344CB8AC3E}">
+        <p14:creationId xmlns:p14="http://schemas.microsoft.com/office/powerpoint/2010/main" val="179719358"/>
+      </p:ext>
+    </p:extLst>
+  </p:cSld>
+  <p:clrMapOvr>
+    <a:masterClrMapping/>
+  </p:clrMapOvr>
+</p:sld>
+</file>
+
+<file path=ppt/slides/slide27.xml><?xml version="1.0" encoding="utf-8"?>
+<p:sld xmlns:a="http://schemas.openxmlformats.org/drawingml/2006/main" xmlns:r="http://schemas.openxmlformats.org/officeDocument/2006/relationships" xmlns:p="http://schemas.openxmlformats.org/presentationml/2006/main">
+  <p:cSld>
+    <p:spTree>
+      <p:nvGrpSpPr>
+        <p:cNvPr id="1" name="">
+          <a:extLst>
+            <a:ext uri="{FF2B5EF4-FFF2-40B4-BE49-F238E27FC236}">
+              <a16:creationId xmlns:a16="http://schemas.microsoft.com/office/drawing/2014/main" id="{65E8301F-7EE8-CB15-C208-418EE1B2F2B1}"/>
+            </a:ext>
+          </a:extLst>
+        </p:cNvPr>
+        <p:cNvGrpSpPr/>
+        <p:nvPr/>
+      </p:nvGrpSpPr>
+      <p:grpSpPr>
+        <a:xfrm>
+          <a:off x="0" y="0"/>
+          <a:ext cx="0" cy="0"/>
+          <a:chOff x="0" y="0"/>
+          <a:chExt cx="0" cy="0"/>
+        </a:xfrm>
+      </p:grpSpPr>
+    </p:spTree>
+    <p:extLst>
+      <p:ext uri="{BB962C8B-B14F-4D97-AF65-F5344CB8AC3E}">
+        <p14:creationId xmlns:p14="http://schemas.microsoft.com/office/powerpoint/2010/main" val="2005919931"/>
+      </p:ext>
+    </p:extLst>
+  </p:cSld>
+  <p:clrMapOvr>
+    <a:masterClrMapping/>
+  </p:clrMapOvr>
+</p:sld>
+</file>
+
+<file path=ppt/slides/slide28.xml><?xml version="1.0" encoding="utf-8"?>
+<p:sld xmlns:a="http://schemas.openxmlformats.org/drawingml/2006/main" xmlns:r="http://schemas.openxmlformats.org/officeDocument/2006/relationships" xmlns:p="http://schemas.openxmlformats.org/presentationml/2006/main">
+  <p:cSld>
+    <p:spTree>
+      <p:nvGrpSpPr>
+        <p:cNvPr id="1" name="">
+          <a:extLst>
+            <a:ext uri="{FF2B5EF4-FFF2-40B4-BE49-F238E27FC236}">
+              <a16:creationId xmlns:a16="http://schemas.microsoft.com/office/drawing/2014/main" id="{3C33517C-2D99-0695-1E2F-447C83356D16}"/>
+            </a:ext>
+          </a:extLst>
+        </p:cNvPr>
+        <p:cNvGrpSpPr/>
+        <p:nvPr/>
+      </p:nvGrpSpPr>
+      <p:grpSpPr>
+        <a:xfrm>
+          <a:off x="0" y="0"/>
+          <a:ext cx="0" cy="0"/>
+          <a:chOff x="0" y="0"/>
+          <a:chExt cx="0" cy="0"/>
+        </a:xfrm>
+      </p:grpSpPr>
+    </p:spTree>
+    <p:extLst>
+      <p:ext uri="{BB962C8B-B14F-4D97-AF65-F5344CB8AC3E}">
+        <p14:creationId xmlns:p14="http://schemas.microsoft.com/office/powerpoint/2010/main" val="1520899571"/>
       </p:ext>
     </p:extLst>
   </p:cSld>
